--- a/clase3/teorica_3.pptx
+++ b/clase3/teorica_3.pptx
@@ -10,7 +10,7 @@
   <p:sldIdLst>
     <p:sldId id="256" r:id="rId2"/>
     <p:sldId id="264" r:id="rId3"/>
-    <p:sldId id="350" r:id="rId4"/>
+    <p:sldId id="351" r:id="rId4"/>
     <p:sldId id="265" r:id="rId5"/>
     <p:sldId id="267" r:id="rId6"/>
     <p:sldId id="268" r:id="rId7"/>
@@ -3571,7 +3571,11 @@
               </a:spcAft>
               <a:buNone/>
             </a:pPr>
-            <a:endParaRPr/>
+            <a:r>
+              <a:rPr lang="es-MX" dirty="0"/>
+              <a:t>En todos los casos mostramos ejemplos</a:t>
+            </a:r>
+            <a:endParaRPr dirty="0"/>
           </a:p>
         </p:txBody>
       </p:sp>
@@ -13365,8 +13369,8 @@
           </a:p>
         </p:txBody>
       </p:sp>
-      <mc:AlternateContent xmlns:mc="http://schemas.openxmlformats.org/markup-compatibility/2006">
-        <mc:Choice xmlns:a14="http://schemas.microsoft.com/office/drawing/2010/main" Requires="a14">
+      <mc:AlternateContent xmlns:mc="http://schemas.openxmlformats.org/markup-compatibility/2006" xmlns:a14="http://schemas.microsoft.com/office/drawing/2010/main">
+        <mc:Choice Requires="a14">
           <p:sp>
             <p:nvSpPr>
               <p:cNvPr id="6" name="Google Shape;182;p31">
@@ -13482,7 +13486,7 @@
             </p:txBody>
           </p:sp>
         </mc:Choice>
-        <mc:Fallback>
+        <mc:Fallback xmlns="">
           <p:sp>
             <p:nvSpPr>
               <p:cNvPr id="6" name="Google Shape;182;p31">
@@ -14391,19 +14395,25 @@
       </p:sp>
       <p:graphicFrame>
         <p:nvGraphicFramePr>
-          <p:cNvPr id="121" name="Google Shape;121;p21"/>
+          <p:cNvPr id="4" name="Google Shape;121;p21">
+            <a:extLst>
+              <a:ext uri="{FF2B5EF4-FFF2-40B4-BE49-F238E27FC236}">
+                <a16:creationId xmlns:a16="http://schemas.microsoft.com/office/drawing/2014/main" id="{750918C7-7FD7-4DBE-BC85-5FBD6DA496BA}"/>
+              </a:ext>
+            </a:extLst>
+          </p:cNvPr>
           <p:cNvGraphicFramePr/>
           <p:nvPr>
             <p:extLst>
               <p:ext uri="{D42A27DB-BD31-4B8C-83A1-F6EECF244321}">
-                <p14:modId xmlns:p14="http://schemas.microsoft.com/office/powerpoint/2010/main" val="556933559"/>
+                <p14:modId xmlns:p14="http://schemas.microsoft.com/office/powerpoint/2010/main" val="2513364758"/>
               </p:ext>
             </p:extLst>
           </p:nvPr>
         </p:nvGraphicFramePr>
         <p:xfrm>
           <a:off x="311750" y="1238250"/>
-          <a:ext cx="8520550" cy="3728890"/>
+          <a:ext cx="8584913" cy="3708502"/>
         </p:xfrm>
         <a:graphic>
           <a:graphicData uri="http://schemas.openxmlformats.org/drawingml/2006/table">
@@ -14413,28 +14423,21 @@
                 <a:tableStyleId>{272BD5B9-A1A1-4B16-8F28-979374803D1B}</a:tableStyleId>
               </a:tblPr>
               <a:tblGrid>
-                <a:gridCol w="936758">
+                <a:gridCol w="1093973">
                   <a:extLst>
                     <a:ext uri="{9D8B030D-6E8A-4147-A177-3AD203B41FA5}">
                       <a16:colId xmlns:a16="http://schemas.microsoft.com/office/drawing/2014/main" val="20000"/>
                     </a:ext>
                   </a:extLst>
                 </a:gridCol>
-                <a:gridCol w="1169377">
-                  <a:extLst>
-                    <a:ext uri="{9D8B030D-6E8A-4147-A177-3AD203B41FA5}">
-                      <a16:colId xmlns:a16="http://schemas.microsoft.com/office/drawing/2014/main" val="20001"/>
-                    </a:ext>
-                  </a:extLst>
-                </a:gridCol>
-                <a:gridCol w="3648807">
+                <a:gridCol w="3915870">
                   <a:extLst>
                     <a:ext uri="{9D8B030D-6E8A-4147-A177-3AD203B41FA5}">
                       <a16:colId xmlns:a16="http://schemas.microsoft.com/office/drawing/2014/main" val="20002"/>
                     </a:ext>
                   </a:extLst>
                 </a:gridCol>
-                <a:gridCol w="2765608">
+                <a:gridCol w="3575070">
                   <a:extLst>
                     <a:ext uri="{9D8B030D-6E8A-4147-A177-3AD203B41FA5}">
                       <a16:colId xmlns:a16="http://schemas.microsoft.com/office/drawing/2014/main" val="20003"/>
@@ -14442,7 +14445,7 @@
                   </a:extLst>
                 </a:gridCol>
               </a:tblGrid>
-              <a:tr h="505525">
+              <a:tr h="514654">
                 <a:tc>
                   <a:txBody>
                     <a:bodyPr/>
@@ -14545,7 +14548,7 @@
                         <a:buNone/>
                       </a:pPr>
                       <a:r>
-                        <a:rPr lang="en-GB" b="1">
+                        <a:rPr lang="en-GB" b="1" dirty="0" err="1">
                           <a:solidFill>
                             <a:srgbClr val="FFFFFF"/>
                           </a:solidFill>
@@ -14554,9 +14557,9 @@
                           <a:cs typeface="Proxima Nova"/>
                           <a:sym typeface="Proxima Nova"/>
                         </a:rPr>
-                        <a:t>Fecha</a:t>
+                        <a:t>Temas</a:t>
                       </a:r>
-                      <a:endParaRPr b="1">
+                      <a:endParaRPr b="1" dirty="0">
                         <a:solidFill>
                           <a:srgbClr val="FFFFFF"/>
                         </a:solidFill>
@@ -14568,7 +14571,7 @@
                     </a:p>
                   </a:txBody>
                   <a:tcPr marL="91425" marR="91425" marT="91425" marB="91425" anchor="ctr">
-                    <a:lnL w="9525" cap="flat" cmpd="sng">
+                    <a:lnL w="9525" cap="flat" cmpd="sng" algn="ctr">
                       <a:solidFill>
                         <a:srgbClr val="9E9E9E">
                           <a:alpha val="0"/>
@@ -14601,94 +14604,7 @@
                       <a:headEnd type="none" w="sm" len="sm"/>
                       <a:tailEnd type="none" w="sm" len="sm"/>
                     </a:lnT>
-                    <a:lnB w="9525" cap="flat" cmpd="sng">
-                      <a:solidFill>
-                        <a:srgbClr val="9E9E9E">
-                          <a:alpha val="0"/>
-                        </a:srgbClr>
-                      </a:solidFill>
-                      <a:prstDash val="solid"/>
-                      <a:round/>
-                      <a:headEnd type="none" w="sm" len="sm"/>
-                      <a:tailEnd type="none" w="sm" len="sm"/>
-                    </a:lnB>
-                    <a:solidFill>
-                      <a:schemeClr val="dk2"/>
-                    </a:solidFill>
-                  </a:tcPr>
-                </a:tc>
-                <a:tc>
-                  <a:txBody>
-                    <a:bodyPr/>
-                    <a:lstStyle/>
-                    <a:p>
-                      <a:pPr marL="0" lvl="0" indent="0" algn="ctr" rtl="0">
-                        <a:spcBef>
-                          <a:spcPts val="0"/>
-                        </a:spcBef>
-                        <a:spcAft>
-                          <a:spcPts val="0"/>
-                        </a:spcAft>
-                        <a:buNone/>
-                      </a:pPr>
-                      <a:r>
-                        <a:rPr lang="en-GB" b="1" dirty="0" err="1">
-                          <a:solidFill>
-                            <a:srgbClr val="FFFFFF"/>
-                          </a:solidFill>
-                          <a:latin typeface="Proxima Nova"/>
-                          <a:ea typeface="Proxima Nova"/>
-                          <a:cs typeface="Proxima Nova"/>
-                          <a:sym typeface="Proxima Nova"/>
-                        </a:rPr>
-                        <a:t>Temas</a:t>
-                      </a:r>
-                      <a:endParaRPr b="1" dirty="0">
-                        <a:solidFill>
-                          <a:srgbClr val="FFFFFF"/>
-                        </a:solidFill>
-                        <a:latin typeface="Proxima Nova"/>
-                        <a:ea typeface="Proxima Nova"/>
-                        <a:cs typeface="Proxima Nova"/>
-                        <a:sym typeface="Proxima Nova"/>
-                      </a:endParaRPr>
-                    </a:p>
-                  </a:txBody>
-                  <a:tcPr marL="91425" marR="91425" marT="91425" marB="91425" anchor="ctr">
-                    <a:lnL w="9525" cap="flat" cmpd="sng">
-                      <a:solidFill>
-                        <a:srgbClr val="9E9E9E">
-                          <a:alpha val="0"/>
-                        </a:srgbClr>
-                      </a:solidFill>
-                      <a:prstDash val="solid"/>
-                      <a:round/>
-                      <a:headEnd type="none" w="sm" len="sm"/>
-                      <a:tailEnd type="none" w="sm" len="sm"/>
-                    </a:lnL>
-                    <a:lnR w="9525" cap="flat" cmpd="sng">
-                      <a:solidFill>
-                        <a:srgbClr val="9E9E9E">
-                          <a:alpha val="0"/>
-                        </a:srgbClr>
-                      </a:solidFill>
-                      <a:prstDash val="solid"/>
-                      <a:round/>
-                      <a:headEnd type="none" w="sm" len="sm"/>
-                      <a:tailEnd type="none" w="sm" len="sm"/>
-                    </a:lnR>
-                    <a:lnT w="9525" cap="flat" cmpd="sng">
-                      <a:solidFill>
-                        <a:srgbClr val="9E9E9E">
-                          <a:alpha val="0"/>
-                        </a:srgbClr>
-                      </a:solidFill>
-                      <a:prstDash val="solid"/>
-                      <a:round/>
-                      <a:headEnd type="none" w="sm" len="sm"/>
-                      <a:tailEnd type="none" w="sm" len="sm"/>
-                    </a:lnT>
-                    <a:lnB w="9525" cap="flat" cmpd="sng">
+                    <a:lnB w="9525" cap="flat" cmpd="sng" algn="ctr">
                       <a:solidFill>
                         <a:srgbClr val="9E9E9E">
                           <a:alpha val="0"/>
@@ -14797,362 +14713,7 @@
                   </a:ext>
                 </a:extLst>
               </a:tr>
-              <a:tr h="505525">
-                <a:tc>
-                  <a:txBody>
-                    <a:bodyPr/>
-                    <a:lstStyle/>
-                    <a:p>
-                      <a:pPr marL="0" lvl="0" indent="0" algn="ctr" rtl="0">
-                        <a:spcBef>
-                          <a:spcPts val="0"/>
-                        </a:spcBef>
-                        <a:spcAft>
-                          <a:spcPts val="0"/>
-                        </a:spcAft>
-                        <a:buNone/>
-                      </a:pPr>
-                      <a:r>
-                        <a:rPr lang="en-GB">
-                          <a:latin typeface="Proxima Nova"/>
-                          <a:ea typeface="Proxima Nova"/>
-                          <a:cs typeface="Proxima Nova"/>
-                          <a:sym typeface="Proxima Nova"/>
-                        </a:rPr>
-                        <a:t>1</a:t>
-                      </a:r>
-                      <a:endParaRPr>
-                        <a:latin typeface="Proxima Nova"/>
-                        <a:ea typeface="Proxima Nova"/>
-                        <a:cs typeface="Proxima Nova"/>
-                        <a:sym typeface="Proxima Nova"/>
-                      </a:endParaRPr>
-                    </a:p>
-                  </a:txBody>
-                  <a:tcPr marL="91425" marR="91425" marT="91425" marB="91425" anchor="ctr">
-                    <a:lnL w="9525" cap="flat" cmpd="sng">
-                      <a:solidFill>
-                        <a:srgbClr val="9E9E9E">
-                          <a:alpha val="0"/>
-                        </a:srgbClr>
-                      </a:solidFill>
-                      <a:prstDash val="solid"/>
-                      <a:round/>
-                      <a:headEnd type="none" w="sm" len="sm"/>
-                      <a:tailEnd type="none" w="sm" len="sm"/>
-                    </a:lnL>
-                    <a:lnR w="9525" cap="flat" cmpd="sng">
-                      <a:solidFill>
-                        <a:srgbClr val="9E9E9E">
-                          <a:alpha val="0"/>
-                        </a:srgbClr>
-                      </a:solidFill>
-                      <a:prstDash val="solid"/>
-                      <a:round/>
-                      <a:headEnd type="none" w="sm" len="sm"/>
-                      <a:tailEnd type="none" w="sm" len="sm"/>
-                    </a:lnR>
-                    <a:lnT w="9525" cap="flat" cmpd="sng">
-                      <a:solidFill>
-                        <a:srgbClr val="9E9E9E">
-                          <a:alpha val="0"/>
-                        </a:srgbClr>
-                      </a:solidFill>
-                      <a:prstDash val="solid"/>
-                      <a:round/>
-                      <a:headEnd type="none" w="sm" len="sm"/>
-                      <a:tailEnd type="none" w="sm" len="sm"/>
-                    </a:lnT>
-                    <a:lnB w="9525" cap="flat" cmpd="sng">
-                      <a:solidFill>
-                        <a:srgbClr val="9E9E9E">
-                          <a:alpha val="0"/>
-                        </a:srgbClr>
-                      </a:solidFill>
-                      <a:prstDash val="solid"/>
-                      <a:round/>
-                      <a:headEnd type="none" w="sm" len="sm"/>
-                      <a:tailEnd type="none" w="sm" len="sm"/>
-                    </a:lnB>
-                  </a:tcPr>
-                </a:tc>
-                <a:tc>
-                  <a:txBody>
-                    <a:bodyPr/>
-                    <a:lstStyle/>
-                    <a:p>
-                      <a:pPr marL="0" lvl="0" indent="0" algn="ctr" rtl="0">
-                        <a:spcBef>
-                          <a:spcPts val="0"/>
-                        </a:spcBef>
-                        <a:spcAft>
-                          <a:spcPts val="0"/>
-                        </a:spcAft>
-                        <a:buNone/>
-                      </a:pPr>
-                      <a:r>
-                        <a:rPr lang="en-GB" dirty="0">
-                          <a:latin typeface="Proxima Nova"/>
-                          <a:ea typeface="Proxima Nova"/>
-                          <a:cs typeface="Proxima Nova"/>
-                          <a:sym typeface="Proxima Nova"/>
-                        </a:rPr>
-                        <a:t>13/8</a:t>
-                      </a:r>
-                      <a:endParaRPr dirty="0">
-                        <a:latin typeface="Proxima Nova"/>
-                        <a:ea typeface="Proxima Nova"/>
-                        <a:cs typeface="Proxima Nova"/>
-                        <a:sym typeface="Proxima Nova"/>
-                      </a:endParaRPr>
-                    </a:p>
-                  </a:txBody>
-                  <a:tcPr marL="91425" marR="91425" marT="91425" marB="91425" anchor="ctr">
-                    <a:lnL w="9525" cap="flat" cmpd="sng">
-                      <a:solidFill>
-                        <a:srgbClr val="9E9E9E">
-                          <a:alpha val="0"/>
-                        </a:srgbClr>
-                      </a:solidFill>
-                      <a:prstDash val="solid"/>
-                      <a:round/>
-                      <a:headEnd type="none" w="sm" len="sm"/>
-                      <a:tailEnd type="none" w="sm" len="sm"/>
-                    </a:lnL>
-                    <a:lnR w="9525" cap="flat" cmpd="sng">
-                      <a:solidFill>
-                        <a:srgbClr val="9E9E9E">
-                          <a:alpha val="0"/>
-                        </a:srgbClr>
-                      </a:solidFill>
-                      <a:prstDash val="solid"/>
-                      <a:round/>
-                      <a:headEnd type="none" w="sm" len="sm"/>
-                      <a:tailEnd type="none" w="sm" len="sm"/>
-                    </a:lnR>
-                    <a:lnT w="9525" cap="flat" cmpd="sng">
-                      <a:solidFill>
-                        <a:srgbClr val="9E9E9E">
-                          <a:alpha val="0"/>
-                        </a:srgbClr>
-                      </a:solidFill>
-                      <a:prstDash val="solid"/>
-                      <a:round/>
-                      <a:headEnd type="none" w="sm" len="sm"/>
-                      <a:tailEnd type="none" w="sm" len="sm"/>
-                    </a:lnT>
-                    <a:lnB w="9525" cap="flat" cmpd="sng">
-                      <a:solidFill>
-                        <a:srgbClr val="9E9E9E">
-                          <a:alpha val="0"/>
-                        </a:srgbClr>
-                      </a:solidFill>
-                      <a:prstDash val="solid"/>
-                      <a:round/>
-                      <a:headEnd type="none" w="sm" len="sm"/>
-                      <a:tailEnd type="none" w="sm" len="sm"/>
-                    </a:lnB>
-                  </a:tcPr>
-                </a:tc>
-                <a:tc>
-                  <a:txBody>
-                    <a:bodyPr/>
-                    <a:lstStyle/>
-                    <a:p>
-                      <a:pPr marL="0" lvl="0" indent="0" algn="ctr" rtl="0">
-                        <a:spcBef>
-                          <a:spcPts val="0"/>
-                        </a:spcBef>
-                        <a:spcAft>
-                          <a:spcPts val="0"/>
-                        </a:spcAft>
-                        <a:buNone/>
-                      </a:pPr>
-                      <a:r>
-                        <a:rPr lang="en-GB" dirty="0">
-                          <a:latin typeface="Proxima Nova"/>
-                          <a:ea typeface="Proxima Nova"/>
-                          <a:cs typeface="Proxima Nova"/>
-                          <a:sym typeface="Proxima Nova"/>
-                        </a:rPr>
-                        <a:t>Intro, </a:t>
-                      </a:r>
-                      <a:r>
-                        <a:rPr lang="en-GB" dirty="0" err="1">
-                          <a:latin typeface="Proxima Nova"/>
-                          <a:ea typeface="Proxima Nova"/>
-                          <a:cs typeface="Proxima Nova"/>
-                          <a:sym typeface="Proxima Nova"/>
-                        </a:rPr>
-                        <a:t>tipos</a:t>
-                      </a:r>
-                      <a:r>
-                        <a:rPr lang="en-GB" dirty="0">
-                          <a:latin typeface="Proxima Nova"/>
-                          <a:ea typeface="Proxima Nova"/>
-                          <a:cs typeface="Proxima Nova"/>
-                          <a:sym typeface="Proxima Nova"/>
-                        </a:rPr>
-                        <a:t> de </a:t>
-                      </a:r>
-                      <a:r>
-                        <a:rPr lang="en-GB" dirty="0" err="1">
-                          <a:latin typeface="Proxima Nova"/>
-                          <a:ea typeface="Proxima Nova"/>
-                          <a:cs typeface="Proxima Nova"/>
-                          <a:sym typeface="Proxima Nova"/>
-                        </a:rPr>
-                        <a:t>modelos</a:t>
-                      </a:r>
-                      <a:r>
-                        <a:rPr lang="en-GB" dirty="0">
-                          <a:latin typeface="Proxima Nova"/>
-                          <a:ea typeface="Proxima Nova"/>
-                          <a:cs typeface="Proxima Nova"/>
-                          <a:sym typeface="Proxima Nova"/>
-                        </a:rPr>
-                        <a:t>, trade-offs</a:t>
-                      </a:r>
-                      <a:endParaRPr dirty="0">
-                        <a:latin typeface="Proxima Nova"/>
-                        <a:ea typeface="Proxima Nova"/>
-                        <a:cs typeface="Proxima Nova"/>
-                        <a:sym typeface="Proxima Nova"/>
-                      </a:endParaRPr>
-                    </a:p>
-                  </a:txBody>
-                  <a:tcPr marL="91425" marR="91425" marT="91425" marB="91425" anchor="ctr">
-                    <a:lnL w="9525" cap="flat" cmpd="sng">
-                      <a:solidFill>
-                        <a:srgbClr val="9E9E9E">
-                          <a:alpha val="0"/>
-                        </a:srgbClr>
-                      </a:solidFill>
-                      <a:prstDash val="solid"/>
-                      <a:round/>
-                      <a:headEnd type="none" w="sm" len="sm"/>
-                      <a:tailEnd type="none" w="sm" len="sm"/>
-                    </a:lnL>
-                    <a:lnR w="9525" cap="flat" cmpd="sng">
-                      <a:solidFill>
-                        <a:srgbClr val="9E9E9E">
-                          <a:alpha val="0"/>
-                        </a:srgbClr>
-                      </a:solidFill>
-                      <a:prstDash val="solid"/>
-                      <a:round/>
-                      <a:headEnd type="none" w="sm" len="sm"/>
-                      <a:tailEnd type="none" w="sm" len="sm"/>
-                    </a:lnR>
-                    <a:lnT w="9525" cap="flat" cmpd="sng">
-                      <a:solidFill>
-                        <a:srgbClr val="9E9E9E">
-                          <a:alpha val="0"/>
-                        </a:srgbClr>
-                      </a:solidFill>
-                      <a:prstDash val="solid"/>
-                      <a:round/>
-                      <a:headEnd type="none" w="sm" len="sm"/>
-                      <a:tailEnd type="none" w="sm" len="sm"/>
-                    </a:lnT>
-                    <a:lnB w="9525" cap="flat" cmpd="sng">
-                      <a:solidFill>
-                        <a:srgbClr val="9E9E9E">
-                          <a:alpha val="0"/>
-                        </a:srgbClr>
-                      </a:solidFill>
-                      <a:prstDash val="solid"/>
-                      <a:round/>
-                      <a:headEnd type="none" w="sm" len="sm"/>
-                      <a:tailEnd type="none" w="sm" len="sm"/>
-                    </a:lnB>
-                  </a:tcPr>
-                </a:tc>
-                <a:tc>
-                  <a:txBody>
-                    <a:bodyPr/>
-                    <a:lstStyle/>
-                    <a:p>
-                      <a:pPr marL="0" lvl="0" indent="0" algn="ctr" rtl="0">
-                        <a:spcBef>
-                          <a:spcPts val="0"/>
-                        </a:spcBef>
-                        <a:spcAft>
-                          <a:spcPts val="0"/>
-                        </a:spcAft>
-                        <a:buNone/>
-                      </a:pPr>
-                      <a:r>
-                        <a:rPr lang="en-GB" sz="1200" dirty="0">
-                          <a:latin typeface="Proxima Nova"/>
-                          <a:ea typeface="Proxima Nova"/>
-                          <a:cs typeface="Proxima Nova"/>
-                          <a:sym typeface="Proxima Nova"/>
-                        </a:rPr>
-                        <a:t>Cap 2 ISLR + Cap 1 TMR + Caps 4 y 5 IMS</a:t>
-                      </a:r>
-                      <a:endParaRPr sz="1200" dirty="0">
-                        <a:latin typeface="Proxima Nova"/>
-                        <a:ea typeface="Proxima Nova"/>
-                        <a:cs typeface="Proxima Nova"/>
-                        <a:sym typeface="Proxima Nova"/>
-                      </a:endParaRPr>
-                    </a:p>
-                  </a:txBody>
-                  <a:tcPr marL="91425" marR="91425" marT="91425" marB="91425" anchor="ctr">
-                    <a:lnL w="9525" cap="flat" cmpd="sng">
-                      <a:solidFill>
-                        <a:srgbClr val="9E9E9E">
-                          <a:alpha val="0"/>
-                        </a:srgbClr>
-                      </a:solidFill>
-                      <a:prstDash val="solid"/>
-                      <a:round/>
-                      <a:headEnd type="none" w="sm" len="sm"/>
-                      <a:tailEnd type="none" w="sm" len="sm"/>
-                    </a:lnL>
-                    <a:lnR w="9525" cap="flat" cmpd="sng">
-                      <a:solidFill>
-                        <a:srgbClr val="9E9E9E">
-                          <a:alpha val="0"/>
-                        </a:srgbClr>
-                      </a:solidFill>
-                      <a:prstDash val="solid"/>
-                      <a:round/>
-                      <a:headEnd type="none" w="sm" len="sm"/>
-                      <a:tailEnd type="none" w="sm" len="sm"/>
-                    </a:lnR>
-                    <a:lnT w="9525" cap="flat" cmpd="sng">
-                      <a:solidFill>
-                        <a:srgbClr val="9E9E9E">
-                          <a:alpha val="0"/>
-                        </a:srgbClr>
-                      </a:solidFill>
-                      <a:prstDash val="solid"/>
-                      <a:round/>
-                      <a:headEnd type="none" w="sm" len="sm"/>
-                      <a:tailEnd type="none" w="sm" len="sm"/>
-                    </a:lnT>
-                    <a:lnB w="9525" cap="flat" cmpd="sng">
-                      <a:solidFill>
-                        <a:srgbClr val="9E9E9E">
-                          <a:alpha val="0"/>
-                        </a:srgbClr>
-                      </a:solidFill>
-                      <a:prstDash val="solid"/>
-                      <a:round/>
-                      <a:headEnd type="none" w="sm" len="sm"/>
-                      <a:tailEnd type="none" w="sm" len="sm"/>
-                    </a:lnB>
-                  </a:tcPr>
-                </a:tc>
-                <a:extLst>
-                  <a:ext uri="{0D108BD9-81ED-4DB2-BD59-A6C34878D82A}">
-                    <a16:rowId xmlns:a16="http://schemas.microsoft.com/office/drawing/2014/main" val="10001"/>
-                  </a:ext>
-                </a:extLst>
-              </a:tr>
-              <a:tr h="505525">
+              <a:tr h="514654">
                 <a:tc>
                   <a:txBody>
                     <a:bodyPr/>
@@ -15177,7 +14738,7 @@
                           <a:cs typeface="Proxima Nova"/>
                           <a:sym typeface="Proxima Nova"/>
                         </a:rPr>
-                        <a:t>2</a:t>
+                        <a:t>1</a:t>
                       </a:r>
                       <a:endParaRPr dirty="0">
                         <a:solidFill>
@@ -15261,8 +14822,149 @@
                           <a:cs typeface="Proxima Nova"/>
                           <a:sym typeface="Proxima Nova"/>
                         </a:rPr>
-                        <a:t>20/8</a:t>
+                        <a:t>Intro, </a:t>
                       </a:r>
+                      <a:r>
+                        <a:rPr lang="en-GB" dirty="0" err="1">
+                          <a:solidFill>
+                            <a:schemeClr val="tx1"/>
+                          </a:solidFill>
+                          <a:latin typeface="Proxima Nova"/>
+                          <a:ea typeface="Proxima Nova"/>
+                          <a:cs typeface="Proxima Nova"/>
+                          <a:sym typeface="Proxima Nova"/>
+                        </a:rPr>
+                        <a:t>tipos</a:t>
+                      </a:r>
+                      <a:r>
+                        <a:rPr lang="en-GB" dirty="0">
+                          <a:solidFill>
+                            <a:schemeClr val="tx1"/>
+                          </a:solidFill>
+                          <a:latin typeface="Proxima Nova"/>
+                          <a:ea typeface="Proxima Nova"/>
+                          <a:cs typeface="Proxima Nova"/>
+                          <a:sym typeface="Proxima Nova"/>
+                        </a:rPr>
+                        <a:t> de </a:t>
+                      </a:r>
+                      <a:r>
+                        <a:rPr lang="en-GB" dirty="0" err="1">
+                          <a:solidFill>
+                            <a:schemeClr val="tx1"/>
+                          </a:solidFill>
+                          <a:latin typeface="Proxima Nova"/>
+                          <a:ea typeface="Proxima Nova"/>
+                          <a:cs typeface="Proxima Nova"/>
+                          <a:sym typeface="Proxima Nova"/>
+                        </a:rPr>
+                        <a:t>modelos</a:t>
+                      </a:r>
+                      <a:r>
+                        <a:rPr lang="en-GB" dirty="0">
+                          <a:solidFill>
+                            <a:schemeClr val="tx1"/>
+                          </a:solidFill>
+                          <a:latin typeface="Proxima Nova"/>
+                          <a:ea typeface="Proxima Nova"/>
+                          <a:cs typeface="Proxima Nova"/>
+                          <a:sym typeface="Proxima Nova"/>
+                        </a:rPr>
+                        <a:t>, trade-offs</a:t>
+                      </a:r>
+                      <a:endParaRPr dirty="0">
+                        <a:solidFill>
+                          <a:schemeClr val="tx1"/>
+                        </a:solidFill>
+                        <a:latin typeface="Proxima Nova"/>
+                        <a:ea typeface="Proxima Nova"/>
+                        <a:cs typeface="Proxima Nova"/>
+                        <a:sym typeface="Proxima Nova"/>
+                      </a:endParaRPr>
+                    </a:p>
+                  </a:txBody>
+                  <a:tcPr marL="91425" marR="91425" marT="91425" marB="91425" anchor="ctr">
+                    <a:lnL w="9525" cap="flat" cmpd="sng" algn="ctr">
+                      <a:solidFill>
+                        <a:srgbClr val="9E9E9E">
+                          <a:alpha val="0"/>
+                        </a:srgbClr>
+                      </a:solidFill>
+                      <a:prstDash val="solid"/>
+                      <a:round/>
+                      <a:headEnd type="none" w="sm" len="sm"/>
+                      <a:tailEnd type="none" w="sm" len="sm"/>
+                    </a:lnL>
+                    <a:lnR w="9525" cap="flat" cmpd="sng">
+                      <a:solidFill>
+                        <a:srgbClr val="9E9E9E">
+                          <a:alpha val="0"/>
+                        </a:srgbClr>
+                      </a:solidFill>
+                      <a:prstDash val="solid"/>
+                      <a:round/>
+                      <a:headEnd type="none" w="sm" len="sm"/>
+                      <a:tailEnd type="none" w="sm" len="sm"/>
+                    </a:lnR>
+                    <a:lnT w="9525" cap="flat" cmpd="sng" algn="ctr">
+                      <a:solidFill>
+                        <a:srgbClr val="9E9E9E">
+                          <a:alpha val="0"/>
+                        </a:srgbClr>
+                      </a:solidFill>
+                      <a:prstDash val="solid"/>
+                      <a:round/>
+                      <a:headEnd type="none" w="sm" len="sm"/>
+                      <a:tailEnd type="none" w="sm" len="sm"/>
+                    </a:lnT>
+                    <a:lnB w="9525" cap="flat" cmpd="sng" algn="ctr">
+                      <a:solidFill>
+                        <a:srgbClr val="9E9E9E">
+                          <a:alpha val="0"/>
+                        </a:srgbClr>
+                      </a:solidFill>
+                      <a:prstDash val="solid"/>
+                      <a:round/>
+                      <a:headEnd type="none" w="sm" len="sm"/>
+                      <a:tailEnd type="none" w="sm" len="sm"/>
+                    </a:lnB>
+                  </a:tcPr>
+                </a:tc>
+                <a:tc>
+                  <a:txBody>
+                    <a:bodyPr/>
+                    <a:lstStyle/>
+                    <a:p>
+                      <a:pPr marL="0" lvl="0" indent="0" algn="ctr" rtl="0">
+                        <a:spcBef>
+                          <a:spcPts val="0"/>
+                        </a:spcBef>
+                        <a:spcAft>
+                          <a:spcPts val="0"/>
+                        </a:spcAft>
+                        <a:buNone/>
+                      </a:pPr>
+                      <a:r>
+                        <a:rPr lang="en-GB" sz="1200" dirty="0">
+                          <a:solidFill>
+                            <a:schemeClr val="tx1"/>
+                          </a:solidFill>
+                          <a:latin typeface="Proxima Nova"/>
+                          <a:ea typeface="Proxima Nova"/>
+                          <a:cs typeface="Proxima Nova"/>
+                          <a:sym typeface="Proxima Nova"/>
+                        </a:rPr>
+                        <a:t>Cap 2 ISLR + Cap 1 TMR + Caps 4 y 5 IMS</a:t>
+                      </a:r>
+                      <a:endParaRPr sz="1200" dirty="0">
+                        <a:solidFill>
+                          <a:schemeClr val="tx1"/>
+                        </a:solidFill>
+                        <a:latin typeface="Proxima Nova"/>
+                        <a:ea typeface="Proxima Nova"/>
+                        <a:cs typeface="Proxima Nova"/>
+                        <a:sym typeface="Proxima Nova"/>
+                      </a:endParaRPr>
                     </a:p>
                   </a:txBody>
                   <a:tcPr marL="91425" marR="91425" marT="91425" marB="91425" anchor="ctr">
@@ -15312,6 +15014,13 @@
                     </a:lnB>
                   </a:tcPr>
                 </a:tc>
+                <a:extLst>
+                  <a:ext uri="{0D108BD9-81ED-4DB2-BD59-A6C34878D82A}">
+                    <a16:rowId xmlns:a16="http://schemas.microsoft.com/office/drawing/2014/main" val="10001"/>
+                  </a:ext>
+                </a:extLst>
+              </a:tr>
+              <a:tr h="620578">
                 <a:tc>
                   <a:txBody>
                     <a:bodyPr/>
@@ -15327,56 +15036,15 @@
                         <a:buNone/>
                       </a:pPr>
                       <a:r>
-                        <a:rPr lang="es-AR" dirty="0">
-                          <a:solidFill>
-                            <a:schemeClr val="tx1"/>
-                          </a:solidFill>
+                        <a:rPr lang="en-GB">
                           <a:latin typeface="Proxima Nova"/>
                           <a:ea typeface="Proxima Nova"/>
                           <a:cs typeface="Proxima Nova"/>
                           <a:sym typeface="Proxima Nova"/>
                         </a:rPr>
-                        <a:t>Explorando y transformando variables. </a:t>
+                        <a:t>2</a:t>
                       </a:r>
-                    </a:p>
-                    <a:p>
-                      <a:pPr marL="0" lvl="0" indent="0" algn="ctr" rtl="0">
-                        <a:spcBef>
-                          <a:spcPts val="0"/>
-                        </a:spcBef>
-                        <a:spcAft>
-                          <a:spcPts val="0"/>
-                        </a:spcAft>
-                        <a:buNone/>
-                      </a:pPr>
-                      <a:r>
-                        <a:rPr lang="es-AR" dirty="0" err="1">
-                          <a:solidFill>
-                            <a:schemeClr val="tx1"/>
-                          </a:solidFill>
-                          <a:latin typeface="Proxima Nova"/>
-                          <a:ea typeface="Proxima Nova"/>
-                          <a:cs typeface="Proxima Nova"/>
-                          <a:sym typeface="Proxima Nova"/>
-                        </a:rPr>
-                        <a:t>Intro</a:t>
-                      </a:r>
-                      <a:r>
-                        <a:rPr lang="es-AR" dirty="0">
-                          <a:solidFill>
-                            <a:schemeClr val="tx1"/>
-                          </a:solidFill>
-                          <a:latin typeface="Proxima Nova"/>
-                          <a:ea typeface="Proxima Nova"/>
-                          <a:cs typeface="Proxima Nova"/>
-                          <a:sym typeface="Proxima Nova"/>
-                        </a:rPr>
-                        <a:t> a regresión lineal simple</a:t>
-                      </a:r>
-                      <a:endParaRPr dirty="0">
-                        <a:solidFill>
-                          <a:schemeClr val="tx1"/>
-                        </a:solidFill>
+                      <a:endParaRPr>
                         <a:latin typeface="Proxima Nova"/>
                         <a:ea typeface="Proxima Nova"/>
                         <a:cs typeface="Proxima Nova"/>
@@ -15446,34 +15114,123 @@
                         <a:buNone/>
                       </a:pPr>
                       <a:r>
-                        <a:rPr lang="es-AR" sz="1200" dirty="0" err="1">
-                          <a:solidFill>
-                            <a:schemeClr val="tx1"/>
-                          </a:solidFill>
+                        <a:rPr lang="es-AR" dirty="0">
                           <a:latin typeface="Proxima Nova"/>
                           <a:ea typeface="Proxima Nova"/>
                           <a:cs typeface="Proxima Nova"/>
                           <a:sym typeface="Proxima Nova"/>
                         </a:rPr>
-                        <a:t>Cap</a:t>
+                        <a:t>Explorando y transformando variables. </a:t>
                       </a:r>
+                    </a:p>
+                    <a:p>
+                      <a:pPr marL="0" lvl="0" indent="0" algn="ctr" rtl="0">
+                        <a:spcBef>
+                          <a:spcPts val="0"/>
+                        </a:spcBef>
+                        <a:spcAft>
+                          <a:spcPts val="0"/>
+                        </a:spcAft>
+                        <a:buNone/>
+                      </a:pPr>
                       <a:r>
-                        <a:rPr lang="es-AR" sz="1200">
-                          <a:solidFill>
-                            <a:schemeClr val="tx1"/>
-                          </a:solidFill>
+                        <a:rPr lang="es-AR" dirty="0" err="1">
                           <a:latin typeface="Proxima Nova"/>
                           <a:ea typeface="Proxima Nova"/>
                           <a:cs typeface="Proxima Nova"/>
                           <a:sym typeface="Proxima Nova"/>
                         </a:rPr>
-                        <a:t> 3 </a:t>
+                        <a:t>Intro</a:t>
                       </a:r>
                       <a:r>
-                        <a:rPr lang="en-GB" sz="1200">
-                          <a:solidFill>
-                            <a:schemeClr val="tx1"/>
-                          </a:solidFill>
+                        <a:rPr lang="es-AR" dirty="0">
+                          <a:latin typeface="Proxima Nova"/>
+                          <a:ea typeface="Proxima Nova"/>
+                          <a:cs typeface="Proxima Nova"/>
+                          <a:sym typeface="Proxima Nova"/>
+                        </a:rPr>
+                        <a:t> a regresión lineal simple</a:t>
+                      </a:r>
+                      <a:endParaRPr dirty="0">
+                        <a:latin typeface="Proxima Nova"/>
+                        <a:ea typeface="Proxima Nova"/>
+                        <a:cs typeface="Proxima Nova"/>
+                        <a:sym typeface="Proxima Nova"/>
+                      </a:endParaRPr>
+                    </a:p>
+                  </a:txBody>
+                  <a:tcPr marL="91425" marR="91425" marT="91425" marB="91425" anchor="ctr">
+                    <a:lnL w="9525" cap="flat" cmpd="sng" algn="ctr">
+                      <a:solidFill>
+                        <a:srgbClr val="9E9E9E">
+                          <a:alpha val="0"/>
+                        </a:srgbClr>
+                      </a:solidFill>
+                      <a:prstDash val="solid"/>
+                      <a:round/>
+                      <a:headEnd type="none" w="sm" len="sm"/>
+                      <a:tailEnd type="none" w="sm" len="sm"/>
+                    </a:lnL>
+                    <a:lnR w="9525" cap="flat" cmpd="sng">
+                      <a:solidFill>
+                        <a:srgbClr val="9E9E9E">
+                          <a:alpha val="0"/>
+                        </a:srgbClr>
+                      </a:solidFill>
+                      <a:prstDash val="solid"/>
+                      <a:round/>
+                      <a:headEnd type="none" w="sm" len="sm"/>
+                      <a:tailEnd type="none" w="sm" len="sm"/>
+                    </a:lnR>
+                    <a:lnT w="9525" cap="flat" cmpd="sng" algn="ctr">
+                      <a:solidFill>
+                        <a:srgbClr val="9E9E9E">
+                          <a:alpha val="0"/>
+                        </a:srgbClr>
+                      </a:solidFill>
+                      <a:prstDash val="solid"/>
+                      <a:round/>
+                      <a:headEnd type="none" w="sm" len="sm"/>
+                      <a:tailEnd type="none" w="sm" len="sm"/>
+                    </a:lnT>
+                    <a:lnB w="9525" cap="flat" cmpd="sng" algn="ctr">
+                      <a:solidFill>
+                        <a:srgbClr val="9E9E9E">
+                          <a:alpha val="0"/>
+                        </a:srgbClr>
+                      </a:solidFill>
+                      <a:prstDash val="solid"/>
+                      <a:round/>
+                      <a:headEnd type="none" w="sm" len="sm"/>
+                      <a:tailEnd type="none" w="sm" len="sm"/>
+                    </a:lnB>
+                  </a:tcPr>
+                </a:tc>
+                <a:tc>
+                  <a:txBody>
+                    <a:bodyPr/>
+                    <a:lstStyle/>
+                    <a:p>
+                      <a:pPr marL="0" lvl="0" indent="0" algn="ctr" rtl="0">
+                        <a:spcBef>
+                          <a:spcPts val="0"/>
+                        </a:spcBef>
+                        <a:spcAft>
+                          <a:spcPts val="0"/>
+                        </a:spcAft>
+                        <a:buNone/>
+                      </a:pPr>
+                      <a:r>
+                        <a:rPr lang="es-AR" sz="1200" dirty="0">
+                          <a:latin typeface="Proxima Nova"/>
+                          <a:ea typeface="Proxima Nova"/>
+                          <a:cs typeface="Proxima Nova"/>
+                          <a:sym typeface="Proxima Nova"/>
+                        </a:rPr>
+                        <a:t>Cap 3.1 </a:t>
+                      </a:r>
+                      <a:r>
+                        <a:rPr lang="en-GB" sz="1200" dirty="0">
                           <a:latin typeface="Proxima Nova"/>
                           <a:ea typeface="Proxima Nova"/>
                           <a:cs typeface="Proxima Nova"/>
@@ -15483,9 +15240,6 @@
                       </a:r>
                       <a:r>
                         <a:rPr lang="es-AR" sz="1200" dirty="0">
-                          <a:solidFill>
-                            <a:schemeClr val="tx1"/>
-                          </a:solidFill>
                           <a:latin typeface="Proxima Nova"/>
                           <a:ea typeface="Proxima Nova"/>
                           <a:cs typeface="Proxima Nova"/>
@@ -15495,9 +15249,6 @@
                       </a:r>
                       <a:r>
                         <a:rPr lang="es-AR" sz="1200" dirty="0" err="1">
-                          <a:solidFill>
-                            <a:schemeClr val="tx1"/>
-                          </a:solidFill>
                           <a:latin typeface="Proxima Nova"/>
                           <a:ea typeface="Proxima Nova"/>
                           <a:cs typeface="Proxima Nova"/>
@@ -15507,9 +15258,6 @@
                       </a:r>
                       <a:r>
                         <a:rPr lang="es-AR" sz="1200" dirty="0">
-                          <a:solidFill>
-                            <a:schemeClr val="tx1"/>
-                          </a:solidFill>
                           <a:latin typeface="Proxima Nova"/>
                           <a:ea typeface="Proxima Nova"/>
                           <a:cs typeface="Proxima Nova"/>
@@ -15519,9 +15267,6 @@
                       </a:r>
                       <a:r>
                         <a:rPr lang="es-AR" sz="1200" dirty="0" err="1">
-                          <a:solidFill>
-                            <a:schemeClr val="tx1"/>
-                          </a:solidFill>
                           <a:latin typeface="Proxima Nova"/>
                           <a:ea typeface="Proxima Nova"/>
                           <a:cs typeface="Proxima Nova"/>
@@ -15531,9 +15276,6 @@
                       </a:r>
                       <a:r>
                         <a:rPr lang="es-AR" sz="1200" dirty="0">
-                          <a:solidFill>
-                            <a:schemeClr val="tx1"/>
-                          </a:solidFill>
                           <a:latin typeface="Proxima Nova"/>
                           <a:ea typeface="Proxima Nova"/>
                           <a:cs typeface="Proxima Nova"/>
@@ -15596,7 +15338,7 @@
                   </a:ext>
                 </a:extLst>
               </a:tr>
-              <a:tr h="505525">
+              <a:tr h="514654">
                 <a:tc>
                   <a:txBody>
                     <a:bodyPr/>
@@ -15696,7 +15438,7 @@
                         <a:buNone/>
                       </a:pPr>
                       <a:r>
-                        <a:rPr lang="en-GB" dirty="0">
+                        <a:rPr lang="es-AR" dirty="0">
                           <a:solidFill>
                             <a:schemeClr val="bg2"/>
                           </a:solidFill>
@@ -15705,12 +15447,21 @@
                           <a:cs typeface="Proxima Nova"/>
                           <a:sym typeface="Proxima Nova"/>
                         </a:rPr>
-                        <a:t>27/8</a:t>
+                        <a:t>Regresión lineal múltiple</a:t>
                       </a:r>
+                      <a:endParaRPr dirty="0">
+                        <a:solidFill>
+                          <a:schemeClr val="bg2"/>
+                        </a:solidFill>
+                        <a:latin typeface="Proxima Nova"/>
+                        <a:ea typeface="Proxima Nova"/>
+                        <a:cs typeface="Proxima Nova"/>
+                        <a:sym typeface="Proxima Nova"/>
+                      </a:endParaRPr>
                     </a:p>
                   </a:txBody>
                   <a:tcPr marL="91425" marR="91425" marT="91425" marB="91425" anchor="ctr">
-                    <a:lnL w="9525" cap="flat" cmpd="sng">
+                    <a:lnL w="9525" cap="flat" cmpd="sng" algn="ctr">
                       <a:solidFill>
                         <a:srgbClr val="9E9E9E">
                           <a:alpha val="0"/>
@@ -15732,7 +15483,7 @@
                       <a:headEnd type="none" w="sm" len="sm"/>
                       <a:tailEnd type="none" w="sm" len="sm"/>
                     </a:lnR>
-                    <a:lnT w="9525" cap="flat" cmpd="sng">
+                    <a:lnT w="9525" cap="flat" cmpd="sng" algn="ctr">
                       <a:solidFill>
                         <a:srgbClr val="9E9E9E">
                           <a:alpha val="0"/>
@@ -15743,7 +15494,7 @@
                       <a:headEnd type="none" w="sm" len="sm"/>
                       <a:tailEnd type="none" w="sm" len="sm"/>
                     </a:lnT>
-                    <a:lnB w="9525" cap="flat" cmpd="sng">
+                    <a:lnB w="9525" cap="flat" cmpd="sng" algn="ctr">
                       <a:solidFill>
                         <a:srgbClr val="9E9E9E">
                           <a:alpha val="0"/>
@@ -15771,102 +15522,6 @@
                         <a:buNone/>
                       </a:pPr>
                       <a:r>
-                        <a:rPr lang="es-AR" dirty="0">
-                          <a:solidFill>
-                            <a:schemeClr val="bg2"/>
-                          </a:solidFill>
-                          <a:latin typeface="Proxima Nova"/>
-                          <a:ea typeface="Proxima Nova"/>
-                          <a:cs typeface="Proxima Nova"/>
-                          <a:sym typeface="Proxima Nova"/>
-                        </a:rPr>
-                        <a:t>Regresión lineal múltiple</a:t>
-                      </a:r>
-                      <a:endParaRPr dirty="0">
-                        <a:solidFill>
-                          <a:schemeClr val="bg2"/>
-                        </a:solidFill>
-                        <a:latin typeface="Proxima Nova"/>
-                        <a:ea typeface="Proxima Nova"/>
-                        <a:cs typeface="Proxima Nova"/>
-                        <a:sym typeface="Proxima Nova"/>
-                      </a:endParaRPr>
-                    </a:p>
-                  </a:txBody>
-                  <a:tcPr marL="91425" marR="91425" marT="91425" marB="91425" anchor="ctr">
-                    <a:lnL w="9525" cap="flat" cmpd="sng">
-                      <a:solidFill>
-                        <a:srgbClr val="9E9E9E">
-                          <a:alpha val="0"/>
-                        </a:srgbClr>
-                      </a:solidFill>
-                      <a:prstDash val="solid"/>
-                      <a:round/>
-                      <a:headEnd type="none" w="sm" len="sm"/>
-                      <a:tailEnd type="none" w="sm" len="sm"/>
-                    </a:lnL>
-                    <a:lnR w="9525" cap="flat" cmpd="sng">
-                      <a:solidFill>
-                        <a:srgbClr val="9E9E9E">
-                          <a:alpha val="0"/>
-                        </a:srgbClr>
-                      </a:solidFill>
-                      <a:prstDash val="solid"/>
-                      <a:round/>
-                      <a:headEnd type="none" w="sm" len="sm"/>
-                      <a:tailEnd type="none" w="sm" len="sm"/>
-                    </a:lnR>
-                    <a:lnT w="9525" cap="flat" cmpd="sng">
-                      <a:solidFill>
-                        <a:srgbClr val="9E9E9E">
-                          <a:alpha val="0"/>
-                        </a:srgbClr>
-                      </a:solidFill>
-                      <a:prstDash val="solid"/>
-                      <a:round/>
-                      <a:headEnd type="none" w="sm" len="sm"/>
-                      <a:tailEnd type="none" w="sm" len="sm"/>
-                    </a:lnT>
-                    <a:lnB w="9525" cap="flat" cmpd="sng">
-                      <a:solidFill>
-                        <a:srgbClr val="9E9E9E">
-                          <a:alpha val="0"/>
-                        </a:srgbClr>
-                      </a:solidFill>
-                      <a:prstDash val="solid"/>
-                      <a:round/>
-                      <a:headEnd type="none" w="sm" len="sm"/>
-                      <a:tailEnd type="none" w="sm" len="sm"/>
-                    </a:lnB>
-                  </a:tcPr>
-                </a:tc>
-                <a:tc>
-                  <a:txBody>
-                    <a:bodyPr/>
-                    <a:lstStyle/>
-                    <a:p>
-                      <a:pPr marL="0" lvl="0" indent="0" algn="ctr" rtl="0">
-                        <a:spcBef>
-                          <a:spcPts val="0"/>
-                        </a:spcBef>
-                        <a:spcAft>
-                          <a:spcPts val="0"/>
-                        </a:spcAft>
-                        <a:buNone/>
-                      </a:pPr>
-                      <a:r>
-                        <a:rPr lang="es-AR" sz="1200" dirty="0" err="1">
-                          <a:solidFill>
-                            <a:schemeClr val="bg2"/>
-                          </a:solidFill>
-                          <a:latin typeface="Proxima Nova"/>
-                          <a:ea typeface="Proxima Nova"/>
-                          <a:cs typeface="Proxima Nova"/>
-                          <a:sym typeface="Proxima Nova"/>
-                        </a:rPr>
-                        <a:t>Cap</a:t>
-                      </a:r>
-                      <a:r>
                         <a:rPr lang="es-AR" sz="1200" dirty="0">
                           <a:solidFill>
                             <a:schemeClr val="bg2"/>
@@ -15876,7 +15531,7 @@
                           <a:cs typeface="Proxima Nova"/>
                           <a:sym typeface="Proxima Nova"/>
                         </a:rPr>
-                        <a:t> 3 </a:t>
+                        <a:t>Cap 3.2 a 3.6 </a:t>
                       </a:r>
                       <a:r>
                         <a:rPr lang="en-GB" sz="1200" dirty="0">
@@ -16005,7 +15660,7 @@
                   </a:ext>
                 </a:extLst>
               </a:tr>
-              <a:tr h="505525">
+              <a:tr h="514654">
                 <a:tc>
                   <a:txBody>
                     <a:bodyPr/>
@@ -16099,96 +15754,6 @@
                         <a:buNone/>
                       </a:pPr>
                       <a:r>
-                        <a:rPr lang="en-GB" dirty="0">
-                          <a:latin typeface="Proxima Nova"/>
-                          <a:ea typeface="Proxima Nova"/>
-                          <a:cs typeface="Proxima Nova"/>
-                          <a:sym typeface="Proxima Nova"/>
-                        </a:rPr>
-                        <a:t>3/9</a:t>
-                      </a:r>
-                    </a:p>
-                  </a:txBody>
-                  <a:tcPr marL="91425" marR="91425" marT="91425" marB="91425" anchor="ctr">
-                    <a:lnL w="9525" cap="flat" cmpd="sng">
-                      <a:solidFill>
-                        <a:srgbClr val="9E9E9E">
-                          <a:alpha val="0"/>
-                        </a:srgbClr>
-                      </a:solidFill>
-                      <a:prstDash val="solid"/>
-                      <a:round/>
-                      <a:headEnd type="none" w="sm" len="sm"/>
-                      <a:tailEnd type="none" w="sm" len="sm"/>
-                    </a:lnL>
-                    <a:lnR w="9525" cap="flat" cmpd="sng">
-                      <a:solidFill>
-                        <a:srgbClr val="9E9E9E">
-                          <a:alpha val="0"/>
-                        </a:srgbClr>
-                      </a:solidFill>
-                      <a:prstDash val="solid"/>
-                      <a:round/>
-                      <a:headEnd type="none" w="sm" len="sm"/>
-                      <a:tailEnd type="none" w="sm" len="sm"/>
-                    </a:lnR>
-                    <a:lnT w="9525" cap="flat" cmpd="sng">
-                      <a:solidFill>
-                        <a:srgbClr val="9E9E9E">
-                          <a:alpha val="0"/>
-                        </a:srgbClr>
-                      </a:solidFill>
-                      <a:prstDash val="solid"/>
-                      <a:round/>
-                      <a:headEnd type="none" w="sm" len="sm"/>
-                      <a:tailEnd type="none" w="sm" len="sm"/>
-                    </a:lnT>
-                    <a:lnB w="9525" cap="flat" cmpd="sng">
-                      <a:solidFill>
-                        <a:srgbClr val="9E9E9E">
-                          <a:alpha val="0"/>
-                        </a:srgbClr>
-                      </a:solidFill>
-                      <a:prstDash val="solid"/>
-                      <a:round/>
-                      <a:headEnd type="none" w="sm" len="sm"/>
-                      <a:tailEnd type="none" w="sm" len="sm"/>
-                    </a:lnB>
-                  </a:tcPr>
-                </a:tc>
-                <a:tc>
-                  <a:txBody>
-                    <a:bodyPr/>
-                    <a:lstStyle/>
-                    <a:p>
-                      <a:pPr marL="0" lvl="0" indent="0" algn="ctr" rtl="0">
-                        <a:spcBef>
-                          <a:spcPts val="0"/>
-                        </a:spcBef>
-                        <a:spcAft>
-                          <a:spcPts val="0"/>
-                        </a:spcAft>
-                        <a:buNone/>
-                      </a:pPr>
-                      <a:r>
-                        <a:rPr lang="en-GB" dirty="0" err="1">
-                          <a:latin typeface="Proxima Nova"/>
-                          <a:ea typeface="Proxima Nova"/>
-                          <a:cs typeface="Proxima Nova"/>
-                          <a:sym typeface="Proxima Nova"/>
-                        </a:rPr>
-                        <a:t>Clasificación</a:t>
-                      </a:r>
-                      <a:r>
-                        <a:rPr lang="en-GB" dirty="0">
-                          <a:latin typeface="Proxima Nova"/>
-                          <a:ea typeface="Proxima Nova"/>
-                          <a:cs typeface="Proxima Nova"/>
-                          <a:sym typeface="Proxima Nova"/>
-                        </a:rPr>
-                        <a:t> 1 - </a:t>
-                      </a:r>
-                      <a:r>
                         <a:rPr lang="en-GB" dirty="0" err="1">
                           <a:latin typeface="Proxima Nova"/>
                           <a:ea typeface="Proxima Nova"/>
@@ -16224,7 +15789,7 @@
                     </a:p>
                   </a:txBody>
                   <a:tcPr marL="91425" marR="91425" marT="91425" marB="91425" anchor="ctr">
-                    <a:lnL w="9525" cap="flat" cmpd="sng">
+                    <a:lnL w="9525" cap="flat" cmpd="sng" algn="ctr">
                       <a:solidFill>
                         <a:srgbClr val="9E9E9E">
                           <a:alpha val="0"/>
@@ -16246,7 +15811,7 @@
                       <a:headEnd type="none" w="sm" len="sm"/>
                       <a:tailEnd type="none" w="sm" len="sm"/>
                     </a:lnR>
-                    <a:lnT w="9525" cap="flat" cmpd="sng">
+                    <a:lnT w="9525" cap="flat" cmpd="sng" algn="ctr">
                       <a:solidFill>
                         <a:srgbClr val="9E9E9E">
                           <a:alpha val="0"/>
@@ -16257,7 +15822,7 @@
                       <a:headEnd type="none" w="sm" len="sm"/>
                       <a:tailEnd type="none" w="sm" len="sm"/>
                     </a:lnT>
-                    <a:lnB w="9525" cap="flat" cmpd="sng">
+                    <a:lnB w="9525" cap="flat" cmpd="sng" algn="ctr">
                       <a:solidFill>
                         <a:srgbClr val="9E9E9E">
                           <a:alpha val="0"/>
@@ -16393,7 +15958,7 @@
                   </a:ext>
                 </a:extLst>
               </a:tr>
-              <a:tr h="505525">
+              <a:tr h="514654">
                 <a:tc>
                   <a:txBody>
                     <a:bodyPr/>
@@ -16493,12 +16058,18 @@
                           <a:cs typeface="Proxima Nova"/>
                           <a:sym typeface="Proxima Nova"/>
                         </a:rPr>
-                        <a:t>10/9</a:t>
+                        <a:t>LASSO</a:t>
                       </a:r>
+                      <a:endParaRPr dirty="0">
+                        <a:latin typeface="Proxima Nova"/>
+                        <a:ea typeface="Proxima Nova"/>
+                        <a:cs typeface="Proxima Nova"/>
+                        <a:sym typeface="Proxima Nova"/>
+                      </a:endParaRPr>
                     </a:p>
                   </a:txBody>
                   <a:tcPr marL="91425" marR="91425" marT="91425" marB="91425" anchor="ctr">
-                    <a:lnL w="9525" cap="flat" cmpd="sng">
+                    <a:lnL w="9525" cap="flat" cmpd="sng" algn="ctr">
                       <a:solidFill>
                         <a:srgbClr val="9E9E9E">
                           <a:alpha val="0"/>
@@ -16520,7 +16091,7 @@
                       <a:headEnd type="none" w="sm" len="sm"/>
                       <a:tailEnd type="none" w="sm" len="sm"/>
                     </a:lnR>
-                    <a:lnT w="9525" cap="flat" cmpd="sng">
+                    <a:lnT w="9525" cap="flat" cmpd="sng" algn="ctr">
                       <a:solidFill>
                         <a:srgbClr val="9E9E9E">
                           <a:alpha val="0"/>
@@ -16531,7 +16102,7 @@
                       <a:headEnd type="none" w="sm" len="sm"/>
                       <a:tailEnd type="none" w="sm" len="sm"/>
                     </a:lnT>
-                    <a:lnB w="9525" cap="flat" cmpd="sng">
+                    <a:lnB w="9525" cap="flat" cmpd="sng" algn="ctr">
                       <a:solidFill>
                         <a:srgbClr val="9E9E9E">
                           <a:alpha val="0"/>
@@ -16559,109 +16130,13 @@
                         <a:buNone/>
                       </a:pPr>
                       <a:r>
-                        <a:rPr lang="en-GB" dirty="0" err="1">
-                          <a:latin typeface="Proxima Nova"/>
-                          <a:ea typeface="Proxima Nova"/>
-                          <a:cs typeface="Proxima Nova"/>
-                          <a:sym typeface="Proxima Nova"/>
-                        </a:rPr>
-                        <a:t>Clasificación</a:t>
-                      </a:r>
-                      <a:r>
-                        <a:rPr lang="en-GB" dirty="0">
-                          <a:latin typeface="Proxima Nova"/>
-                          <a:ea typeface="Proxima Nova"/>
-                          <a:cs typeface="Proxima Nova"/>
-                          <a:sym typeface="Proxima Nova"/>
-                        </a:rPr>
-                        <a:t> 2 – KNN y LDA</a:t>
-                      </a:r>
-                      <a:endParaRPr dirty="0">
-                        <a:latin typeface="Proxima Nova"/>
-                        <a:ea typeface="Proxima Nova"/>
-                        <a:cs typeface="Proxima Nova"/>
-                        <a:sym typeface="Proxima Nova"/>
-                      </a:endParaRPr>
-                    </a:p>
-                  </a:txBody>
-                  <a:tcPr marL="91425" marR="91425" marT="91425" marB="91425" anchor="ctr">
-                    <a:lnL w="9525" cap="flat" cmpd="sng">
-                      <a:solidFill>
-                        <a:srgbClr val="9E9E9E">
-                          <a:alpha val="0"/>
-                        </a:srgbClr>
-                      </a:solidFill>
-                      <a:prstDash val="solid"/>
-                      <a:round/>
-                      <a:headEnd type="none" w="sm" len="sm"/>
-                      <a:tailEnd type="none" w="sm" len="sm"/>
-                    </a:lnL>
-                    <a:lnR w="9525" cap="flat" cmpd="sng">
-                      <a:solidFill>
-                        <a:srgbClr val="9E9E9E">
-                          <a:alpha val="0"/>
-                        </a:srgbClr>
-                      </a:solidFill>
-                      <a:prstDash val="solid"/>
-                      <a:round/>
-                      <a:headEnd type="none" w="sm" len="sm"/>
-                      <a:tailEnd type="none" w="sm" len="sm"/>
-                    </a:lnR>
-                    <a:lnT w="9525" cap="flat" cmpd="sng">
-                      <a:solidFill>
-                        <a:srgbClr val="9E9E9E">
-                          <a:alpha val="0"/>
-                        </a:srgbClr>
-                      </a:solidFill>
-                      <a:prstDash val="solid"/>
-                      <a:round/>
-                      <a:headEnd type="none" w="sm" len="sm"/>
-                      <a:tailEnd type="none" w="sm" len="sm"/>
-                    </a:lnT>
-                    <a:lnB w="9525" cap="flat" cmpd="sng">
-                      <a:solidFill>
-                        <a:srgbClr val="9E9E9E">
-                          <a:alpha val="0"/>
-                        </a:srgbClr>
-                      </a:solidFill>
-                      <a:prstDash val="solid"/>
-                      <a:round/>
-                      <a:headEnd type="none" w="sm" len="sm"/>
-                      <a:tailEnd type="none" w="sm" len="sm"/>
-                    </a:lnB>
-                  </a:tcPr>
-                </a:tc>
-                <a:tc>
-                  <a:txBody>
-                    <a:bodyPr/>
-                    <a:lstStyle/>
-                    <a:p>
-                      <a:pPr marL="0" lvl="0" indent="0" algn="ctr" rtl="0">
-                        <a:spcBef>
-                          <a:spcPts val="0"/>
-                        </a:spcBef>
-                        <a:spcAft>
-                          <a:spcPts val="0"/>
-                        </a:spcAft>
-                        <a:buNone/>
-                      </a:pPr>
-                      <a:r>
-                        <a:rPr lang="es-AR" sz="1200" dirty="0" err="1">
-                          <a:latin typeface="Proxima Nova"/>
-                          <a:ea typeface="Proxima Nova"/>
-                          <a:cs typeface="Proxima Nova"/>
-                          <a:sym typeface="Proxima Nova"/>
-                        </a:rPr>
-                        <a:t>Cap</a:t>
-                      </a:r>
-                      <a:r>
                         <a:rPr lang="es-AR" sz="1200" dirty="0">
                           <a:latin typeface="Proxima Nova"/>
                           <a:ea typeface="Proxima Nova"/>
                           <a:cs typeface="Proxima Nova"/>
                           <a:sym typeface="Proxima Nova"/>
                         </a:rPr>
-                        <a:t> 4.4 </a:t>
+                        <a:t>Cap 6.1 a 6.2 </a:t>
                       </a:r>
                       <a:r>
                         <a:rPr lang="en-GB" sz="1200" dirty="0">
@@ -16733,7 +16208,7 @@
                   </a:ext>
                 </a:extLst>
               </a:tr>
-              <a:tr h="505525">
+              <a:tr h="514654">
                 <a:tc>
                   <a:txBody>
                     <a:bodyPr/>
@@ -16827,78 +16302,6 @@
                         <a:buNone/>
                       </a:pPr>
                       <a:r>
-                        <a:rPr lang="en-GB" dirty="0">
-                          <a:latin typeface="Proxima Nova"/>
-                          <a:ea typeface="Proxima Nova"/>
-                          <a:cs typeface="Proxima Nova"/>
-                          <a:sym typeface="Proxima Nova"/>
-                        </a:rPr>
-                        <a:t>17/9</a:t>
-                      </a:r>
-                    </a:p>
-                  </a:txBody>
-                  <a:tcPr marL="91425" marR="91425" marT="91425" marB="91425" anchor="ctr">
-                    <a:lnL w="9525" cap="flat" cmpd="sng">
-                      <a:solidFill>
-                        <a:srgbClr val="9E9E9E">
-                          <a:alpha val="0"/>
-                        </a:srgbClr>
-                      </a:solidFill>
-                      <a:prstDash val="solid"/>
-                      <a:round/>
-                      <a:headEnd type="none" w="sm" len="sm"/>
-                      <a:tailEnd type="none" w="sm" len="sm"/>
-                    </a:lnL>
-                    <a:lnR w="9525" cap="flat" cmpd="sng">
-                      <a:solidFill>
-                        <a:srgbClr val="9E9E9E">
-                          <a:alpha val="0"/>
-                        </a:srgbClr>
-                      </a:solidFill>
-                      <a:prstDash val="solid"/>
-                      <a:round/>
-                      <a:headEnd type="none" w="sm" len="sm"/>
-                      <a:tailEnd type="none" w="sm" len="sm"/>
-                    </a:lnR>
-                    <a:lnT w="9525" cap="flat" cmpd="sng">
-                      <a:solidFill>
-                        <a:srgbClr val="9E9E9E">
-                          <a:alpha val="0"/>
-                        </a:srgbClr>
-                      </a:solidFill>
-                      <a:prstDash val="solid"/>
-                      <a:round/>
-                      <a:headEnd type="none" w="sm" len="sm"/>
-                      <a:tailEnd type="none" w="sm" len="sm"/>
-                    </a:lnT>
-                    <a:lnB w="9525" cap="flat" cmpd="sng">
-                      <a:solidFill>
-                        <a:srgbClr val="9E9E9E">
-                          <a:alpha val="0"/>
-                        </a:srgbClr>
-                      </a:solidFill>
-                      <a:prstDash val="solid"/>
-                      <a:round/>
-                      <a:headEnd type="none" w="sm" len="sm"/>
-                      <a:tailEnd type="none" w="sm" len="sm"/>
-                    </a:lnB>
-                  </a:tcPr>
-                </a:tc>
-                <a:tc>
-                  <a:txBody>
-                    <a:bodyPr/>
-                    <a:lstStyle/>
-                    <a:p>
-                      <a:pPr marL="0" lvl="0" indent="0" algn="ctr" rtl="0">
-                        <a:spcBef>
-                          <a:spcPts val="0"/>
-                        </a:spcBef>
-                        <a:spcAft>
-                          <a:spcPts val="0"/>
-                        </a:spcAft>
-                        <a:buNone/>
-                      </a:pPr>
-                      <a:r>
                         <a:rPr lang="es-AR" dirty="0">
                           <a:latin typeface="Proxima Nova"/>
                           <a:ea typeface="Proxima Nova"/>
@@ -16925,7 +16328,7 @@
                     </a:p>
                   </a:txBody>
                   <a:tcPr marL="91425" marR="91425" marT="91425" marB="91425" anchor="ctr">
-                    <a:lnL w="9525" cap="flat" cmpd="sng">
+                    <a:lnL w="9525" cap="flat" cmpd="sng" algn="ctr">
                       <a:solidFill>
                         <a:srgbClr val="9E9E9E">
                           <a:alpha val="0"/>
@@ -16947,7 +16350,7 @@
                       <a:headEnd type="none" w="sm" len="sm"/>
                       <a:tailEnd type="none" w="sm" len="sm"/>
                     </a:lnR>
-                    <a:lnT w="9525" cap="flat" cmpd="sng">
+                    <a:lnT w="9525" cap="flat" cmpd="sng" algn="ctr">
                       <a:solidFill>
                         <a:srgbClr val="9E9E9E">
                           <a:alpha val="0"/>
@@ -18063,8 +17466,8 @@
           </a:p>
         </p:txBody>
       </p:sp>
-      <mc:AlternateContent xmlns:mc="http://schemas.openxmlformats.org/markup-compatibility/2006">
-        <mc:Choice xmlns:a14="http://schemas.microsoft.com/office/drawing/2010/main" Requires="a14">
+      <mc:AlternateContent xmlns:mc="http://schemas.openxmlformats.org/markup-compatibility/2006" xmlns:a14="http://schemas.microsoft.com/office/drawing/2010/main">
+        <mc:Choice Requires="a14">
           <p:sp>
             <p:nvSpPr>
               <p:cNvPr id="6" name="Google Shape;182;p31">
@@ -18785,7 +18188,7 @@
             </p:txBody>
           </p:sp>
         </mc:Choice>
-        <mc:Fallback>
+        <mc:Fallback xmlns="">
           <p:sp>
             <p:nvSpPr>
               <p:cNvPr id="6" name="Google Shape;182;p31">
@@ -21001,8 +20404,8 @@
           <a:chExt cx="0" cy="0"/>
         </a:xfrm>
       </p:grpSpPr>
-      <mc:AlternateContent xmlns:mc="http://schemas.openxmlformats.org/markup-compatibility/2006">
-        <mc:Choice xmlns:a14="http://schemas.microsoft.com/office/drawing/2010/main" Requires="a14">
+      <mc:AlternateContent xmlns:mc="http://schemas.openxmlformats.org/markup-compatibility/2006" xmlns:a14="http://schemas.microsoft.com/office/drawing/2010/main">
+        <mc:Choice Requires="a14">
           <p:sp>
             <p:nvSpPr>
               <p:cNvPr id="6" name="Google Shape;182;p31">
@@ -21210,13 +20613,7 @@
                         <a:rPr lang="es-MX" b="0" i="1" smtClean="0">
                           <a:latin typeface="Cambria Math" panose="02040503050406030204" pitchFamily="18" charset="0"/>
                         </a:rPr>
-                        <m:t>𝑎𝑗𝑢</m:t>
-                      </m:r>
-                      <m:r>
-                        <a:rPr lang="es-MX" b="0" i="1" smtClean="0">
-                          <a:latin typeface="Cambria Math" panose="02040503050406030204" pitchFamily="18" charset="0"/>
-                        </a:rPr>
-                        <m:t>𝑠𝑡𝑎𝑑𝑜</m:t>
+                        <m:t>𝑎𝑗𝑢𝑠𝑡𝑎𝑑𝑜</m:t>
                       </m:r>
                       <m:r>
                         <a:rPr lang="es-MX" b="0" i="1" smtClean="0">
@@ -21409,7 +20806,7 @@
             </p:txBody>
           </p:sp>
         </mc:Choice>
-        <mc:Fallback>
+        <mc:Fallback xmlns="">
           <p:sp>
             <p:nvSpPr>
               <p:cNvPr id="6" name="Google Shape;182;p31">
@@ -21816,741 +21213,12 @@
           </a:p>
         </p:txBody>
       </p:sp>
-      <p:sp>
-        <p:nvSpPr>
-          <p:cNvPr id="4" name="Rectángulo: esquinas redondeadas 3">
+      <p:grpSp>
+        <p:nvGrpSpPr>
+          <p:cNvPr id="32" name="Grupo 31">
             <a:extLst>
               <a:ext uri="{FF2B5EF4-FFF2-40B4-BE49-F238E27FC236}">
-                <a16:creationId xmlns:a16="http://schemas.microsoft.com/office/drawing/2014/main" id="{C145B3FB-7342-4E71-9BFC-E11EAF6C5DF5}"/>
-              </a:ext>
-            </a:extLst>
-          </p:cNvPr>
-          <p:cNvSpPr/>
-          <p:nvPr/>
-        </p:nvSpPr>
-        <p:spPr>
-          <a:xfrm>
-            <a:off x="3290341" y="1723993"/>
-            <a:ext cx="1828800" cy="457200"/>
-          </a:xfrm>
-          <a:prstGeom prst="roundRect">
-            <a:avLst/>
-          </a:prstGeom>
-          <a:noFill/>
-          <a:ln w="12700">
-            <a:solidFill>
-              <a:schemeClr val="accent4"/>
-            </a:solidFill>
-          </a:ln>
-        </p:spPr>
-        <p:style>
-          <a:lnRef idx="2">
-            <a:schemeClr val="accent1">
-              <a:shade val="50000"/>
-            </a:schemeClr>
-          </a:lnRef>
-          <a:fillRef idx="1">
-            <a:schemeClr val="accent1"/>
-          </a:fillRef>
-          <a:effectRef idx="0">
-            <a:schemeClr val="accent1"/>
-          </a:effectRef>
-          <a:fontRef idx="minor">
-            <a:schemeClr val="lt1"/>
-          </a:fontRef>
-        </p:style>
-        <p:txBody>
-          <a:bodyPr rtlCol="0" anchor="ctr"/>
-          <a:lstStyle/>
-          <a:p>
-            <a:pPr algn="ctr"/>
-            <a:r>
-              <a:rPr lang="es-MX" dirty="0">
-                <a:solidFill>
-                  <a:schemeClr val="accent2"/>
-                </a:solidFill>
-                <a:latin typeface="Proxima Nova" panose="020B0604020202020204" charset="0"/>
-              </a:rPr>
-              <a:t>Aprendizaje supervisado</a:t>
-            </a:r>
-            <a:endParaRPr lang="es-AR" dirty="0">
-              <a:solidFill>
-                <a:schemeClr val="accent2"/>
-              </a:solidFill>
-              <a:latin typeface="Proxima Nova" panose="020B0604020202020204" charset="0"/>
-            </a:endParaRPr>
-          </a:p>
-        </p:txBody>
-      </p:sp>
-      <p:sp>
-        <p:nvSpPr>
-          <p:cNvPr id="5" name="Rectángulo: esquinas redondeadas 4">
-            <a:extLst>
-              <a:ext uri="{FF2B5EF4-FFF2-40B4-BE49-F238E27FC236}">
-                <a16:creationId xmlns:a16="http://schemas.microsoft.com/office/drawing/2014/main" id="{FB632E5A-4EC9-41C2-BBFC-9766265C44FE}"/>
-              </a:ext>
-            </a:extLst>
-          </p:cNvPr>
-          <p:cNvSpPr/>
-          <p:nvPr/>
-        </p:nvSpPr>
-        <p:spPr>
-          <a:xfrm>
-            <a:off x="1176728" y="2438545"/>
-            <a:ext cx="1828800" cy="457200"/>
-          </a:xfrm>
-          <a:prstGeom prst="roundRect">
-            <a:avLst/>
-          </a:prstGeom>
-          <a:noFill/>
-          <a:ln w="12700">
-            <a:solidFill>
-              <a:schemeClr val="accent4"/>
-            </a:solidFill>
-          </a:ln>
-        </p:spPr>
-        <p:style>
-          <a:lnRef idx="2">
-            <a:schemeClr val="accent1">
-              <a:shade val="50000"/>
-            </a:schemeClr>
-          </a:lnRef>
-          <a:fillRef idx="1">
-            <a:schemeClr val="accent1"/>
-          </a:fillRef>
-          <a:effectRef idx="0">
-            <a:schemeClr val="accent1"/>
-          </a:effectRef>
-          <a:fontRef idx="minor">
-            <a:schemeClr val="lt1"/>
-          </a:fontRef>
-        </p:style>
-        <p:txBody>
-          <a:bodyPr rtlCol="0" anchor="ctr"/>
-          <a:lstStyle/>
-          <a:p>
-            <a:pPr algn="ctr"/>
-            <a:r>
-              <a:rPr lang="es-MX" dirty="0">
-                <a:solidFill>
-                  <a:schemeClr val="accent2"/>
-                </a:solidFill>
-                <a:latin typeface="Proxima Nova" panose="020B0604020202020204" charset="0"/>
-              </a:rPr>
-              <a:t>Regresión</a:t>
-            </a:r>
-            <a:endParaRPr lang="es-AR" dirty="0">
-              <a:solidFill>
-                <a:schemeClr val="accent2"/>
-              </a:solidFill>
-              <a:latin typeface="Proxima Nova" panose="020B0604020202020204" charset="0"/>
-            </a:endParaRPr>
-          </a:p>
-        </p:txBody>
-      </p:sp>
-      <p:sp>
-        <p:nvSpPr>
-          <p:cNvPr id="6" name="Rectángulo: esquinas redondeadas 5">
-            <a:extLst>
-              <a:ext uri="{FF2B5EF4-FFF2-40B4-BE49-F238E27FC236}">
-                <a16:creationId xmlns:a16="http://schemas.microsoft.com/office/drawing/2014/main" id="{E47F4ABD-0674-4258-A285-FBF3C6E93617}"/>
-              </a:ext>
-            </a:extLst>
-          </p:cNvPr>
-          <p:cNvSpPr/>
-          <p:nvPr/>
-        </p:nvSpPr>
-        <p:spPr>
-          <a:xfrm>
-            <a:off x="4204741" y="2437608"/>
-            <a:ext cx="1828800" cy="457200"/>
-          </a:xfrm>
-          <a:prstGeom prst="roundRect">
-            <a:avLst/>
-          </a:prstGeom>
-          <a:noFill/>
-          <a:ln w="12700">
-            <a:solidFill>
-              <a:schemeClr val="accent4"/>
-            </a:solidFill>
-          </a:ln>
-        </p:spPr>
-        <p:style>
-          <a:lnRef idx="2">
-            <a:schemeClr val="accent1">
-              <a:shade val="50000"/>
-            </a:schemeClr>
-          </a:lnRef>
-          <a:fillRef idx="1">
-            <a:schemeClr val="accent1"/>
-          </a:fillRef>
-          <a:effectRef idx="0">
-            <a:schemeClr val="accent1"/>
-          </a:effectRef>
-          <a:fontRef idx="minor">
-            <a:schemeClr val="lt1"/>
-          </a:fontRef>
-        </p:style>
-        <p:txBody>
-          <a:bodyPr rtlCol="0" anchor="ctr"/>
-          <a:lstStyle/>
-          <a:p>
-            <a:pPr algn="ctr"/>
-            <a:r>
-              <a:rPr lang="es-MX" dirty="0">
-                <a:solidFill>
-                  <a:schemeClr val="accent2"/>
-                </a:solidFill>
-                <a:latin typeface="Proxima Nova" panose="020B0604020202020204" charset="0"/>
-              </a:rPr>
-              <a:t>Clasificación</a:t>
-            </a:r>
-            <a:endParaRPr lang="es-AR" dirty="0">
-              <a:solidFill>
-                <a:schemeClr val="accent2"/>
-              </a:solidFill>
-              <a:latin typeface="Proxima Nova" panose="020B0604020202020204" charset="0"/>
-            </a:endParaRPr>
-          </a:p>
-        </p:txBody>
-      </p:sp>
-      <p:sp>
-        <p:nvSpPr>
-          <p:cNvPr id="7" name="Hexágono 6">
-            <a:extLst>
-              <a:ext uri="{FF2B5EF4-FFF2-40B4-BE49-F238E27FC236}">
-                <a16:creationId xmlns:a16="http://schemas.microsoft.com/office/drawing/2014/main" id="{B4A15687-AEF3-4D6D-8F47-03315C779737}"/>
-              </a:ext>
-            </a:extLst>
-          </p:cNvPr>
-          <p:cNvSpPr/>
-          <p:nvPr/>
-        </p:nvSpPr>
-        <p:spPr>
-          <a:xfrm>
-            <a:off x="1054011" y="3269424"/>
-            <a:ext cx="1008000" cy="720000"/>
-          </a:xfrm>
-          <a:prstGeom prst="hexagon">
-            <a:avLst/>
-          </a:prstGeom>
-          <a:noFill/>
-          <a:ln w="12700">
-            <a:solidFill>
-              <a:srgbClr val="999999"/>
-            </a:solidFill>
-          </a:ln>
-        </p:spPr>
-        <p:style>
-          <a:lnRef idx="2">
-            <a:schemeClr val="accent1">
-              <a:shade val="50000"/>
-            </a:schemeClr>
-          </a:lnRef>
-          <a:fillRef idx="1">
-            <a:schemeClr val="accent1"/>
-          </a:fillRef>
-          <a:effectRef idx="0">
-            <a:schemeClr val="accent1"/>
-          </a:effectRef>
-          <a:fontRef idx="minor">
-            <a:schemeClr val="lt1"/>
-          </a:fontRef>
-        </p:style>
-        <p:txBody>
-          <a:bodyPr rtlCol="0" anchor="ctr"/>
-          <a:lstStyle/>
-          <a:p>
-            <a:pPr algn="ctr"/>
-            <a:r>
-              <a:rPr lang="es-MX" sz="1050" dirty="0">
-                <a:solidFill>
-                  <a:schemeClr val="accent2"/>
-                </a:solidFill>
-                <a:latin typeface="Proxima Nova" panose="020B0604020202020204" charset="0"/>
-              </a:rPr>
-              <a:t>Simple</a:t>
-            </a:r>
-            <a:endParaRPr lang="es-AR" sz="1050" dirty="0">
-              <a:solidFill>
-                <a:schemeClr val="accent2"/>
-              </a:solidFill>
-              <a:latin typeface="Proxima Nova" panose="020B0604020202020204" charset="0"/>
-            </a:endParaRPr>
-          </a:p>
-        </p:txBody>
-      </p:sp>
-      <p:sp>
-        <p:nvSpPr>
-          <p:cNvPr id="8" name="Hexágono 7">
-            <a:extLst>
-              <a:ext uri="{FF2B5EF4-FFF2-40B4-BE49-F238E27FC236}">
-                <a16:creationId xmlns:a16="http://schemas.microsoft.com/office/drawing/2014/main" id="{3BF65DD4-EAEA-4B1C-BBF0-5A68EE730321}"/>
-              </a:ext>
-            </a:extLst>
-          </p:cNvPr>
-          <p:cNvSpPr/>
-          <p:nvPr/>
-        </p:nvSpPr>
-        <p:spPr>
-          <a:xfrm>
-            <a:off x="2124945" y="3269424"/>
-            <a:ext cx="1008000" cy="720000"/>
-          </a:xfrm>
-          <a:prstGeom prst="hexagon">
-            <a:avLst/>
-          </a:prstGeom>
-          <a:noFill/>
-          <a:ln w="12700">
-            <a:solidFill>
-              <a:schemeClr val="accent4"/>
-            </a:solidFill>
-          </a:ln>
-        </p:spPr>
-        <p:style>
-          <a:lnRef idx="2">
-            <a:schemeClr val="accent1">
-              <a:shade val="50000"/>
-            </a:schemeClr>
-          </a:lnRef>
-          <a:fillRef idx="1">
-            <a:schemeClr val="accent1"/>
-          </a:fillRef>
-          <a:effectRef idx="0">
-            <a:schemeClr val="accent1"/>
-          </a:effectRef>
-          <a:fontRef idx="minor">
-            <a:schemeClr val="lt1"/>
-          </a:fontRef>
-        </p:style>
-        <p:txBody>
-          <a:bodyPr rtlCol="0" anchor="ctr"/>
-          <a:lstStyle/>
-          <a:p>
-            <a:pPr algn="ctr"/>
-            <a:r>
-              <a:rPr lang="es-MX" sz="1050" dirty="0">
-                <a:solidFill>
-                  <a:schemeClr val="accent2"/>
-                </a:solidFill>
-                <a:latin typeface="Proxima Nova" panose="020B0604020202020204" charset="0"/>
-              </a:rPr>
-              <a:t>Múltiple</a:t>
-            </a:r>
-            <a:endParaRPr lang="es-AR" sz="1050" dirty="0">
-              <a:solidFill>
-                <a:schemeClr val="accent2"/>
-              </a:solidFill>
-              <a:latin typeface="Proxima Nova" panose="020B0604020202020204" charset="0"/>
-            </a:endParaRPr>
-          </a:p>
-        </p:txBody>
-      </p:sp>
-      <p:sp>
-        <p:nvSpPr>
-          <p:cNvPr id="12" name="Rectángulo: esquinas redondeadas 11">
-            <a:extLst>
-              <a:ext uri="{FF2B5EF4-FFF2-40B4-BE49-F238E27FC236}">
-                <a16:creationId xmlns:a16="http://schemas.microsoft.com/office/drawing/2014/main" id="{E6F16667-71CD-4624-95E1-607FBD7D6ACF}"/>
-              </a:ext>
-            </a:extLst>
-          </p:cNvPr>
-          <p:cNvSpPr/>
-          <p:nvPr/>
-        </p:nvSpPr>
-        <p:spPr>
-          <a:xfrm>
-            <a:off x="3442741" y="3534116"/>
-            <a:ext cx="1828800" cy="457200"/>
-          </a:xfrm>
-          <a:prstGeom prst="roundRect">
-            <a:avLst/>
-          </a:prstGeom>
-          <a:noFill/>
-          <a:ln w="12700">
-            <a:solidFill>
-              <a:schemeClr val="accent4"/>
-            </a:solidFill>
-          </a:ln>
-        </p:spPr>
-        <p:style>
-          <a:lnRef idx="2">
-            <a:schemeClr val="accent1">
-              <a:shade val="50000"/>
-            </a:schemeClr>
-          </a:lnRef>
-          <a:fillRef idx="1">
-            <a:schemeClr val="accent1"/>
-          </a:fillRef>
-          <a:effectRef idx="0">
-            <a:schemeClr val="accent1"/>
-          </a:effectRef>
-          <a:fontRef idx="minor">
-            <a:schemeClr val="lt1"/>
-          </a:fontRef>
-        </p:style>
-        <p:txBody>
-          <a:bodyPr rtlCol="0" anchor="ctr"/>
-          <a:lstStyle/>
-          <a:p>
-            <a:pPr algn="ctr"/>
-            <a:r>
-              <a:rPr lang="es-MX" dirty="0">
-                <a:solidFill>
-                  <a:schemeClr val="accent2"/>
-                </a:solidFill>
-                <a:latin typeface="Proxima Nova" panose="020B0604020202020204" charset="0"/>
-              </a:rPr>
-              <a:t>No paramétricos</a:t>
-            </a:r>
-            <a:endParaRPr lang="es-AR" dirty="0">
-              <a:solidFill>
-                <a:schemeClr val="accent2"/>
-              </a:solidFill>
-              <a:latin typeface="Proxima Nova" panose="020B0604020202020204" charset="0"/>
-            </a:endParaRPr>
-          </a:p>
-        </p:txBody>
-      </p:sp>
-      <p:sp>
-        <p:nvSpPr>
-          <p:cNvPr id="13" name="Rectángulo: esquinas redondeadas 12">
-            <a:extLst>
-              <a:ext uri="{FF2B5EF4-FFF2-40B4-BE49-F238E27FC236}">
-                <a16:creationId xmlns:a16="http://schemas.microsoft.com/office/drawing/2014/main" id="{F0C0A2D5-0C0B-4E99-BC5A-D714607EBEAC}"/>
-              </a:ext>
-            </a:extLst>
-          </p:cNvPr>
-          <p:cNvSpPr/>
-          <p:nvPr/>
-        </p:nvSpPr>
-        <p:spPr>
-          <a:xfrm>
-            <a:off x="5431437" y="3532224"/>
-            <a:ext cx="1828800" cy="457200"/>
-          </a:xfrm>
-          <a:prstGeom prst="roundRect">
-            <a:avLst/>
-          </a:prstGeom>
-          <a:noFill/>
-          <a:ln w="12700">
-            <a:solidFill>
-              <a:schemeClr val="accent4"/>
-            </a:solidFill>
-          </a:ln>
-        </p:spPr>
-        <p:style>
-          <a:lnRef idx="2">
-            <a:schemeClr val="accent1">
-              <a:shade val="50000"/>
-            </a:schemeClr>
-          </a:lnRef>
-          <a:fillRef idx="1">
-            <a:schemeClr val="accent1"/>
-          </a:fillRef>
-          <a:effectRef idx="0">
-            <a:schemeClr val="accent1"/>
-          </a:effectRef>
-          <a:fontRef idx="minor">
-            <a:schemeClr val="lt1"/>
-          </a:fontRef>
-        </p:style>
-        <p:txBody>
-          <a:bodyPr rtlCol="0" anchor="ctr"/>
-          <a:lstStyle/>
-          <a:p>
-            <a:pPr algn="ctr"/>
-            <a:r>
-              <a:rPr lang="es-MX" dirty="0">
-                <a:solidFill>
-                  <a:schemeClr val="accent2"/>
-                </a:solidFill>
-                <a:latin typeface="Proxima Nova" panose="020B0604020202020204" charset="0"/>
-              </a:rPr>
-              <a:t>Paramétricos</a:t>
-            </a:r>
-            <a:endParaRPr lang="es-AR" dirty="0">
-              <a:solidFill>
-                <a:schemeClr val="accent2"/>
-              </a:solidFill>
-              <a:latin typeface="Proxima Nova" panose="020B0604020202020204" charset="0"/>
-            </a:endParaRPr>
-          </a:p>
-        </p:txBody>
-      </p:sp>
-      <p:cxnSp>
-        <p:nvCxnSpPr>
-          <p:cNvPr id="14" name="Conector recto 13">
-            <a:extLst>
-              <a:ext uri="{FF2B5EF4-FFF2-40B4-BE49-F238E27FC236}">
-                <a16:creationId xmlns:a16="http://schemas.microsoft.com/office/drawing/2014/main" id="{E165C982-3D86-4661-A8BF-8DE48886B6E1}"/>
-              </a:ext>
-            </a:extLst>
-          </p:cNvPr>
-          <p:cNvCxnSpPr>
-            <a:stCxn id="5" idx="2"/>
-          </p:cNvCxnSpPr>
-          <p:nvPr/>
-        </p:nvCxnSpPr>
-        <p:spPr>
-          <a:xfrm flipH="1">
-            <a:off x="1558011" y="2895745"/>
-            <a:ext cx="533117" cy="373679"/>
-          </a:xfrm>
-          <a:prstGeom prst="line">
-            <a:avLst/>
-          </a:prstGeom>
-          <a:ln>
-            <a:solidFill>
-              <a:schemeClr val="accent4"/>
-            </a:solidFill>
-          </a:ln>
-        </p:spPr>
-        <p:style>
-          <a:lnRef idx="1">
-            <a:schemeClr val="accent1"/>
-          </a:lnRef>
-          <a:fillRef idx="0">
-            <a:schemeClr val="accent1"/>
-          </a:fillRef>
-          <a:effectRef idx="0">
-            <a:schemeClr val="accent1"/>
-          </a:effectRef>
-          <a:fontRef idx="minor">
-            <a:schemeClr val="tx1"/>
-          </a:fontRef>
-        </p:style>
-      </p:cxnSp>
-      <p:cxnSp>
-        <p:nvCxnSpPr>
-          <p:cNvPr id="15" name="Conector recto 14">
-            <a:extLst>
-              <a:ext uri="{FF2B5EF4-FFF2-40B4-BE49-F238E27FC236}">
-                <a16:creationId xmlns:a16="http://schemas.microsoft.com/office/drawing/2014/main" id="{5F94F15C-9794-4B1A-B648-4907956D0C58}"/>
-              </a:ext>
-            </a:extLst>
-          </p:cNvPr>
-          <p:cNvCxnSpPr>
-            <a:cxnSpLocks/>
-            <a:stCxn id="5" idx="2"/>
-          </p:cNvCxnSpPr>
-          <p:nvPr/>
-        </p:nvCxnSpPr>
-        <p:spPr>
-          <a:xfrm>
-            <a:off x="2091128" y="2895745"/>
-            <a:ext cx="547038" cy="373679"/>
-          </a:xfrm>
-          <a:prstGeom prst="line">
-            <a:avLst/>
-          </a:prstGeom>
-          <a:ln>
-            <a:solidFill>
-              <a:schemeClr val="accent4"/>
-            </a:solidFill>
-          </a:ln>
-        </p:spPr>
-        <p:style>
-          <a:lnRef idx="1">
-            <a:schemeClr val="accent1"/>
-          </a:lnRef>
-          <a:fillRef idx="0">
-            <a:schemeClr val="accent1"/>
-          </a:fillRef>
-          <a:effectRef idx="0">
-            <a:schemeClr val="accent1"/>
-          </a:effectRef>
-          <a:fontRef idx="minor">
-            <a:schemeClr val="tx1"/>
-          </a:fontRef>
-        </p:style>
-      </p:cxnSp>
-      <p:cxnSp>
-        <p:nvCxnSpPr>
-          <p:cNvPr id="16" name="Conector recto 15">
-            <a:extLst>
-              <a:ext uri="{FF2B5EF4-FFF2-40B4-BE49-F238E27FC236}">
-                <a16:creationId xmlns:a16="http://schemas.microsoft.com/office/drawing/2014/main" id="{2CB6318D-3F7F-4FAF-A4D3-33B8935422D3}"/>
-              </a:ext>
-            </a:extLst>
-          </p:cNvPr>
-          <p:cNvCxnSpPr>
-            <a:cxnSpLocks/>
-            <a:stCxn id="4" idx="2"/>
-            <a:endCxn id="5" idx="0"/>
-          </p:cNvCxnSpPr>
-          <p:nvPr/>
-        </p:nvCxnSpPr>
-        <p:spPr>
-          <a:xfrm flipH="1">
-            <a:off x="2091128" y="2181193"/>
-            <a:ext cx="2113613" cy="257352"/>
-          </a:xfrm>
-          <a:prstGeom prst="line">
-            <a:avLst/>
-          </a:prstGeom>
-          <a:ln>
-            <a:solidFill>
-              <a:schemeClr val="accent4"/>
-            </a:solidFill>
-          </a:ln>
-        </p:spPr>
-        <p:style>
-          <a:lnRef idx="1">
-            <a:schemeClr val="accent1"/>
-          </a:lnRef>
-          <a:fillRef idx="0">
-            <a:schemeClr val="accent1"/>
-          </a:fillRef>
-          <a:effectRef idx="0">
-            <a:schemeClr val="accent1"/>
-          </a:effectRef>
-          <a:fontRef idx="minor">
-            <a:schemeClr val="tx1"/>
-          </a:fontRef>
-        </p:style>
-      </p:cxnSp>
-      <p:cxnSp>
-        <p:nvCxnSpPr>
-          <p:cNvPr id="17" name="Conector recto 16">
-            <a:extLst>
-              <a:ext uri="{FF2B5EF4-FFF2-40B4-BE49-F238E27FC236}">
-                <a16:creationId xmlns:a16="http://schemas.microsoft.com/office/drawing/2014/main" id="{E9EBF89C-6C64-450C-979E-FE87BAAB9EF1}"/>
-              </a:ext>
-            </a:extLst>
-          </p:cNvPr>
-          <p:cNvCxnSpPr>
-            <a:cxnSpLocks/>
-            <a:stCxn id="4" idx="2"/>
-            <a:endCxn id="6" idx="0"/>
-          </p:cNvCxnSpPr>
-          <p:nvPr/>
-        </p:nvCxnSpPr>
-        <p:spPr>
-          <a:xfrm>
-            <a:off x="4204741" y="2181193"/>
-            <a:ext cx="914400" cy="256415"/>
-          </a:xfrm>
-          <a:prstGeom prst="line">
-            <a:avLst/>
-          </a:prstGeom>
-          <a:ln>
-            <a:solidFill>
-              <a:schemeClr val="accent4"/>
-            </a:solidFill>
-          </a:ln>
-        </p:spPr>
-        <p:style>
-          <a:lnRef idx="1">
-            <a:schemeClr val="accent1"/>
-          </a:lnRef>
-          <a:fillRef idx="0">
-            <a:schemeClr val="accent1"/>
-          </a:fillRef>
-          <a:effectRef idx="0">
-            <a:schemeClr val="accent1"/>
-          </a:effectRef>
-          <a:fontRef idx="minor">
-            <a:schemeClr val="tx1"/>
-          </a:fontRef>
-        </p:style>
-      </p:cxnSp>
-      <p:cxnSp>
-        <p:nvCxnSpPr>
-          <p:cNvPr id="18" name="Conector recto 17">
-            <a:extLst>
-              <a:ext uri="{FF2B5EF4-FFF2-40B4-BE49-F238E27FC236}">
-                <a16:creationId xmlns:a16="http://schemas.microsoft.com/office/drawing/2014/main" id="{BE67496B-E5E3-4BB5-B5AD-9E9E323F3564}"/>
-              </a:ext>
-            </a:extLst>
-          </p:cNvPr>
-          <p:cNvCxnSpPr>
-            <a:cxnSpLocks/>
-            <a:stCxn id="6" idx="2"/>
-            <a:endCxn id="12" idx="0"/>
-          </p:cNvCxnSpPr>
-          <p:nvPr/>
-        </p:nvCxnSpPr>
-        <p:spPr>
-          <a:xfrm flipH="1">
-            <a:off x="4357141" y="2894808"/>
-            <a:ext cx="762000" cy="639308"/>
-          </a:xfrm>
-          <a:prstGeom prst="line">
-            <a:avLst/>
-          </a:prstGeom>
-          <a:ln>
-            <a:solidFill>
-              <a:schemeClr val="accent4"/>
-            </a:solidFill>
-          </a:ln>
-        </p:spPr>
-        <p:style>
-          <a:lnRef idx="1">
-            <a:schemeClr val="accent1"/>
-          </a:lnRef>
-          <a:fillRef idx="0">
-            <a:schemeClr val="accent1"/>
-          </a:fillRef>
-          <a:effectRef idx="0">
-            <a:schemeClr val="accent1"/>
-          </a:effectRef>
-          <a:fontRef idx="minor">
-            <a:schemeClr val="tx1"/>
-          </a:fontRef>
-        </p:style>
-      </p:cxnSp>
-      <p:cxnSp>
-        <p:nvCxnSpPr>
-          <p:cNvPr id="19" name="Conector recto 18">
-            <a:extLst>
-              <a:ext uri="{FF2B5EF4-FFF2-40B4-BE49-F238E27FC236}">
-                <a16:creationId xmlns:a16="http://schemas.microsoft.com/office/drawing/2014/main" id="{DD41F7D8-A71A-4F43-9BF8-33342DAA53C9}"/>
-              </a:ext>
-            </a:extLst>
-          </p:cNvPr>
-          <p:cNvCxnSpPr>
-            <a:cxnSpLocks/>
-            <a:stCxn id="6" idx="2"/>
-            <a:endCxn id="13" idx="0"/>
-          </p:cNvCxnSpPr>
-          <p:nvPr/>
-        </p:nvCxnSpPr>
-        <p:spPr>
-          <a:xfrm>
-            <a:off x="5119141" y="2894808"/>
-            <a:ext cx="1226696" cy="637416"/>
-          </a:xfrm>
-          <a:prstGeom prst="line">
-            <a:avLst/>
-          </a:prstGeom>
-          <a:ln>
-            <a:solidFill>
-              <a:schemeClr val="accent4"/>
-            </a:solidFill>
-          </a:ln>
-        </p:spPr>
-        <p:style>
-          <a:lnRef idx="1">
-            <a:schemeClr val="accent1"/>
-          </a:lnRef>
-          <a:fillRef idx="0">
-            <a:schemeClr val="accent1"/>
-          </a:fillRef>
-          <a:effectRef idx="0">
-            <a:schemeClr val="accent1"/>
-          </a:effectRef>
-          <a:fontRef idx="minor">
-            <a:schemeClr val="tx1"/>
-          </a:fontRef>
-        </p:style>
-      </p:cxnSp>
-      <p:grpSp>
-        <p:nvGrpSpPr>
-          <p:cNvPr id="23" name="Grupo 22">
-            <a:extLst>
-              <a:ext uri="{FF2B5EF4-FFF2-40B4-BE49-F238E27FC236}">
-                <a16:creationId xmlns:a16="http://schemas.microsoft.com/office/drawing/2014/main" id="{5C32465C-EC74-46DD-B8A3-9C1C008D8E9F}"/>
+                <a16:creationId xmlns:a16="http://schemas.microsoft.com/office/drawing/2014/main" id="{F45C827A-3A05-4E8E-B492-D5234049AD61}"/>
               </a:ext>
             </a:extLst>
           </p:cNvPr>
@@ -22559,440 +21227,908 @@
         </p:nvGrpSpPr>
         <p:grpSpPr>
           <a:xfrm>
-            <a:off x="3132945" y="3982722"/>
-            <a:ext cx="4451377" cy="993357"/>
-            <a:chOff x="2231068" y="3666366"/>
-            <a:chExt cx="4451377" cy="993357"/>
+            <a:off x="1069512" y="1825828"/>
+            <a:ext cx="6988459" cy="2954374"/>
+            <a:chOff x="1069512" y="1825828"/>
+            <a:chExt cx="6988459" cy="2954374"/>
           </a:xfrm>
         </p:grpSpPr>
-        <p:sp>
-          <p:nvSpPr>
-            <p:cNvPr id="24" name="Hexágono 23">
+        <p:grpSp>
+          <p:nvGrpSpPr>
+            <p:cNvPr id="33" name="Grupo 32">
               <a:extLst>
                 <a:ext uri="{FF2B5EF4-FFF2-40B4-BE49-F238E27FC236}">
-                  <a16:creationId xmlns:a16="http://schemas.microsoft.com/office/drawing/2014/main" id="{66AD62AA-624E-4CB1-A739-3E8BCEB1733F}"/>
+                  <a16:creationId xmlns:a16="http://schemas.microsoft.com/office/drawing/2014/main" id="{A088BB77-3BEC-4F9F-9F69-944FB2B963F3}"/>
                 </a:ext>
               </a:extLst>
             </p:cNvPr>
-            <p:cNvSpPr/>
+            <p:cNvGrpSpPr/>
             <p:nvPr/>
-          </p:nvSpPr>
-          <p:spPr>
+          </p:nvGrpSpPr>
+          <p:grpSpPr>
             <a:xfrm>
-              <a:off x="2231068" y="3939723"/>
-              <a:ext cx="1087946" cy="720000"/>
+              <a:off x="1069512" y="1825828"/>
+              <a:ext cx="6988459" cy="2954374"/>
+              <a:chOff x="367259" y="1400935"/>
+              <a:chExt cx="6988459" cy="2954374"/>
             </a:xfrm>
-            <a:prstGeom prst="hexagon">
-              <a:avLst/>
-            </a:prstGeom>
-            <a:noFill/>
-            <a:ln w="12700">
-              <a:solidFill>
-                <a:schemeClr val="accent4"/>
-              </a:solidFill>
-            </a:ln>
-          </p:spPr>
-          <p:style>
-            <a:lnRef idx="2">
-              <a:schemeClr val="accent1">
-                <a:shade val="50000"/>
-              </a:schemeClr>
-            </a:lnRef>
-            <a:fillRef idx="1">
-              <a:schemeClr val="accent1"/>
-            </a:fillRef>
-            <a:effectRef idx="0">
-              <a:schemeClr val="accent1"/>
-            </a:effectRef>
-            <a:fontRef idx="minor">
-              <a:schemeClr val="lt1"/>
-            </a:fontRef>
-          </p:style>
-          <p:txBody>
-            <a:bodyPr rtlCol="0" anchor="ctr"/>
-            <a:lstStyle/>
-            <a:p>
-              <a:pPr algn="ctr"/>
-              <a:r>
-                <a:rPr lang="es-MX" sz="1050">
+          </p:grpSpPr>
+          <p:sp>
+            <p:nvSpPr>
+              <p:cNvPr id="35" name="Rectángulo: esquinas redondeadas 34">
+                <a:extLst>
+                  <a:ext uri="{FF2B5EF4-FFF2-40B4-BE49-F238E27FC236}">
+                    <a16:creationId xmlns:a16="http://schemas.microsoft.com/office/drawing/2014/main" id="{80A2447E-08F0-4715-8A92-520E66C008A2}"/>
+                  </a:ext>
+                </a:extLst>
+              </p:cNvPr>
+              <p:cNvSpPr/>
+              <p:nvPr/>
+            </p:nvSpPr>
+            <p:spPr>
+              <a:xfrm>
+                <a:off x="2480872" y="1400935"/>
+                <a:ext cx="1828800" cy="457200"/>
+              </a:xfrm>
+              <a:prstGeom prst="roundRect">
+                <a:avLst/>
+              </a:prstGeom>
+              <a:noFill/>
+              <a:ln w="19050">
+                <a:solidFill>
+                  <a:schemeClr val="accent4"/>
+                </a:solidFill>
+              </a:ln>
+            </p:spPr>
+            <p:style>
+              <a:lnRef idx="2">
+                <a:schemeClr val="accent1">
+                  <a:shade val="50000"/>
+                </a:schemeClr>
+              </a:lnRef>
+              <a:fillRef idx="1">
+                <a:schemeClr val="accent1"/>
+              </a:fillRef>
+              <a:effectRef idx="0">
+                <a:schemeClr val="accent1"/>
+              </a:effectRef>
+              <a:fontRef idx="minor">
+                <a:schemeClr val="lt1"/>
+              </a:fontRef>
+            </p:style>
+            <p:txBody>
+              <a:bodyPr rtlCol="0" anchor="ctr"/>
+              <a:lstStyle/>
+              <a:p>
+                <a:pPr algn="ctr"/>
+                <a:r>
+                  <a:rPr lang="es-MX" dirty="0">
+                    <a:solidFill>
+                      <a:schemeClr val="accent2"/>
+                    </a:solidFill>
+                    <a:latin typeface="Proxima Nova" panose="020B0604020202020204" charset="0"/>
+                  </a:rPr>
+                  <a:t>Aprendizaje supervisado</a:t>
+                </a:r>
+                <a:endParaRPr lang="es-AR" dirty="0">
                   <a:solidFill>
                     <a:schemeClr val="accent2"/>
                   </a:solidFill>
                   <a:latin typeface="Proxima Nova" panose="020B0604020202020204" charset="0"/>
-                </a:rPr>
-                <a:t>KNN</a:t>
-              </a:r>
-              <a:endParaRPr lang="es-AR" sz="1050" dirty="0">
+                </a:endParaRPr>
+              </a:p>
+            </p:txBody>
+          </p:sp>
+          <p:sp>
+            <p:nvSpPr>
+              <p:cNvPr id="36" name="Rectángulo: esquinas redondeadas 35">
+                <a:extLst>
+                  <a:ext uri="{FF2B5EF4-FFF2-40B4-BE49-F238E27FC236}">
+                    <a16:creationId xmlns:a16="http://schemas.microsoft.com/office/drawing/2014/main" id="{128487F2-D8B6-4E52-8337-498F8FB5B146}"/>
+                  </a:ext>
+                </a:extLst>
+              </p:cNvPr>
+              <p:cNvSpPr/>
+              <p:nvPr/>
+            </p:nvSpPr>
+            <p:spPr>
+              <a:xfrm>
+                <a:off x="367259" y="2033042"/>
+                <a:ext cx="1828800" cy="457200"/>
+              </a:xfrm>
+              <a:prstGeom prst="roundRect">
+                <a:avLst/>
+              </a:prstGeom>
+              <a:noFill/>
+              <a:ln w="19050">
                 <a:solidFill>
-                  <a:schemeClr val="accent2"/>
+                  <a:schemeClr val="accent4"/>
                 </a:solidFill>
-                <a:latin typeface="Proxima Nova" panose="020B0604020202020204" charset="0"/>
-              </a:endParaRPr>
-            </a:p>
-          </p:txBody>
-        </p:sp>
-        <p:sp>
-          <p:nvSpPr>
-            <p:cNvPr id="25" name="Hexágono 24">
-              <a:extLst>
-                <a:ext uri="{FF2B5EF4-FFF2-40B4-BE49-F238E27FC236}">
-                  <a16:creationId xmlns:a16="http://schemas.microsoft.com/office/drawing/2014/main" id="{B6DEBD11-C370-43EB-B5CD-A85BE9A5D856}"/>
-                </a:ext>
-              </a:extLst>
-            </p:cNvPr>
-            <p:cNvSpPr/>
-            <p:nvPr/>
-          </p:nvSpPr>
-          <p:spPr>
-            <a:xfrm>
-              <a:off x="4465909" y="3939723"/>
-              <a:ext cx="1087946" cy="720000"/>
-            </a:xfrm>
-            <a:prstGeom prst="hexagon">
-              <a:avLst/>
-            </a:prstGeom>
-            <a:noFill/>
-            <a:ln w="28575">
-              <a:solidFill>
-                <a:srgbClr val="63D297"/>
-              </a:solidFill>
-            </a:ln>
-          </p:spPr>
-          <p:style>
-            <a:lnRef idx="2">
-              <a:schemeClr val="accent1">
-                <a:shade val="50000"/>
-              </a:schemeClr>
-            </a:lnRef>
-            <a:fillRef idx="1">
-              <a:schemeClr val="accent1"/>
-            </a:fillRef>
-            <a:effectRef idx="0">
-              <a:schemeClr val="accent1"/>
-            </a:effectRef>
-            <a:fontRef idx="minor">
-              <a:schemeClr val="lt1"/>
-            </a:fontRef>
-          </p:style>
-          <p:txBody>
-            <a:bodyPr rtlCol="0" anchor="ctr"/>
-            <a:lstStyle/>
-            <a:p>
-              <a:pPr algn="ctr"/>
-              <a:r>
-                <a:rPr lang="es-MX" sz="1050" dirty="0">
+              </a:ln>
+            </p:spPr>
+            <p:style>
+              <a:lnRef idx="2">
+                <a:schemeClr val="accent1">
+                  <a:shade val="50000"/>
+                </a:schemeClr>
+              </a:lnRef>
+              <a:fillRef idx="1">
+                <a:schemeClr val="accent1"/>
+              </a:fillRef>
+              <a:effectRef idx="0">
+                <a:schemeClr val="accent1"/>
+              </a:effectRef>
+              <a:fontRef idx="minor">
+                <a:schemeClr val="lt1"/>
+              </a:fontRef>
+            </p:style>
+            <p:txBody>
+              <a:bodyPr rtlCol="0" anchor="ctr"/>
+              <a:lstStyle/>
+              <a:p>
+                <a:pPr algn="ctr"/>
+                <a:r>
+                  <a:rPr lang="es-MX" dirty="0">
+                    <a:solidFill>
+                      <a:schemeClr val="accent2"/>
+                    </a:solidFill>
+                    <a:latin typeface="Proxima Nova" panose="020B0604020202020204" charset="0"/>
+                  </a:rPr>
+                  <a:t>Regresión</a:t>
+                </a:r>
+                <a:endParaRPr lang="es-AR" dirty="0">
                   <a:solidFill>
                     <a:schemeClr val="accent2"/>
                   </a:solidFill>
                   <a:latin typeface="Proxima Nova" panose="020B0604020202020204" charset="0"/>
-                </a:rPr>
-                <a:t>Regresión logística</a:t>
-              </a:r>
-              <a:endParaRPr lang="es-AR" sz="1050" dirty="0">
+                </a:endParaRPr>
+              </a:p>
+            </p:txBody>
+          </p:sp>
+          <p:sp>
+            <p:nvSpPr>
+              <p:cNvPr id="37" name="Rectángulo: esquinas redondeadas 36">
+                <a:extLst>
+                  <a:ext uri="{FF2B5EF4-FFF2-40B4-BE49-F238E27FC236}">
+                    <a16:creationId xmlns:a16="http://schemas.microsoft.com/office/drawing/2014/main" id="{109A2646-84D5-4AB1-BB5A-32DE4FE6AE45}"/>
+                  </a:ext>
+                </a:extLst>
+              </p:cNvPr>
+              <p:cNvSpPr/>
+              <p:nvPr/>
+            </p:nvSpPr>
+            <p:spPr>
+              <a:xfrm>
+                <a:off x="4736879" y="2032105"/>
+                <a:ext cx="1828800" cy="457200"/>
+              </a:xfrm>
+              <a:prstGeom prst="roundRect">
+                <a:avLst/>
+              </a:prstGeom>
+              <a:noFill/>
+              <a:ln w="19050">
                 <a:solidFill>
-                  <a:schemeClr val="accent2"/>
+                  <a:schemeClr val="accent4"/>
                 </a:solidFill>
-                <a:latin typeface="Proxima Nova" panose="020B0604020202020204" charset="0"/>
-              </a:endParaRPr>
-            </a:p>
-          </p:txBody>
-        </p:sp>
-        <p:sp>
-          <p:nvSpPr>
-            <p:cNvPr id="26" name="Hexágono 25">
-              <a:extLst>
-                <a:ext uri="{FF2B5EF4-FFF2-40B4-BE49-F238E27FC236}">
-                  <a16:creationId xmlns:a16="http://schemas.microsoft.com/office/drawing/2014/main" id="{8B8272A9-08DB-4DF0-B285-A5A0125E7E9B}"/>
-                </a:ext>
-              </a:extLst>
-            </p:cNvPr>
-            <p:cNvSpPr/>
-            <p:nvPr/>
-          </p:nvSpPr>
-          <p:spPr>
-            <a:xfrm>
-              <a:off x="5594499" y="3939723"/>
-              <a:ext cx="1087946" cy="720000"/>
-            </a:xfrm>
-            <a:prstGeom prst="hexagon">
-              <a:avLst/>
-            </a:prstGeom>
-            <a:noFill/>
-            <a:ln w="12700">
-              <a:solidFill>
-                <a:schemeClr val="accent4"/>
-              </a:solidFill>
-            </a:ln>
-          </p:spPr>
-          <p:style>
-            <a:lnRef idx="2">
-              <a:schemeClr val="accent1">
-                <a:shade val="50000"/>
-              </a:schemeClr>
-            </a:lnRef>
-            <a:fillRef idx="1">
-              <a:schemeClr val="accent1"/>
-            </a:fillRef>
-            <a:effectRef idx="0">
-              <a:schemeClr val="accent1"/>
-            </a:effectRef>
-            <a:fontRef idx="minor">
-              <a:schemeClr val="lt1"/>
-            </a:fontRef>
-          </p:style>
-          <p:txBody>
-            <a:bodyPr rtlCol="0" anchor="ctr"/>
-            <a:lstStyle/>
-            <a:p>
-              <a:pPr algn="ctr"/>
-              <a:r>
-                <a:rPr lang="es-MX" sz="1050" dirty="0">
+              </a:ln>
+            </p:spPr>
+            <p:style>
+              <a:lnRef idx="2">
+                <a:schemeClr val="accent1">
+                  <a:shade val="50000"/>
+                </a:schemeClr>
+              </a:lnRef>
+              <a:fillRef idx="1">
+                <a:schemeClr val="accent1"/>
+              </a:fillRef>
+              <a:effectRef idx="0">
+                <a:schemeClr val="accent1"/>
+              </a:effectRef>
+              <a:fontRef idx="minor">
+                <a:schemeClr val="lt1"/>
+              </a:fontRef>
+            </p:style>
+            <p:txBody>
+              <a:bodyPr rtlCol="0" anchor="ctr"/>
+              <a:lstStyle/>
+              <a:p>
+                <a:pPr algn="ctr"/>
+                <a:r>
+                  <a:rPr lang="es-MX" dirty="0">
+                    <a:solidFill>
+                      <a:schemeClr val="accent2"/>
+                    </a:solidFill>
+                    <a:latin typeface="Proxima Nova" panose="020B0604020202020204" charset="0"/>
+                  </a:rPr>
+                  <a:t>Clasificación</a:t>
+                </a:r>
+                <a:endParaRPr lang="es-AR" dirty="0">
                   <a:solidFill>
                     <a:schemeClr val="accent2"/>
                   </a:solidFill>
                   <a:latin typeface="Proxima Nova" panose="020B0604020202020204" charset="0"/>
-                </a:rPr>
-                <a:t>LDA/QDA</a:t>
-              </a:r>
-              <a:endParaRPr lang="es-AR" sz="1050" dirty="0">
+                </a:endParaRPr>
+              </a:p>
+            </p:txBody>
+          </p:sp>
+          <p:sp>
+            <p:nvSpPr>
+              <p:cNvPr id="38" name="Hexágono 37">
+                <a:extLst>
+                  <a:ext uri="{FF2B5EF4-FFF2-40B4-BE49-F238E27FC236}">
+                    <a16:creationId xmlns:a16="http://schemas.microsoft.com/office/drawing/2014/main" id="{BD031B1D-4A5C-49A1-8B03-8C5D7F0F7ADD}"/>
+                  </a:ext>
+                </a:extLst>
+              </p:cNvPr>
+              <p:cNvSpPr/>
+              <p:nvPr/>
+            </p:nvSpPr>
+            <p:spPr>
+              <a:xfrm>
+                <a:off x="2180183" y="3527498"/>
+                <a:ext cx="1080000" cy="720000"/>
+              </a:xfrm>
+              <a:prstGeom prst="hexagon">
+                <a:avLst/>
+              </a:prstGeom>
+              <a:noFill/>
+              <a:ln w="19050">
                 <a:solidFill>
-                  <a:schemeClr val="accent2"/>
+                  <a:schemeClr val="accent4"/>
                 </a:solidFill>
-                <a:latin typeface="Proxima Nova" panose="020B0604020202020204" charset="0"/>
-              </a:endParaRPr>
-            </a:p>
-          </p:txBody>
-        </p:sp>
+              </a:ln>
+            </p:spPr>
+            <p:style>
+              <a:lnRef idx="2">
+                <a:schemeClr val="accent1">
+                  <a:shade val="50000"/>
+                </a:schemeClr>
+              </a:lnRef>
+              <a:fillRef idx="1">
+                <a:schemeClr val="accent1"/>
+              </a:fillRef>
+              <a:effectRef idx="0">
+                <a:schemeClr val="accent1"/>
+              </a:effectRef>
+              <a:fontRef idx="minor">
+                <a:schemeClr val="lt1"/>
+              </a:fontRef>
+            </p:style>
+            <p:txBody>
+              <a:bodyPr rtlCol="0" anchor="ctr"/>
+              <a:lstStyle/>
+              <a:p>
+                <a:pPr algn="ctr"/>
+                <a:r>
+                  <a:rPr lang="es-MX" sz="1050" dirty="0">
+                    <a:solidFill>
+                      <a:schemeClr val="accent2"/>
+                    </a:solidFill>
+                    <a:latin typeface="Proxima Nova" panose="020B0604020202020204" charset="0"/>
+                  </a:rPr>
+                  <a:t>Regresión lineal</a:t>
+                </a:r>
+                <a:endParaRPr lang="es-AR" sz="1050" dirty="0">
+                  <a:solidFill>
+                    <a:schemeClr val="accent2"/>
+                  </a:solidFill>
+                  <a:latin typeface="Proxima Nova" panose="020B0604020202020204" charset="0"/>
+                </a:endParaRPr>
+              </a:p>
+            </p:txBody>
+          </p:sp>
+          <p:sp>
+            <p:nvSpPr>
+              <p:cNvPr id="39" name="Rectángulo: esquinas redondeadas 38">
+                <a:extLst>
+                  <a:ext uri="{FF2B5EF4-FFF2-40B4-BE49-F238E27FC236}">
+                    <a16:creationId xmlns:a16="http://schemas.microsoft.com/office/drawing/2014/main" id="{AF034FA1-B2BB-434E-ABFA-8D906D8E3AEA}"/>
+                  </a:ext>
+                </a:extLst>
+              </p:cNvPr>
+              <p:cNvSpPr/>
+              <p:nvPr/>
+            </p:nvSpPr>
+            <p:spPr>
+              <a:xfrm>
+                <a:off x="3974879" y="2798833"/>
+                <a:ext cx="1584000" cy="457200"/>
+              </a:xfrm>
+              <a:prstGeom prst="roundRect">
+                <a:avLst/>
+              </a:prstGeom>
+              <a:noFill/>
+              <a:ln w="19050">
+                <a:solidFill>
+                  <a:schemeClr val="accent4"/>
+                </a:solidFill>
+              </a:ln>
+            </p:spPr>
+            <p:style>
+              <a:lnRef idx="2">
+                <a:schemeClr val="accent1">
+                  <a:shade val="50000"/>
+                </a:schemeClr>
+              </a:lnRef>
+              <a:fillRef idx="1">
+                <a:schemeClr val="accent1"/>
+              </a:fillRef>
+              <a:effectRef idx="0">
+                <a:schemeClr val="accent1"/>
+              </a:effectRef>
+              <a:fontRef idx="minor">
+                <a:schemeClr val="lt1"/>
+              </a:fontRef>
+            </p:style>
+            <p:txBody>
+              <a:bodyPr rtlCol="0" anchor="ctr"/>
+              <a:lstStyle/>
+              <a:p>
+                <a:pPr algn="ctr"/>
+                <a:r>
+                  <a:rPr lang="es-MX" dirty="0">
+                    <a:solidFill>
+                      <a:schemeClr val="accent2"/>
+                    </a:solidFill>
+                    <a:latin typeface="Proxima Nova" panose="020B0604020202020204" charset="0"/>
+                  </a:rPr>
+                  <a:t>Paramétricos</a:t>
+                </a:r>
+                <a:endParaRPr lang="es-AR" dirty="0">
+                  <a:solidFill>
+                    <a:schemeClr val="accent2"/>
+                  </a:solidFill>
+                  <a:latin typeface="Proxima Nova" panose="020B0604020202020204" charset="0"/>
+                </a:endParaRPr>
+              </a:p>
+            </p:txBody>
+          </p:sp>
+          <p:cxnSp>
+            <p:nvCxnSpPr>
+              <p:cNvPr id="40" name="Conector recto 39">
+                <a:extLst>
+                  <a:ext uri="{FF2B5EF4-FFF2-40B4-BE49-F238E27FC236}">
+                    <a16:creationId xmlns:a16="http://schemas.microsoft.com/office/drawing/2014/main" id="{50F7C95E-058B-4338-B7E4-094DFB83163D}"/>
+                  </a:ext>
+                </a:extLst>
+              </p:cNvPr>
+              <p:cNvCxnSpPr>
+                <a:cxnSpLocks/>
+                <a:stCxn id="36" idx="2"/>
+                <a:endCxn id="46" idx="0"/>
+              </p:cNvCxnSpPr>
+              <p:nvPr/>
+            </p:nvCxnSpPr>
+            <p:spPr>
+              <a:xfrm>
+                <a:off x="1281659" y="2490242"/>
+                <a:ext cx="1430895" cy="331749"/>
+              </a:xfrm>
+              <a:prstGeom prst="line">
+                <a:avLst/>
+              </a:prstGeom>
+              <a:ln w="19050">
+                <a:solidFill>
+                  <a:schemeClr val="accent4"/>
+                </a:solidFill>
+              </a:ln>
+            </p:spPr>
+            <p:style>
+              <a:lnRef idx="1">
+                <a:schemeClr val="accent1"/>
+              </a:lnRef>
+              <a:fillRef idx="0">
+                <a:schemeClr val="accent1"/>
+              </a:fillRef>
+              <a:effectRef idx="0">
+                <a:schemeClr val="accent1"/>
+              </a:effectRef>
+              <a:fontRef idx="minor">
+                <a:schemeClr val="tx1"/>
+              </a:fontRef>
+            </p:style>
+          </p:cxnSp>
+          <p:cxnSp>
+            <p:nvCxnSpPr>
+              <p:cNvPr id="41" name="Conector recto 40">
+                <a:extLst>
+                  <a:ext uri="{FF2B5EF4-FFF2-40B4-BE49-F238E27FC236}">
+                    <a16:creationId xmlns:a16="http://schemas.microsoft.com/office/drawing/2014/main" id="{C70CB3C9-B8A1-43CD-B1A6-A1884D133897}"/>
+                  </a:ext>
+                </a:extLst>
+              </p:cNvPr>
+              <p:cNvCxnSpPr>
+                <a:cxnSpLocks/>
+                <a:stCxn id="35" idx="2"/>
+                <a:endCxn id="36" idx="0"/>
+              </p:cNvCxnSpPr>
+              <p:nvPr/>
+            </p:nvCxnSpPr>
+            <p:spPr>
+              <a:xfrm flipH="1">
+                <a:off x="1281659" y="1858135"/>
+                <a:ext cx="2113613" cy="174907"/>
+              </a:xfrm>
+              <a:prstGeom prst="line">
+                <a:avLst/>
+              </a:prstGeom>
+              <a:ln w="19050">
+                <a:solidFill>
+                  <a:schemeClr val="accent4"/>
+                </a:solidFill>
+              </a:ln>
+            </p:spPr>
+            <p:style>
+              <a:lnRef idx="1">
+                <a:schemeClr val="accent1"/>
+              </a:lnRef>
+              <a:fillRef idx="0">
+                <a:schemeClr val="accent1"/>
+              </a:fillRef>
+              <a:effectRef idx="0">
+                <a:schemeClr val="accent1"/>
+              </a:effectRef>
+              <a:fontRef idx="minor">
+                <a:schemeClr val="tx1"/>
+              </a:fontRef>
+            </p:style>
+          </p:cxnSp>
+          <p:cxnSp>
+            <p:nvCxnSpPr>
+              <p:cNvPr id="42" name="Conector recto 41">
+                <a:extLst>
+                  <a:ext uri="{FF2B5EF4-FFF2-40B4-BE49-F238E27FC236}">
+                    <a16:creationId xmlns:a16="http://schemas.microsoft.com/office/drawing/2014/main" id="{BDDB8A03-5FC0-4A11-9353-ECF40D8E4D22}"/>
+                  </a:ext>
+                </a:extLst>
+              </p:cNvPr>
+              <p:cNvCxnSpPr>
+                <a:cxnSpLocks/>
+                <a:stCxn id="35" idx="2"/>
+                <a:endCxn id="37" idx="0"/>
+              </p:cNvCxnSpPr>
+              <p:nvPr/>
+            </p:nvCxnSpPr>
+            <p:spPr>
+              <a:xfrm>
+                <a:off x="3395272" y="1858135"/>
+                <a:ext cx="2256007" cy="173970"/>
+              </a:xfrm>
+              <a:prstGeom prst="line">
+                <a:avLst/>
+              </a:prstGeom>
+              <a:ln w="19050">
+                <a:solidFill>
+                  <a:schemeClr val="accent4"/>
+                </a:solidFill>
+              </a:ln>
+            </p:spPr>
+            <p:style>
+              <a:lnRef idx="1">
+                <a:schemeClr val="accent1"/>
+              </a:lnRef>
+              <a:fillRef idx="0">
+                <a:schemeClr val="accent1"/>
+              </a:fillRef>
+              <a:effectRef idx="0">
+                <a:schemeClr val="accent1"/>
+              </a:effectRef>
+              <a:fontRef idx="minor">
+                <a:schemeClr val="tx1"/>
+              </a:fontRef>
+            </p:style>
+          </p:cxnSp>
+          <p:cxnSp>
+            <p:nvCxnSpPr>
+              <p:cNvPr id="43" name="Conector recto 42">
+                <a:extLst>
+                  <a:ext uri="{FF2B5EF4-FFF2-40B4-BE49-F238E27FC236}">
+                    <a16:creationId xmlns:a16="http://schemas.microsoft.com/office/drawing/2014/main" id="{34520F01-DBEA-4749-91DB-66C4A35B24DF}"/>
+                  </a:ext>
+                </a:extLst>
+              </p:cNvPr>
+              <p:cNvCxnSpPr>
+                <a:cxnSpLocks/>
+                <a:stCxn id="37" idx="2"/>
+                <a:endCxn id="39" idx="0"/>
+              </p:cNvCxnSpPr>
+              <p:nvPr/>
+            </p:nvCxnSpPr>
+            <p:spPr>
+              <a:xfrm flipH="1">
+                <a:off x="4766879" y="2489305"/>
+                <a:ext cx="884400" cy="309528"/>
+              </a:xfrm>
+              <a:prstGeom prst="line">
+                <a:avLst/>
+              </a:prstGeom>
+              <a:ln w="19050">
+                <a:solidFill>
+                  <a:schemeClr val="accent4"/>
+                </a:solidFill>
+              </a:ln>
+            </p:spPr>
+            <p:style>
+              <a:lnRef idx="1">
+                <a:schemeClr val="accent1"/>
+              </a:lnRef>
+              <a:fillRef idx="0">
+                <a:schemeClr val="accent1"/>
+              </a:fillRef>
+              <a:effectRef idx="0">
+                <a:schemeClr val="accent1"/>
+              </a:effectRef>
+              <a:fontRef idx="minor">
+                <a:schemeClr val="tx1"/>
+              </a:fontRef>
+            </p:style>
+          </p:cxnSp>
+          <p:sp>
+            <p:nvSpPr>
+              <p:cNvPr id="44" name="Hexágono 43">
+                <a:extLst>
+                  <a:ext uri="{FF2B5EF4-FFF2-40B4-BE49-F238E27FC236}">
+                    <a16:creationId xmlns:a16="http://schemas.microsoft.com/office/drawing/2014/main" id="{245E4CB7-BE5A-4E6D-9C5B-09FEB1D978A7}"/>
+                  </a:ext>
+                </a:extLst>
+              </p:cNvPr>
+              <p:cNvSpPr/>
+              <p:nvPr/>
+            </p:nvSpPr>
+            <p:spPr>
+              <a:xfrm>
+                <a:off x="4239730" y="3527498"/>
+                <a:ext cx="1080000" cy="720000"/>
+              </a:xfrm>
+              <a:prstGeom prst="hexagon">
+                <a:avLst/>
+              </a:prstGeom>
+              <a:noFill/>
+              <a:ln w="28575">
+                <a:solidFill>
+                  <a:srgbClr val="63D297"/>
+                </a:solidFill>
+              </a:ln>
+            </p:spPr>
+            <p:style>
+              <a:lnRef idx="2">
+                <a:schemeClr val="accent1">
+                  <a:shade val="50000"/>
+                </a:schemeClr>
+              </a:lnRef>
+              <a:fillRef idx="1">
+                <a:schemeClr val="accent1"/>
+              </a:fillRef>
+              <a:effectRef idx="0">
+                <a:schemeClr val="accent1"/>
+              </a:effectRef>
+              <a:fontRef idx="minor">
+                <a:schemeClr val="lt1"/>
+              </a:fontRef>
+            </p:style>
+            <p:txBody>
+              <a:bodyPr rtlCol="0" anchor="ctr"/>
+              <a:lstStyle/>
+              <a:p>
+                <a:pPr algn="ctr"/>
+                <a:r>
+                  <a:rPr lang="es-MX" sz="1050" dirty="0">
+                    <a:solidFill>
+                      <a:schemeClr val="accent2"/>
+                    </a:solidFill>
+                    <a:latin typeface="Proxima Nova" panose="020B0604020202020204" charset="0"/>
+                  </a:rPr>
+                  <a:t>Regresión logística</a:t>
+                </a:r>
+                <a:endParaRPr lang="es-AR" sz="1050" dirty="0">
+                  <a:solidFill>
+                    <a:schemeClr val="accent2"/>
+                  </a:solidFill>
+                  <a:latin typeface="Proxima Nova" panose="020B0604020202020204" charset="0"/>
+                </a:endParaRPr>
+              </a:p>
+            </p:txBody>
+          </p:sp>
+          <p:cxnSp>
+            <p:nvCxnSpPr>
+              <p:cNvPr id="45" name="Conector recto 44">
+                <a:extLst>
+                  <a:ext uri="{FF2B5EF4-FFF2-40B4-BE49-F238E27FC236}">
+                    <a16:creationId xmlns:a16="http://schemas.microsoft.com/office/drawing/2014/main" id="{BFA4B7B4-FE2F-4C54-805D-98322B6F27CF}"/>
+                  </a:ext>
+                </a:extLst>
+              </p:cNvPr>
+              <p:cNvCxnSpPr>
+                <a:cxnSpLocks/>
+              </p:cNvCxnSpPr>
+              <p:nvPr/>
+            </p:nvCxnSpPr>
+            <p:spPr>
+              <a:xfrm flipH="1">
+                <a:off x="4776208" y="3256033"/>
+                <a:ext cx="0" cy="270528"/>
+              </a:xfrm>
+              <a:prstGeom prst="line">
+                <a:avLst/>
+              </a:prstGeom>
+              <a:ln w="19050">
+                <a:solidFill>
+                  <a:schemeClr val="accent4"/>
+                </a:solidFill>
+              </a:ln>
+            </p:spPr>
+            <p:style>
+              <a:lnRef idx="1">
+                <a:schemeClr val="accent1"/>
+              </a:lnRef>
+              <a:fillRef idx="0">
+                <a:schemeClr val="accent1"/>
+              </a:fillRef>
+              <a:effectRef idx="0">
+                <a:schemeClr val="accent1"/>
+              </a:effectRef>
+              <a:fontRef idx="minor">
+                <a:schemeClr val="tx1"/>
+              </a:fontRef>
+            </p:style>
+          </p:cxnSp>
+          <p:sp>
+            <p:nvSpPr>
+              <p:cNvPr id="46" name="Rectángulo: esquinas redondeadas 45">
+                <a:extLst>
+                  <a:ext uri="{FF2B5EF4-FFF2-40B4-BE49-F238E27FC236}">
+                    <a16:creationId xmlns:a16="http://schemas.microsoft.com/office/drawing/2014/main" id="{DE41A2D0-A8DC-40F2-98E6-142BEC06B6AE}"/>
+                  </a:ext>
+                </a:extLst>
+              </p:cNvPr>
+              <p:cNvSpPr/>
+              <p:nvPr/>
+            </p:nvSpPr>
+            <p:spPr>
+              <a:xfrm>
+                <a:off x="1920554" y="2821991"/>
+                <a:ext cx="1584000" cy="457200"/>
+              </a:xfrm>
+              <a:prstGeom prst="roundRect">
+                <a:avLst/>
+              </a:prstGeom>
+              <a:noFill/>
+              <a:ln w="19050">
+                <a:solidFill>
+                  <a:schemeClr val="accent4"/>
+                </a:solidFill>
+              </a:ln>
+            </p:spPr>
+            <p:style>
+              <a:lnRef idx="2">
+                <a:schemeClr val="accent1">
+                  <a:shade val="50000"/>
+                </a:schemeClr>
+              </a:lnRef>
+              <a:fillRef idx="1">
+                <a:schemeClr val="accent1"/>
+              </a:fillRef>
+              <a:effectRef idx="0">
+                <a:schemeClr val="accent1"/>
+              </a:effectRef>
+              <a:fontRef idx="minor">
+                <a:schemeClr val="lt1"/>
+              </a:fontRef>
+            </p:style>
+            <p:txBody>
+              <a:bodyPr rtlCol="0" anchor="ctr"/>
+              <a:lstStyle/>
+              <a:p>
+                <a:pPr algn="ctr"/>
+                <a:r>
+                  <a:rPr lang="es-MX" dirty="0">
+                    <a:solidFill>
+                      <a:schemeClr val="accent2"/>
+                    </a:solidFill>
+                    <a:latin typeface="Proxima Nova" panose="020B0604020202020204" charset="0"/>
+                  </a:rPr>
+                  <a:t>Paramétricos</a:t>
+                </a:r>
+                <a:endParaRPr lang="es-AR" dirty="0">
+                  <a:solidFill>
+                    <a:schemeClr val="accent2"/>
+                  </a:solidFill>
+                  <a:latin typeface="Proxima Nova" panose="020B0604020202020204" charset="0"/>
+                </a:endParaRPr>
+              </a:p>
+            </p:txBody>
+          </p:sp>
+          <p:cxnSp>
+            <p:nvCxnSpPr>
+              <p:cNvPr id="47" name="Conector recto 46">
+                <a:extLst>
+                  <a:ext uri="{FF2B5EF4-FFF2-40B4-BE49-F238E27FC236}">
+                    <a16:creationId xmlns:a16="http://schemas.microsoft.com/office/drawing/2014/main" id="{573B2E7A-22E5-4BC5-A984-41F89E5C5E1D}"/>
+                  </a:ext>
+                </a:extLst>
+              </p:cNvPr>
+              <p:cNvCxnSpPr>
+                <a:cxnSpLocks/>
+              </p:cNvCxnSpPr>
+              <p:nvPr/>
+            </p:nvCxnSpPr>
+            <p:spPr>
+              <a:xfrm>
+                <a:off x="2712554" y="3279191"/>
+                <a:ext cx="0" cy="247370"/>
+              </a:xfrm>
+              <a:prstGeom prst="line">
+                <a:avLst/>
+              </a:prstGeom>
+              <a:ln w="19050">
+                <a:solidFill>
+                  <a:schemeClr val="accent4"/>
+                </a:solidFill>
+              </a:ln>
+            </p:spPr>
+            <p:style>
+              <a:lnRef idx="1">
+                <a:schemeClr val="accent1"/>
+              </a:lnRef>
+              <a:fillRef idx="0">
+                <a:schemeClr val="accent1"/>
+              </a:fillRef>
+              <a:effectRef idx="0">
+                <a:schemeClr val="accent1"/>
+              </a:effectRef>
+              <a:fontRef idx="minor">
+                <a:schemeClr val="tx1"/>
+              </a:fontRef>
+            </p:style>
+          </p:cxnSp>
+          <p:sp>
+            <p:nvSpPr>
+              <p:cNvPr id="48" name="Rectángulo: esquinas redondeadas 47">
+                <a:extLst>
+                  <a:ext uri="{FF2B5EF4-FFF2-40B4-BE49-F238E27FC236}">
+                    <a16:creationId xmlns:a16="http://schemas.microsoft.com/office/drawing/2014/main" id="{211F59A7-7C9E-4271-BDEB-8ED49C3F9A28}"/>
+                  </a:ext>
+                </a:extLst>
+              </p:cNvPr>
+              <p:cNvSpPr/>
+              <p:nvPr/>
+            </p:nvSpPr>
+            <p:spPr>
+              <a:xfrm>
+                <a:off x="2023672" y="3432749"/>
+                <a:ext cx="3477717" cy="922560"/>
+              </a:xfrm>
+              <a:prstGeom prst="roundRect">
+                <a:avLst/>
+              </a:prstGeom>
+              <a:noFill/>
+              <a:ln>
+                <a:solidFill>
+                  <a:schemeClr val="accent4"/>
+                </a:solidFill>
+                <a:prstDash val="dash"/>
+              </a:ln>
+            </p:spPr>
+            <p:style>
+              <a:lnRef idx="2">
+                <a:schemeClr val="accent1">
+                  <a:shade val="50000"/>
+                </a:schemeClr>
+              </a:lnRef>
+              <a:fillRef idx="1">
+                <a:schemeClr val="accent1"/>
+              </a:fillRef>
+              <a:effectRef idx="0">
+                <a:schemeClr val="accent1"/>
+              </a:effectRef>
+              <a:fontRef idx="minor">
+                <a:schemeClr val="lt1"/>
+              </a:fontRef>
+            </p:style>
+            <p:txBody>
+              <a:bodyPr rtlCol="0" anchor="ctr"/>
+              <a:lstStyle/>
+              <a:p>
+                <a:pPr algn="ctr"/>
+                <a:endParaRPr lang="es-AR"/>
+              </a:p>
+            </p:txBody>
+          </p:sp>
+          <p:sp>
+            <p:nvSpPr>
+              <p:cNvPr id="49" name="Hexágono 48">
+                <a:extLst>
+                  <a:ext uri="{FF2B5EF4-FFF2-40B4-BE49-F238E27FC236}">
+                    <a16:creationId xmlns:a16="http://schemas.microsoft.com/office/drawing/2014/main" id="{2AC71E53-F17B-4C6C-B8ED-3F18DCFF0311}"/>
+                  </a:ext>
+                </a:extLst>
+              </p:cNvPr>
+              <p:cNvSpPr/>
+              <p:nvPr/>
+            </p:nvSpPr>
+            <p:spPr>
+              <a:xfrm>
+                <a:off x="6275718" y="3526561"/>
+                <a:ext cx="1080000" cy="720000"/>
+              </a:xfrm>
+              <a:prstGeom prst="hexagon">
+                <a:avLst/>
+              </a:prstGeom>
+              <a:noFill/>
+              <a:ln w="19050">
+                <a:solidFill>
+                  <a:schemeClr val="accent4"/>
+                </a:solidFill>
+              </a:ln>
+            </p:spPr>
+            <p:style>
+              <a:lnRef idx="2">
+                <a:schemeClr val="accent1">
+                  <a:shade val="50000"/>
+                </a:schemeClr>
+              </a:lnRef>
+              <a:fillRef idx="1">
+                <a:schemeClr val="accent1"/>
+              </a:fillRef>
+              <a:effectRef idx="0">
+                <a:schemeClr val="accent1"/>
+              </a:effectRef>
+              <a:fontRef idx="minor">
+                <a:schemeClr val="lt1"/>
+              </a:fontRef>
+            </p:style>
+            <p:txBody>
+              <a:bodyPr rtlCol="0" anchor="ctr"/>
+              <a:lstStyle/>
+              <a:p>
+                <a:pPr algn="ctr"/>
+                <a:r>
+                  <a:rPr lang="es-MX" sz="1050" dirty="0">
+                    <a:solidFill>
+                      <a:schemeClr val="accent2"/>
+                    </a:solidFill>
+                    <a:latin typeface="Proxima Nova" panose="020B0604020202020204" charset="0"/>
+                  </a:rPr>
+                  <a:t>LASSO</a:t>
+                </a:r>
+                <a:endParaRPr lang="es-AR" sz="1050" dirty="0">
+                  <a:solidFill>
+                    <a:schemeClr val="accent2"/>
+                  </a:solidFill>
+                  <a:latin typeface="Proxima Nova" panose="020B0604020202020204" charset="0"/>
+                </a:endParaRPr>
+              </a:p>
+            </p:txBody>
+          </p:sp>
+        </p:grpSp>
         <p:cxnSp>
           <p:nvCxnSpPr>
-            <p:cNvPr id="27" name="Conector recto 26">
+            <p:cNvPr id="34" name="Conector recto de flecha 33">
               <a:extLst>
                 <a:ext uri="{FF2B5EF4-FFF2-40B4-BE49-F238E27FC236}">
-                  <a16:creationId xmlns:a16="http://schemas.microsoft.com/office/drawing/2014/main" id="{90C3AB3A-27DE-40B3-B141-AE97C7BE7617}"/>
+                  <a16:creationId xmlns:a16="http://schemas.microsoft.com/office/drawing/2014/main" id="{81800D77-3BF1-469F-8887-35E056483921}"/>
                 </a:ext>
               </a:extLst>
             </p:cNvPr>
             <p:cNvCxnSpPr>
-              <a:cxnSpLocks/>
+              <a:stCxn id="49" idx="3"/>
+              <a:endCxn id="48" idx="3"/>
             </p:cNvCxnSpPr>
             <p:nvPr/>
           </p:nvCxnSpPr>
           <p:spPr>
             <a:xfrm flipH="1">
-              <a:off x="2785730" y="3668258"/>
-              <a:ext cx="761942" cy="258700"/>
+              <a:off x="6203642" y="4311454"/>
+              <a:ext cx="774329" cy="7468"/>
             </a:xfrm>
-            <a:prstGeom prst="line">
+            <a:prstGeom prst="straightConnector1">
               <a:avLst/>
             </a:prstGeom>
             <a:ln w="12700">
               <a:solidFill>
                 <a:schemeClr val="accent4"/>
               </a:solidFill>
-            </a:ln>
-          </p:spPr>
-          <p:style>
-            <a:lnRef idx="1">
-              <a:schemeClr val="accent1"/>
-            </a:lnRef>
-            <a:fillRef idx="0">
-              <a:schemeClr val="accent1"/>
-            </a:fillRef>
-            <a:effectRef idx="0">
-              <a:schemeClr val="accent1"/>
-            </a:effectRef>
-            <a:fontRef idx="minor">
-              <a:schemeClr val="tx1"/>
-            </a:fontRef>
-          </p:style>
-        </p:cxnSp>
-        <p:cxnSp>
-          <p:nvCxnSpPr>
-            <p:cNvPr id="28" name="Conector recto 27">
-              <a:extLst>
-                <a:ext uri="{FF2B5EF4-FFF2-40B4-BE49-F238E27FC236}">
-                  <a16:creationId xmlns:a16="http://schemas.microsoft.com/office/drawing/2014/main" id="{62E5DB53-B4F6-4F4D-9BA6-8A515FACE311}"/>
-                </a:ext>
-              </a:extLst>
-            </p:cNvPr>
-            <p:cNvCxnSpPr>
-              <a:cxnSpLocks/>
-            </p:cNvCxnSpPr>
-            <p:nvPr/>
-          </p:nvCxnSpPr>
-          <p:spPr>
-            <a:xfrm flipH="1">
-              <a:off x="5009882" y="3666366"/>
-              <a:ext cx="526486" cy="275524"/>
-            </a:xfrm>
-            <a:prstGeom prst="line">
-              <a:avLst/>
-            </a:prstGeom>
-            <a:ln w="12700">
-              <a:solidFill>
-                <a:schemeClr val="accent4"/>
-              </a:solidFill>
-            </a:ln>
-          </p:spPr>
-          <p:style>
-            <a:lnRef idx="1">
-              <a:schemeClr val="accent1"/>
-            </a:lnRef>
-            <a:fillRef idx="0">
-              <a:schemeClr val="accent1"/>
-            </a:fillRef>
-            <a:effectRef idx="0">
-              <a:schemeClr val="accent1"/>
-            </a:effectRef>
-            <a:fontRef idx="minor">
-              <a:schemeClr val="tx1"/>
-            </a:fontRef>
-          </p:style>
-        </p:cxnSp>
-        <p:cxnSp>
-          <p:nvCxnSpPr>
-            <p:cNvPr id="29" name="Conector recto 28">
-              <a:extLst>
-                <a:ext uri="{FF2B5EF4-FFF2-40B4-BE49-F238E27FC236}">
-                  <a16:creationId xmlns:a16="http://schemas.microsoft.com/office/drawing/2014/main" id="{3ABF9333-1C65-4816-AA20-D3B0E1CEF2BB}"/>
-                </a:ext>
-              </a:extLst>
-            </p:cNvPr>
-            <p:cNvCxnSpPr>
-              <a:cxnSpLocks/>
-            </p:cNvCxnSpPr>
-            <p:nvPr/>
-          </p:nvCxnSpPr>
-          <p:spPr>
-            <a:xfrm>
-              <a:off x="5536368" y="3666366"/>
-              <a:ext cx="602104" cy="275524"/>
-            </a:xfrm>
-            <a:prstGeom prst="line">
-              <a:avLst/>
-            </a:prstGeom>
-            <a:ln w="12700">
-              <a:solidFill>
-                <a:schemeClr val="accent4"/>
-              </a:solidFill>
-            </a:ln>
-          </p:spPr>
-          <p:style>
-            <a:lnRef idx="1">
-              <a:schemeClr val="accent1"/>
-            </a:lnRef>
-            <a:fillRef idx="0">
-              <a:schemeClr val="accent1"/>
-            </a:fillRef>
-            <a:effectRef idx="0">
-              <a:schemeClr val="accent1"/>
-            </a:effectRef>
-            <a:fontRef idx="minor">
-              <a:schemeClr val="tx1"/>
-            </a:fontRef>
-          </p:style>
-        </p:cxnSp>
-        <p:sp>
-          <p:nvSpPr>
-            <p:cNvPr id="30" name="Hexágono 29">
-              <a:extLst>
-                <a:ext uri="{FF2B5EF4-FFF2-40B4-BE49-F238E27FC236}">
-                  <a16:creationId xmlns:a16="http://schemas.microsoft.com/office/drawing/2014/main" id="{933A7CEB-177D-4E33-8469-4D7E8A3773AB}"/>
-                </a:ext>
-              </a:extLst>
-            </p:cNvPr>
-            <p:cNvSpPr/>
-            <p:nvPr/>
-          </p:nvSpPr>
-          <p:spPr>
-            <a:xfrm>
-              <a:off x="3348488" y="3939723"/>
-              <a:ext cx="1087946" cy="720000"/>
-            </a:xfrm>
-            <a:prstGeom prst="hexagon">
-              <a:avLst/>
-            </a:prstGeom>
-            <a:noFill/>
-            <a:ln w="12700">
-              <a:solidFill>
-                <a:schemeClr val="accent4"/>
-              </a:solidFill>
-            </a:ln>
-          </p:spPr>
-          <p:style>
-            <a:lnRef idx="2">
-              <a:schemeClr val="accent1">
-                <a:shade val="50000"/>
-              </a:schemeClr>
-            </a:lnRef>
-            <a:fillRef idx="1">
-              <a:schemeClr val="accent1"/>
-            </a:fillRef>
-            <a:effectRef idx="0">
-              <a:schemeClr val="accent1"/>
-            </a:effectRef>
-            <a:fontRef idx="minor">
-              <a:schemeClr val="lt1"/>
-            </a:fontRef>
-          </p:style>
-          <p:txBody>
-            <a:bodyPr rtlCol="0" anchor="ctr"/>
-            <a:lstStyle/>
-            <a:p>
-              <a:pPr algn="ctr"/>
-              <a:r>
-                <a:rPr lang="es-MX" sz="1050" dirty="0" err="1">
-                  <a:solidFill>
-                    <a:schemeClr val="accent2"/>
-                  </a:solidFill>
-                  <a:latin typeface="Proxima Nova" panose="020B0604020202020204" charset="0"/>
-                </a:rPr>
-                <a:t>Naive</a:t>
-              </a:r>
-              <a:r>
-                <a:rPr lang="es-MX" sz="1050" dirty="0">
-                  <a:solidFill>
-                    <a:schemeClr val="accent2"/>
-                  </a:solidFill>
-                  <a:latin typeface="Proxima Nova" panose="020B0604020202020204" charset="0"/>
-                </a:rPr>
-                <a:t> Bayes</a:t>
-              </a:r>
-              <a:endParaRPr lang="es-AR" sz="1050" dirty="0">
-                <a:solidFill>
-                  <a:schemeClr val="accent2"/>
-                </a:solidFill>
-                <a:latin typeface="Proxima Nova" panose="020B0604020202020204" charset="0"/>
-              </a:endParaRPr>
-            </a:p>
-          </p:txBody>
-        </p:sp>
-        <p:cxnSp>
-          <p:nvCxnSpPr>
-            <p:cNvPr id="31" name="Conector recto 30">
-              <a:extLst>
-                <a:ext uri="{FF2B5EF4-FFF2-40B4-BE49-F238E27FC236}">
-                  <a16:creationId xmlns:a16="http://schemas.microsoft.com/office/drawing/2014/main" id="{716DEEB0-0EB5-4DD4-9E30-9D75E1EA9A12}"/>
-                </a:ext>
-              </a:extLst>
-            </p:cNvPr>
-            <p:cNvCxnSpPr>
-              <a:cxnSpLocks/>
-            </p:cNvCxnSpPr>
-            <p:nvPr/>
-          </p:nvCxnSpPr>
-          <p:spPr>
-            <a:xfrm>
-              <a:off x="3547672" y="3668258"/>
-              <a:ext cx="344789" cy="270528"/>
-            </a:xfrm>
-            <a:prstGeom prst="line">
-              <a:avLst/>
-            </a:prstGeom>
-            <a:ln w="12700">
-              <a:solidFill>
-                <a:schemeClr val="accent4"/>
-              </a:solidFill>
+              <a:tailEnd type="triangle"/>
             </a:ln>
           </p:spPr>
           <p:style>
@@ -23111,7 +22247,7 @@
             <a:avLst/>
           </a:prstGeom>
           <a:noFill/>
-          <a:ln w="12700">
+          <a:ln w="19050">
             <a:solidFill>
               <a:schemeClr val="accent4"/>
             </a:solidFill>
@@ -23177,7 +22313,7 @@
             <a:avLst/>
           </a:prstGeom>
           <a:noFill/>
-          <a:ln w="12700">
+          <a:ln w="19050">
             <a:solidFill>
               <a:schemeClr val="accent4"/>
             </a:solidFill>
@@ -23236,14 +22372,14 @@
         </p:nvSpPr>
         <p:spPr>
           <a:xfrm>
-            <a:off x="6138472" y="1400935"/>
+            <a:off x="6977913" y="1400935"/>
             <a:ext cx="1828800" cy="457200"/>
           </a:xfrm>
           <a:prstGeom prst="roundRect">
             <a:avLst/>
           </a:prstGeom>
           <a:noFill/>
-          <a:ln w="12700">
+          <a:ln w="19050">
             <a:solidFill>
               <a:schemeClr val="accent4"/>
             </a:solidFill>
@@ -23302,14 +22438,14 @@
         </p:nvSpPr>
         <p:spPr>
           <a:xfrm>
-            <a:off x="367259" y="2115487"/>
+            <a:off x="367259" y="2033042"/>
             <a:ext cx="1828800" cy="457200"/>
           </a:xfrm>
           <a:prstGeom prst="roundRect">
             <a:avLst/>
           </a:prstGeom>
           <a:noFill/>
-          <a:ln w="12700">
+          <a:ln w="19050">
             <a:solidFill>
               <a:schemeClr val="accent4"/>
             </a:solidFill>
@@ -23368,14 +22504,14 @@
         </p:nvSpPr>
         <p:spPr>
           <a:xfrm>
-            <a:off x="3395272" y="2114550"/>
+            <a:off x="4736879" y="2032105"/>
             <a:ext cx="1828800" cy="457200"/>
           </a:xfrm>
           <a:prstGeom prst="roundRect">
             <a:avLst/>
           </a:prstGeom>
           <a:noFill/>
-          <a:ln w="12700">
+          <a:ln w="19050">
             <a:solidFill>
               <a:schemeClr val="accent4"/>
             </a:solidFill>
@@ -23434,74 +22570,8 @@
         </p:nvSpPr>
         <p:spPr>
           <a:xfrm>
-            <a:off x="244542" y="2946366"/>
-            <a:ext cx="1008000" cy="720000"/>
-          </a:xfrm>
-          <a:prstGeom prst="hexagon">
-            <a:avLst/>
-          </a:prstGeom>
-          <a:noFill/>
-          <a:ln w="12700">
-            <a:solidFill>
-              <a:srgbClr val="999999"/>
-            </a:solidFill>
-          </a:ln>
-        </p:spPr>
-        <p:style>
-          <a:lnRef idx="2">
-            <a:schemeClr val="accent1">
-              <a:shade val="50000"/>
-            </a:schemeClr>
-          </a:lnRef>
-          <a:fillRef idx="1">
-            <a:schemeClr val="accent1"/>
-          </a:fillRef>
-          <a:effectRef idx="0">
-            <a:schemeClr val="accent1"/>
-          </a:effectRef>
-          <a:fontRef idx="minor">
-            <a:schemeClr val="lt1"/>
-          </a:fontRef>
-        </p:style>
-        <p:txBody>
-          <a:bodyPr rtlCol="0" anchor="ctr"/>
-          <a:lstStyle/>
-          <a:p>
-            <a:pPr algn="ctr"/>
-            <a:r>
-              <a:rPr lang="es-MX" sz="1050" dirty="0">
-                <a:solidFill>
-                  <a:schemeClr val="accent2"/>
-                </a:solidFill>
-                <a:latin typeface="Proxima Nova" panose="020B0604020202020204" charset="0"/>
-              </a:rPr>
-              <a:t>Simple</a:t>
-            </a:r>
-            <a:endParaRPr lang="es-AR" sz="1050" dirty="0">
-              <a:solidFill>
-                <a:schemeClr val="accent2"/>
-              </a:solidFill>
-              <a:latin typeface="Proxima Nova" panose="020B0604020202020204" charset="0"/>
-            </a:endParaRPr>
-          </a:p>
-        </p:txBody>
-      </p:sp>
-      <p:sp>
-        <p:nvSpPr>
-          <p:cNvPr id="16" name="Hexágono 15">
-            <a:extLst>
-              <a:ext uri="{FF2B5EF4-FFF2-40B4-BE49-F238E27FC236}">
-                <a16:creationId xmlns:a16="http://schemas.microsoft.com/office/drawing/2014/main" id="{9961A3D7-B739-4884-8B84-3074ECF546FC}"/>
-              </a:ext>
-            </a:extLst>
-          </p:cNvPr>
-          <p:cNvSpPr/>
-          <p:nvPr/>
-        </p:nvSpPr>
-        <p:spPr>
-          <a:xfrm>
-            <a:off x="1315476" y="2946366"/>
-            <a:ext cx="1008000" cy="720000"/>
+            <a:off x="2180183" y="3527498"/>
+            <a:ext cx="1080000" cy="720000"/>
           </a:xfrm>
           <a:prstGeom prst="hexagon">
             <a:avLst/>
@@ -23541,7 +22611,7 @@
                 </a:solidFill>
                 <a:latin typeface="Proxima Nova" panose="020B0604020202020204" charset="0"/>
               </a:rPr>
-              <a:t>Múltiple</a:t>
+              <a:t>Regresión lineal</a:t>
             </a:r>
             <a:endParaRPr lang="es-AR" sz="1050" dirty="0">
               <a:solidFill>
@@ -23566,14 +22636,14 @@
         </p:nvSpPr>
         <p:spPr>
           <a:xfrm>
-            <a:off x="6026046" y="2133912"/>
+            <a:off x="7457079" y="2114550"/>
             <a:ext cx="1087946" cy="720000"/>
           </a:xfrm>
           <a:prstGeom prst="hexagon">
             <a:avLst/>
           </a:prstGeom>
           <a:noFill/>
-          <a:ln w="12700">
+          <a:ln w="19050">
             <a:solidFill>
               <a:schemeClr val="accent4"/>
             </a:solidFill>
@@ -23620,10 +22690,10 @@
       </p:sp>
       <p:sp>
         <p:nvSpPr>
-          <p:cNvPr id="19" name="Hexágono 18">
+          <p:cNvPr id="23" name="Rectángulo: esquinas redondeadas 22">
             <a:extLst>
               <a:ext uri="{FF2B5EF4-FFF2-40B4-BE49-F238E27FC236}">
-                <a16:creationId xmlns:a16="http://schemas.microsoft.com/office/drawing/2014/main" id="{29BDC7DB-4962-4B47-83B4-B72C48164E29}"/>
+                <a16:creationId xmlns:a16="http://schemas.microsoft.com/office/drawing/2014/main" id="{B9A89CBC-6B47-41DB-9701-F40FC126C137}"/>
               </a:ext>
             </a:extLst>
           </p:cNvPr>
@@ -23632,14 +22702,14 @@
         </p:nvSpPr>
         <p:spPr>
           <a:xfrm>
-            <a:off x="7199411" y="2133912"/>
-            <a:ext cx="1008000" cy="720000"/>
+            <a:off x="3974879" y="2798833"/>
+            <a:ext cx="1584000" cy="457200"/>
           </a:xfrm>
-          <a:prstGeom prst="hexagon">
+          <a:prstGeom prst="roundRect">
             <a:avLst/>
           </a:prstGeom>
           <a:noFill/>
-          <a:ln w="12700">
+          <a:ln w="19050">
             <a:solidFill>
               <a:schemeClr val="accent4"/>
             </a:solidFill>
@@ -23667,15 +22737,15 @@
           <a:p>
             <a:pPr algn="ctr"/>
             <a:r>
-              <a:rPr lang="es-MX" sz="1050" dirty="0">
+              <a:rPr lang="es-MX" dirty="0">
                 <a:solidFill>
                   <a:schemeClr val="accent2"/>
                 </a:solidFill>
                 <a:latin typeface="Proxima Nova" panose="020B0604020202020204" charset="0"/>
               </a:rPr>
-              <a:t>PCA</a:t>
+              <a:t>Paramétricos</a:t>
             </a:r>
-            <a:endParaRPr lang="es-AR" sz="1050" dirty="0">
+            <a:endParaRPr lang="es-AR" dirty="0">
               <a:solidFill>
                 <a:schemeClr val="accent2"/>
               </a:solidFill>
@@ -23686,10 +22756,10 @@
       </p:sp>
       <p:sp>
         <p:nvSpPr>
-          <p:cNvPr id="23" name="Rectángulo: esquinas redondeadas 22">
+          <p:cNvPr id="24" name="Rectángulo: esquinas redondeadas 23">
             <a:extLst>
               <a:ext uri="{FF2B5EF4-FFF2-40B4-BE49-F238E27FC236}">
-                <a16:creationId xmlns:a16="http://schemas.microsoft.com/office/drawing/2014/main" id="{B9A89CBC-6B47-41DB-9701-F40FC126C137}"/>
+                <a16:creationId xmlns:a16="http://schemas.microsoft.com/office/drawing/2014/main" id="{39E022CC-60EF-4D14-A8D8-A2272C00939F}"/>
               </a:ext>
             </a:extLst>
           </p:cNvPr>
@@ -23698,14 +22768,14 @@
         </p:nvSpPr>
         <p:spPr>
           <a:xfrm>
-            <a:off x="2633272" y="3211058"/>
-            <a:ext cx="1828800" cy="457200"/>
+            <a:off x="5963575" y="2796941"/>
+            <a:ext cx="1584000" cy="457200"/>
           </a:xfrm>
           <a:prstGeom prst="roundRect">
             <a:avLst/>
           </a:prstGeom>
           <a:noFill/>
-          <a:ln w="12700">
+          <a:ln w="19050">
             <a:solidFill>
               <a:schemeClr val="accent4"/>
             </a:solidFill>
@@ -23750,12 +22820,415 @@
           </a:p>
         </p:txBody>
       </p:sp>
+      <p:cxnSp>
+        <p:nvCxnSpPr>
+          <p:cNvPr id="27" name="Conector recto 26">
+            <a:extLst>
+              <a:ext uri="{FF2B5EF4-FFF2-40B4-BE49-F238E27FC236}">
+                <a16:creationId xmlns:a16="http://schemas.microsoft.com/office/drawing/2014/main" id="{77E1FACB-771C-4678-8AEC-39BF517E1D99}"/>
+              </a:ext>
+            </a:extLst>
+          </p:cNvPr>
+          <p:cNvCxnSpPr>
+            <a:cxnSpLocks/>
+            <a:stCxn id="11" idx="2"/>
+            <a:endCxn id="46" idx="0"/>
+          </p:cNvCxnSpPr>
+          <p:nvPr/>
+        </p:nvCxnSpPr>
+        <p:spPr>
+          <a:xfrm flipH="1">
+            <a:off x="934597" y="2490242"/>
+            <a:ext cx="347062" cy="328090"/>
+          </a:xfrm>
+          <a:prstGeom prst="line">
+            <a:avLst/>
+          </a:prstGeom>
+          <a:ln w="19050">
+            <a:solidFill>
+              <a:schemeClr val="accent4"/>
+            </a:solidFill>
+          </a:ln>
+        </p:spPr>
+        <p:style>
+          <a:lnRef idx="1">
+            <a:schemeClr val="accent1"/>
+          </a:lnRef>
+          <a:fillRef idx="0">
+            <a:schemeClr val="accent1"/>
+          </a:fillRef>
+          <a:effectRef idx="0">
+            <a:schemeClr val="accent1"/>
+          </a:effectRef>
+          <a:fontRef idx="minor">
+            <a:schemeClr val="tx1"/>
+          </a:fontRef>
+        </p:style>
+      </p:cxnSp>
+      <p:cxnSp>
+        <p:nvCxnSpPr>
+          <p:cNvPr id="30" name="Conector recto 29">
+            <a:extLst>
+              <a:ext uri="{FF2B5EF4-FFF2-40B4-BE49-F238E27FC236}">
+                <a16:creationId xmlns:a16="http://schemas.microsoft.com/office/drawing/2014/main" id="{0F40D13E-8445-47B1-A87F-A5950F6CF87E}"/>
+              </a:ext>
+            </a:extLst>
+          </p:cNvPr>
+          <p:cNvCxnSpPr>
+            <a:cxnSpLocks/>
+            <a:stCxn id="11" idx="2"/>
+            <a:endCxn id="44" idx="0"/>
+          </p:cNvCxnSpPr>
+          <p:nvPr/>
+        </p:nvCxnSpPr>
+        <p:spPr>
+          <a:xfrm>
+            <a:off x="1281659" y="2490242"/>
+            <a:ext cx="1430895" cy="331749"/>
+          </a:xfrm>
+          <a:prstGeom prst="line">
+            <a:avLst/>
+          </a:prstGeom>
+          <a:ln w="19050">
+            <a:solidFill>
+              <a:schemeClr val="accent4"/>
+            </a:solidFill>
+          </a:ln>
+        </p:spPr>
+        <p:style>
+          <a:lnRef idx="1">
+            <a:schemeClr val="accent1"/>
+          </a:lnRef>
+          <a:fillRef idx="0">
+            <a:schemeClr val="accent1"/>
+          </a:fillRef>
+          <a:effectRef idx="0">
+            <a:schemeClr val="accent1"/>
+          </a:effectRef>
+          <a:fontRef idx="minor">
+            <a:schemeClr val="tx1"/>
+          </a:fontRef>
+        </p:style>
+      </p:cxnSp>
+      <p:cxnSp>
+        <p:nvCxnSpPr>
+          <p:cNvPr id="33" name="Conector recto 32">
+            <a:extLst>
+              <a:ext uri="{FF2B5EF4-FFF2-40B4-BE49-F238E27FC236}">
+                <a16:creationId xmlns:a16="http://schemas.microsoft.com/office/drawing/2014/main" id="{7CEEF7BB-59F9-4FD2-B3AB-532406514BF7}"/>
+              </a:ext>
+            </a:extLst>
+          </p:cNvPr>
+          <p:cNvCxnSpPr>
+            <a:cxnSpLocks/>
+            <a:stCxn id="9" idx="2"/>
+            <a:endCxn id="11" idx="0"/>
+          </p:cNvCxnSpPr>
+          <p:nvPr/>
+        </p:nvCxnSpPr>
+        <p:spPr>
+          <a:xfrm flipH="1">
+            <a:off x="1281659" y="1858135"/>
+            <a:ext cx="2113613" cy="174907"/>
+          </a:xfrm>
+          <a:prstGeom prst="line">
+            <a:avLst/>
+          </a:prstGeom>
+          <a:ln w="19050">
+            <a:solidFill>
+              <a:schemeClr val="accent4"/>
+            </a:solidFill>
+          </a:ln>
+        </p:spPr>
+        <p:style>
+          <a:lnRef idx="1">
+            <a:schemeClr val="accent1"/>
+          </a:lnRef>
+          <a:fillRef idx="0">
+            <a:schemeClr val="accent1"/>
+          </a:fillRef>
+          <a:effectRef idx="0">
+            <a:schemeClr val="accent1"/>
+          </a:effectRef>
+          <a:fontRef idx="minor">
+            <a:schemeClr val="tx1"/>
+          </a:fontRef>
+        </p:style>
+      </p:cxnSp>
+      <p:cxnSp>
+        <p:nvCxnSpPr>
+          <p:cNvPr id="36" name="Conector recto 35">
+            <a:extLst>
+              <a:ext uri="{FF2B5EF4-FFF2-40B4-BE49-F238E27FC236}">
+                <a16:creationId xmlns:a16="http://schemas.microsoft.com/office/drawing/2014/main" id="{E6DF477B-E1A1-420E-99FE-F4FEFB8B0159}"/>
+              </a:ext>
+            </a:extLst>
+          </p:cNvPr>
+          <p:cNvCxnSpPr>
+            <a:cxnSpLocks/>
+            <a:stCxn id="9" idx="2"/>
+            <a:endCxn id="12" idx="0"/>
+          </p:cNvCxnSpPr>
+          <p:nvPr/>
+        </p:nvCxnSpPr>
+        <p:spPr>
+          <a:xfrm>
+            <a:off x="3395272" y="1858135"/>
+            <a:ext cx="2256007" cy="173970"/>
+          </a:xfrm>
+          <a:prstGeom prst="line">
+            <a:avLst/>
+          </a:prstGeom>
+          <a:ln w="19050">
+            <a:solidFill>
+              <a:schemeClr val="accent4"/>
+            </a:solidFill>
+          </a:ln>
+        </p:spPr>
+        <p:style>
+          <a:lnRef idx="1">
+            <a:schemeClr val="accent1"/>
+          </a:lnRef>
+          <a:fillRef idx="0">
+            <a:schemeClr val="accent1"/>
+          </a:fillRef>
+          <a:effectRef idx="0">
+            <a:schemeClr val="accent1"/>
+          </a:effectRef>
+          <a:fontRef idx="minor">
+            <a:schemeClr val="tx1"/>
+          </a:fontRef>
+        </p:style>
+      </p:cxnSp>
+      <p:cxnSp>
+        <p:nvCxnSpPr>
+          <p:cNvPr id="39" name="Conector recto 38">
+            <a:extLst>
+              <a:ext uri="{FF2B5EF4-FFF2-40B4-BE49-F238E27FC236}">
+                <a16:creationId xmlns:a16="http://schemas.microsoft.com/office/drawing/2014/main" id="{8DED36CA-EBB0-4414-9220-3514866BE20E}"/>
+              </a:ext>
+            </a:extLst>
+          </p:cNvPr>
+          <p:cNvCxnSpPr>
+            <a:cxnSpLocks/>
+            <a:stCxn id="5" idx="2"/>
+            <a:endCxn id="9" idx="0"/>
+          </p:cNvCxnSpPr>
+          <p:nvPr/>
+        </p:nvCxnSpPr>
+        <p:spPr>
+          <a:xfrm flipH="1">
+            <a:off x="3395272" y="1170442"/>
+            <a:ext cx="1828800" cy="230493"/>
+          </a:xfrm>
+          <a:prstGeom prst="line">
+            <a:avLst/>
+          </a:prstGeom>
+          <a:ln w="19050">
+            <a:solidFill>
+              <a:schemeClr val="accent4"/>
+            </a:solidFill>
+          </a:ln>
+        </p:spPr>
+        <p:style>
+          <a:lnRef idx="1">
+            <a:schemeClr val="accent1"/>
+          </a:lnRef>
+          <a:fillRef idx="0">
+            <a:schemeClr val="accent1"/>
+          </a:fillRef>
+          <a:effectRef idx="0">
+            <a:schemeClr val="accent1"/>
+          </a:effectRef>
+          <a:fontRef idx="minor">
+            <a:schemeClr val="tx1"/>
+          </a:fontRef>
+        </p:style>
+      </p:cxnSp>
+      <p:cxnSp>
+        <p:nvCxnSpPr>
+          <p:cNvPr id="42" name="Conector recto 41">
+            <a:extLst>
+              <a:ext uri="{FF2B5EF4-FFF2-40B4-BE49-F238E27FC236}">
+                <a16:creationId xmlns:a16="http://schemas.microsoft.com/office/drawing/2014/main" id="{36296CC0-4538-4702-BAE5-618BF6EC547F}"/>
+              </a:ext>
+            </a:extLst>
+          </p:cNvPr>
+          <p:cNvCxnSpPr>
+            <a:cxnSpLocks/>
+            <a:stCxn id="5" idx="2"/>
+            <a:endCxn id="10" idx="0"/>
+          </p:cNvCxnSpPr>
+          <p:nvPr/>
+        </p:nvCxnSpPr>
+        <p:spPr>
+          <a:xfrm>
+            <a:off x="5224072" y="1170442"/>
+            <a:ext cx="2668241" cy="230493"/>
+          </a:xfrm>
+          <a:prstGeom prst="line">
+            <a:avLst/>
+          </a:prstGeom>
+          <a:ln w="19050">
+            <a:solidFill>
+              <a:schemeClr val="accent4"/>
+            </a:solidFill>
+          </a:ln>
+        </p:spPr>
+        <p:style>
+          <a:lnRef idx="1">
+            <a:schemeClr val="accent1"/>
+          </a:lnRef>
+          <a:fillRef idx="0">
+            <a:schemeClr val="accent1"/>
+          </a:fillRef>
+          <a:effectRef idx="0">
+            <a:schemeClr val="accent1"/>
+          </a:effectRef>
+          <a:fontRef idx="minor">
+            <a:schemeClr val="tx1"/>
+          </a:fontRef>
+        </p:style>
+      </p:cxnSp>
+      <p:cxnSp>
+        <p:nvCxnSpPr>
+          <p:cNvPr id="45" name="Conector recto 44">
+            <a:extLst>
+              <a:ext uri="{FF2B5EF4-FFF2-40B4-BE49-F238E27FC236}">
+                <a16:creationId xmlns:a16="http://schemas.microsoft.com/office/drawing/2014/main" id="{0A0F49A6-13A2-455D-BE09-F1DA863A84CA}"/>
+              </a:ext>
+            </a:extLst>
+          </p:cNvPr>
+          <p:cNvCxnSpPr>
+            <a:cxnSpLocks/>
+            <a:stCxn id="12" idx="2"/>
+            <a:endCxn id="23" idx="0"/>
+          </p:cNvCxnSpPr>
+          <p:nvPr/>
+        </p:nvCxnSpPr>
+        <p:spPr>
+          <a:xfrm flipH="1">
+            <a:off x="4766879" y="2489305"/>
+            <a:ext cx="884400" cy="309528"/>
+          </a:xfrm>
+          <a:prstGeom prst="line">
+            <a:avLst/>
+          </a:prstGeom>
+          <a:ln w="19050">
+            <a:solidFill>
+              <a:schemeClr val="accent4"/>
+            </a:solidFill>
+          </a:ln>
+        </p:spPr>
+        <p:style>
+          <a:lnRef idx="1">
+            <a:schemeClr val="accent1"/>
+          </a:lnRef>
+          <a:fillRef idx="0">
+            <a:schemeClr val="accent1"/>
+          </a:fillRef>
+          <a:effectRef idx="0">
+            <a:schemeClr val="accent1"/>
+          </a:effectRef>
+          <a:fontRef idx="minor">
+            <a:schemeClr val="tx1"/>
+          </a:fontRef>
+        </p:style>
+      </p:cxnSp>
+      <p:cxnSp>
+        <p:nvCxnSpPr>
+          <p:cNvPr id="48" name="Conector recto 47">
+            <a:extLst>
+              <a:ext uri="{FF2B5EF4-FFF2-40B4-BE49-F238E27FC236}">
+                <a16:creationId xmlns:a16="http://schemas.microsoft.com/office/drawing/2014/main" id="{CE8EE3FF-AC20-4199-88E8-E4E59FB51FDC}"/>
+              </a:ext>
+            </a:extLst>
+          </p:cNvPr>
+          <p:cNvCxnSpPr>
+            <a:cxnSpLocks/>
+            <a:stCxn id="12" idx="2"/>
+            <a:endCxn id="24" idx="0"/>
+          </p:cNvCxnSpPr>
+          <p:nvPr/>
+        </p:nvCxnSpPr>
+        <p:spPr>
+          <a:xfrm>
+            <a:off x="5651279" y="2489305"/>
+            <a:ext cx="1104296" cy="307636"/>
+          </a:xfrm>
+          <a:prstGeom prst="line">
+            <a:avLst/>
+          </a:prstGeom>
+          <a:ln w="19050">
+            <a:solidFill>
+              <a:schemeClr val="accent4"/>
+            </a:solidFill>
+          </a:ln>
+        </p:spPr>
+        <p:style>
+          <a:lnRef idx="1">
+            <a:schemeClr val="accent1"/>
+          </a:lnRef>
+          <a:fillRef idx="0">
+            <a:schemeClr val="accent1"/>
+          </a:fillRef>
+          <a:effectRef idx="0">
+            <a:schemeClr val="accent1"/>
+          </a:effectRef>
+          <a:fontRef idx="minor">
+            <a:schemeClr val="tx1"/>
+          </a:fontRef>
+        </p:style>
+      </p:cxnSp>
+      <p:cxnSp>
+        <p:nvCxnSpPr>
+          <p:cNvPr id="60" name="Conector recto 59">
+            <a:extLst>
+              <a:ext uri="{FF2B5EF4-FFF2-40B4-BE49-F238E27FC236}">
+                <a16:creationId xmlns:a16="http://schemas.microsoft.com/office/drawing/2014/main" id="{3E819977-5368-4D96-9F5B-91B50EC716FF}"/>
+              </a:ext>
+            </a:extLst>
+          </p:cNvPr>
+          <p:cNvCxnSpPr>
+            <a:cxnSpLocks/>
+          </p:cNvCxnSpPr>
+          <p:nvPr/>
+        </p:nvCxnSpPr>
+        <p:spPr>
+          <a:xfrm>
+            <a:off x="7989748" y="1858135"/>
+            <a:ext cx="0" cy="255478"/>
+          </a:xfrm>
+          <a:prstGeom prst="line">
+            <a:avLst/>
+          </a:prstGeom>
+          <a:ln w="19050">
+            <a:solidFill>
+              <a:schemeClr val="accent4"/>
+            </a:solidFill>
+          </a:ln>
+        </p:spPr>
+        <p:style>
+          <a:lnRef idx="1">
+            <a:schemeClr val="accent1"/>
+          </a:lnRef>
+          <a:fillRef idx="0">
+            <a:schemeClr val="accent1"/>
+          </a:fillRef>
+          <a:effectRef idx="0">
+            <a:schemeClr val="accent1"/>
+          </a:effectRef>
+          <a:fontRef idx="minor">
+            <a:schemeClr val="tx1"/>
+          </a:fontRef>
+        </p:style>
+      </p:cxnSp>
       <p:sp>
         <p:nvSpPr>
-          <p:cNvPr id="24" name="Rectángulo: esquinas redondeadas 23">
+          <p:cNvPr id="32" name="Hexágono 31">
             <a:extLst>
               <a:ext uri="{FF2B5EF4-FFF2-40B4-BE49-F238E27FC236}">
-                <a16:creationId xmlns:a16="http://schemas.microsoft.com/office/drawing/2014/main" id="{39E022CC-60EF-4D14-A8D8-A2272C00939F}"/>
+                <a16:creationId xmlns:a16="http://schemas.microsoft.com/office/drawing/2014/main" id="{A78DF77B-EFC4-4CCD-B18D-08C8C8F8473D}"/>
               </a:ext>
             </a:extLst>
           </p:cNvPr>
@@ -23764,14 +23237,232 @@
         </p:nvSpPr>
         <p:spPr>
           <a:xfrm>
-            <a:off x="4621968" y="3209166"/>
-            <a:ext cx="1828800" cy="457200"/>
+            <a:off x="4239730" y="3527498"/>
+            <a:ext cx="1080000" cy="720000"/>
+          </a:xfrm>
+          <a:prstGeom prst="hexagon">
+            <a:avLst/>
+          </a:prstGeom>
+          <a:noFill/>
+          <a:ln w="19050">
+            <a:solidFill>
+              <a:schemeClr val="accent4"/>
+            </a:solidFill>
+          </a:ln>
+        </p:spPr>
+        <p:style>
+          <a:lnRef idx="2">
+            <a:schemeClr val="accent1">
+              <a:shade val="50000"/>
+            </a:schemeClr>
+          </a:lnRef>
+          <a:fillRef idx="1">
+            <a:schemeClr val="accent1"/>
+          </a:fillRef>
+          <a:effectRef idx="0">
+            <a:schemeClr val="accent1"/>
+          </a:effectRef>
+          <a:fontRef idx="minor">
+            <a:schemeClr val="lt1"/>
+          </a:fontRef>
+        </p:style>
+        <p:txBody>
+          <a:bodyPr rtlCol="0" anchor="ctr"/>
+          <a:lstStyle/>
+          <a:p>
+            <a:pPr algn="ctr"/>
+            <a:r>
+              <a:rPr lang="es-MX" sz="1050" dirty="0">
+                <a:solidFill>
+                  <a:schemeClr val="accent2"/>
+                </a:solidFill>
+                <a:latin typeface="Proxima Nova" panose="020B0604020202020204" charset="0"/>
+              </a:rPr>
+              <a:t>Regresión logística</a:t>
+            </a:r>
+            <a:endParaRPr lang="es-AR" sz="1050" dirty="0">
+              <a:solidFill>
+                <a:schemeClr val="accent2"/>
+              </a:solidFill>
+              <a:latin typeface="Proxima Nova" panose="020B0604020202020204" charset="0"/>
+            </a:endParaRPr>
+          </a:p>
+        </p:txBody>
+      </p:sp>
+      <p:sp>
+        <p:nvSpPr>
+          <p:cNvPr id="34" name="Hexágono 33">
+            <a:extLst>
+              <a:ext uri="{FF2B5EF4-FFF2-40B4-BE49-F238E27FC236}">
+                <a16:creationId xmlns:a16="http://schemas.microsoft.com/office/drawing/2014/main" id="{2FD35B72-9731-44C8-9702-7B02D2407CF5}"/>
+              </a:ext>
+            </a:extLst>
+          </p:cNvPr>
+          <p:cNvSpPr/>
+          <p:nvPr/>
+        </p:nvSpPr>
+        <p:spPr>
+          <a:xfrm>
+            <a:off x="6339144" y="3510556"/>
+            <a:ext cx="1087946" cy="720000"/>
+          </a:xfrm>
+          <a:prstGeom prst="hexagon">
+            <a:avLst/>
+          </a:prstGeom>
+          <a:noFill/>
+          <a:ln w="19050">
+            <a:solidFill>
+              <a:schemeClr val="accent4"/>
+            </a:solidFill>
+          </a:ln>
+        </p:spPr>
+        <p:style>
+          <a:lnRef idx="2">
+            <a:schemeClr val="accent1">
+              <a:shade val="50000"/>
+            </a:schemeClr>
+          </a:lnRef>
+          <a:fillRef idx="1">
+            <a:schemeClr val="accent1"/>
+          </a:fillRef>
+          <a:effectRef idx="0">
+            <a:schemeClr val="accent1"/>
+          </a:effectRef>
+          <a:fontRef idx="minor">
+            <a:schemeClr val="lt1"/>
+          </a:fontRef>
+        </p:style>
+        <p:txBody>
+          <a:bodyPr rtlCol="0" anchor="ctr"/>
+          <a:lstStyle/>
+          <a:p>
+            <a:pPr algn="ctr"/>
+            <a:r>
+              <a:rPr lang="es-MX" sz="1050" dirty="0">
+                <a:solidFill>
+                  <a:schemeClr val="accent2"/>
+                </a:solidFill>
+                <a:latin typeface="Proxima Nova" panose="020B0604020202020204" charset="0"/>
+              </a:rPr>
+              <a:t>KNN</a:t>
+            </a:r>
+            <a:endParaRPr lang="es-AR" sz="1050" dirty="0">
+              <a:solidFill>
+                <a:schemeClr val="accent2"/>
+              </a:solidFill>
+              <a:latin typeface="Proxima Nova" panose="020B0604020202020204" charset="0"/>
+            </a:endParaRPr>
+          </a:p>
+        </p:txBody>
+      </p:sp>
+      <p:cxnSp>
+        <p:nvCxnSpPr>
+          <p:cNvPr id="37" name="Conector recto 36">
+            <a:extLst>
+              <a:ext uri="{FF2B5EF4-FFF2-40B4-BE49-F238E27FC236}">
+                <a16:creationId xmlns:a16="http://schemas.microsoft.com/office/drawing/2014/main" id="{B8981D67-8D8A-49B9-BD78-B0097DA717E4}"/>
+              </a:ext>
+            </a:extLst>
+          </p:cNvPr>
+          <p:cNvCxnSpPr>
+            <a:cxnSpLocks/>
+          </p:cNvCxnSpPr>
+          <p:nvPr/>
+        </p:nvCxnSpPr>
+        <p:spPr>
+          <a:xfrm flipH="1">
+            <a:off x="4776208" y="3256033"/>
+            <a:ext cx="0" cy="270528"/>
+          </a:xfrm>
+          <a:prstGeom prst="line">
+            <a:avLst/>
+          </a:prstGeom>
+          <a:ln w="19050">
+            <a:solidFill>
+              <a:schemeClr val="accent4"/>
+            </a:solidFill>
+          </a:ln>
+        </p:spPr>
+        <p:style>
+          <a:lnRef idx="1">
+            <a:schemeClr val="accent1"/>
+          </a:lnRef>
+          <a:fillRef idx="0">
+            <a:schemeClr val="accent1"/>
+          </a:fillRef>
+          <a:effectRef idx="0">
+            <a:schemeClr val="accent1"/>
+          </a:effectRef>
+          <a:fontRef idx="minor">
+            <a:schemeClr val="tx1"/>
+          </a:fontRef>
+        </p:style>
+      </p:cxnSp>
+      <p:cxnSp>
+        <p:nvCxnSpPr>
+          <p:cNvPr id="38" name="Conector recto 37">
+            <a:extLst>
+              <a:ext uri="{FF2B5EF4-FFF2-40B4-BE49-F238E27FC236}">
+                <a16:creationId xmlns:a16="http://schemas.microsoft.com/office/drawing/2014/main" id="{8675A32A-54E3-49E2-B6EA-F57A43BAE636}"/>
+              </a:ext>
+            </a:extLst>
+          </p:cNvPr>
+          <p:cNvCxnSpPr>
+            <a:cxnSpLocks/>
+          </p:cNvCxnSpPr>
+          <p:nvPr/>
+        </p:nvCxnSpPr>
+        <p:spPr>
+          <a:xfrm flipH="1">
+            <a:off x="6872872" y="3254141"/>
+            <a:ext cx="0" cy="256415"/>
+          </a:xfrm>
+          <a:prstGeom prst="line">
+            <a:avLst/>
+          </a:prstGeom>
+          <a:ln w="19050">
+            <a:solidFill>
+              <a:schemeClr val="accent4"/>
+            </a:solidFill>
+          </a:ln>
+        </p:spPr>
+        <p:style>
+          <a:lnRef idx="1">
+            <a:schemeClr val="accent1"/>
+          </a:lnRef>
+          <a:fillRef idx="0">
+            <a:schemeClr val="accent1"/>
+          </a:fillRef>
+          <a:effectRef idx="0">
+            <a:schemeClr val="accent1"/>
+          </a:effectRef>
+          <a:fontRef idx="minor">
+            <a:schemeClr val="tx1"/>
+          </a:fontRef>
+        </p:style>
+      </p:cxnSp>
+      <p:sp>
+        <p:nvSpPr>
+          <p:cNvPr id="44" name="Rectángulo: esquinas redondeadas 43">
+            <a:extLst>
+              <a:ext uri="{FF2B5EF4-FFF2-40B4-BE49-F238E27FC236}">
+                <a16:creationId xmlns:a16="http://schemas.microsoft.com/office/drawing/2014/main" id="{0ABF2D76-8778-4E03-A65F-8B886B3D5DDC}"/>
+              </a:ext>
+            </a:extLst>
+          </p:cNvPr>
+          <p:cNvSpPr/>
+          <p:nvPr/>
+        </p:nvSpPr>
+        <p:spPr>
+          <a:xfrm>
+            <a:off x="1920554" y="2821991"/>
+            <a:ext cx="1584000" cy="457200"/>
           </a:xfrm>
           <a:prstGeom prst="roundRect">
             <a:avLst/>
           </a:prstGeom>
           <a:noFill/>
-          <a:ln w="12700">
+          <a:ln w="19050">
             <a:solidFill>
               <a:schemeClr val="accent4"/>
             </a:solidFill>
@@ -23816,29 +23507,95 @@
           </a:p>
         </p:txBody>
       </p:sp>
+      <p:sp>
+        <p:nvSpPr>
+          <p:cNvPr id="46" name="Rectángulo: esquinas redondeadas 45">
+            <a:extLst>
+              <a:ext uri="{FF2B5EF4-FFF2-40B4-BE49-F238E27FC236}">
+                <a16:creationId xmlns:a16="http://schemas.microsoft.com/office/drawing/2014/main" id="{DE43DF11-E945-4BA6-B83D-F1135911F0D5}"/>
+              </a:ext>
+            </a:extLst>
+          </p:cNvPr>
+          <p:cNvSpPr/>
+          <p:nvPr/>
+        </p:nvSpPr>
+        <p:spPr>
+          <a:xfrm>
+            <a:off x="142597" y="2818332"/>
+            <a:ext cx="1584000" cy="457200"/>
+          </a:xfrm>
+          <a:prstGeom prst="roundRect">
+            <a:avLst/>
+          </a:prstGeom>
+          <a:noFill/>
+          <a:ln w="19050">
+            <a:solidFill>
+              <a:schemeClr val="accent4"/>
+            </a:solidFill>
+          </a:ln>
+        </p:spPr>
+        <p:style>
+          <a:lnRef idx="2">
+            <a:schemeClr val="accent1">
+              <a:shade val="50000"/>
+            </a:schemeClr>
+          </a:lnRef>
+          <a:fillRef idx="1">
+            <a:schemeClr val="accent1"/>
+          </a:fillRef>
+          <a:effectRef idx="0">
+            <a:schemeClr val="accent1"/>
+          </a:effectRef>
+          <a:fontRef idx="minor">
+            <a:schemeClr val="lt1"/>
+          </a:fontRef>
+        </p:style>
+        <p:txBody>
+          <a:bodyPr rtlCol="0" anchor="ctr"/>
+          <a:lstStyle/>
+          <a:p>
+            <a:pPr algn="ctr"/>
+            <a:r>
+              <a:rPr lang="es-MX" dirty="0">
+                <a:solidFill>
+                  <a:schemeClr val="accent2"/>
+                </a:solidFill>
+                <a:latin typeface="Proxima Nova" panose="020B0604020202020204" charset="0"/>
+              </a:rPr>
+              <a:t>No paramétricos</a:t>
+            </a:r>
+            <a:endParaRPr lang="es-AR" dirty="0">
+              <a:solidFill>
+                <a:schemeClr val="accent2"/>
+              </a:solidFill>
+              <a:latin typeface="Proxima Nova" panose="020B0604020202020204" charset="0"/>
+            </a:endParaRPr>
+          </a:p>
+        </p:txBody>
+      </p:sp>
       <p:cxnSp>
         <p:nvCxnSpPr>
-          <p:cNvPr id="27" name="Conector recto 26">
+          <p:cNvPr id="47" name="Conector recto 46">
             <a:extLst>
               <a:ext uri="{FF2B5EF4-FFF2-40B4-BE49-F238E27FC236}">
-                <a16:creationId xmlns:a16="http://schemas.microsoft.com/office/drawing/2014/main" id="{77E1FACB-771C-4678-8AEC-39BF517E1D99}"/>
+                <a16:creationId xmlns:a16="http://schemas.microsoft.com/office/drawing/2014/main" id="{F07607E4-6E57-420C-953B-899797D0B314}"/>
               </a:ext>
             </a:extLst>
           </p:cNvPr>
           <p:cNvCxnSpPr>
-            <a:stCxn id="11" idx="2"/>
+            <a:cxnSpLocks/>
           </p:cNvCxnSpPr>
           <p:nvPr/>
         </p:nvCxnSpPr>
         <p:spPr>
-          <a:xfrm flipH="1">
-            <a:off x="748542" y="2572687"/>
-            <a:ext cx="533117" cy="373679"/>
+          <a:xfrm>
+            <a:off x="2712554" y="3279191"/>
+            <a:ext cx="0" cy="247370"/>
           </a:xfrm>
           <a:prstGeom prst="line">
             <a:avLst/>
           </a:prstGeom>
-          <a:ln w="12700">
+          <a:ln w="19050">
             <a:solidFill>
               <a:schemeClr val="accent4"/>
             </a:solidFill>
@@ -23859,30 +23616,95 @@
           </a:fontRef>
         </p:style>
       </p:cxnSp>
+      <p:sp>
+        <p:nvSpPr>
+          <p:cNvPr id="50" name="Hexágono 49">
+            <a:extLst>
+              <a:ext uri="{FF2B5EF4-FFF2-40B4-BE49-F238E27FC236}">
+                <a16:creationId xmlns:a16="http://schemas.microsoft.com/office/drawing/2014/main" id="{135B1211-C838-4C20-BDDF-1C4257FDEB2A}"/>
+              </a:ext>
+            </a:extLst>
+          </p:cNvPr>
+          <p:cNvSpPr/>
+          <p:nvPr/>
+        </p:nvSpPr>
+        <p:spPr>
+          <a:xfrm>
+            <a:off x="405051" y="3541867"/>
+            <a:ext cx="1087946" cy="720000"/>
+          </a:xfrm>
+          <a:prstGeom prst="hexagon">
+            <a:avLst/>
+          </a:prstGeom>
+          <a:noFill/>
+          <a:ln w="19050">
+            <a:solidFill>
+              <a:schemeClr val="accent4"/>
+            </a:solidFill>
+          </a:ln>
+        </p:spPr>
+        <p:style>
+          <a:lnRef idx="2">
+            <a:schemeClr val="accent1">
+              <a:shade val="50000"/>
+            </a:schemeClr>
+          </a:lnRef>
+          <a:fillRef idx="1">
+            <a:schemeClr val="accent1"/>
+          </a:fillRef>
+          <a:effectRef idx="0">
+            <a:schemeClr val="accent1"/>
+          </a:effectRef>
+          <a:fontRef idx="minor">
+            <a:schemeClr val="lt1"/>
+          </a:fontRef>
+        </p:style>
+        <p:txBody>
+          <a:bodyPr rtlCol="0" anchor="ctr"/>
+          <a:lstStyle/>
+          <a:p>
+            <a:pPr algn="ctr"/>
+            <a:r>
+              <a:rPr lang="es-MX" sz="1050" dirty="0" err="1">
+                <a:solidFill>
+                  <a:schemeClr val="accent2"/>
+                </a:solidFill>
+                <a:latin typeface="Proxima Nova" panose="020B0604020202020204" charset="0"/>
+              </a:rPr>
+              <a:t>Splines</a:t>
+            </a:r>
+            <a:endParaRPr lang="es-AR" sz="1050" dirty="0">
+              <a:solidFill>
+                <a:schemeClr val="accent2"/>
+              </a:solidFill>
+              <a:latin typeface="Proxima Nova" panose="020B0604020202020204" charset="0"/>
+            </a:endParaRPr>
+          </a:p>
+        </p:txBody>
+      </p:sp>
       <p:cxnSp>
         <p:nvCxnSpPr>
-          <p:cNvPr id="30" name="Conector recto 29">
+          <p:cNvPr id="51" name="Conector recto 50">
             <a:extLst>
               <a:ext uri="{FF2B5EF4-FFF2-40B4-BE49-F238E27FC236}">
-                <a16:creationId xmlns:a16="http://schemas.microsoft.com/office/drawing/2014/main" id="{0F40D13E-8445-47B1-A87F-A5950F6CF87E}"/>
+                <a16:creationId xmlns:a16="http://schemas.microsoft.com/office/drawing/2014/main" id="{EFE217A9-08AF-49BA-9AB4-D631A29A9D8D}"/>
               </a:ext>
             </a:extLst>
           </p:cNvPr>
           <p:cNvCxnSpPr>
             <a:cxnSpLocks/>
-            <a:stCxn id="11" idx="2"/>
           </p:cNvCxnSpPr>
           <p:nvPr/>
         </p:nvCxnSpPr>
         <p:spPr>
           <a:xfrm>
-            <a:off x="1281659" y="2572687"/>
-            <a:ext cx="547038" cy="373679"/>
+            <a:off x="947106" y="3267612"/>
+            <a:ext cx="0" cy="274255"/>
           </a:xfrm>
           <a:prstGeom prst="line">
             <a:avLst/>
           </a:prstGeom>
-          <a:ln w="12700">
+          <a:ln w="19050">
             <a:solidFill>
               <a:schemeClr val="accent4"/>
             </a:solidFill>
@@ -23903,34 +23725,153 @@
           </a:fontRef>
         </p:style>
       </p:cxnSp>
+      <p:sp>
+        <p:nvSpPr>
+          <p:cNvPr id="49" name="Rectángulo: esquinas redondeadas 48">
+            <a:extLst>
+              <a:ext uri="{FF2B5EF4-FFF2-40B4-BE49-F238E27FC236}">
+                <a16:creationId xmlns:a16="http://schemas.microsoft.com/office/drawing/2014/main" id="{C4F8BF29-2D4F-4DDB-9887-90F0F3D0A277}"/>
+              </a:ext>
+            </a:extLst>
+          </p:cNvPr>
+          <p:cNvSpPr/>
+          <p:nvPr/>
+        </p:nvSpPr>
+        <p:spPr>
+          <a:xfrm>
+            <a:off x="2023672" y="3432749"/>
+            <a:ext cx="3477717" cy="922560"/>
+          </a:xfrm>
+          <a:prstGeom prst="roundRect">
+            <a:avLst/>
+          </a:prstGeom>
+          <a:noFill/>
+          <a:ln>
+            <a:solidFill>
+              <a:schemeClr val="accent4"/>
+            </a:solidFill>
+            <a:prstDash val="dash"/>
+          </a:ln>
+        </p:spPr>
+        <p:style>
+          <a:lnRef idx="2">
+            <a:schemeClr val="accent1">
+              <a:shade val="50000"/>
+            </a:schemeClr>
+          </a:lnRef>
+          <a:fillRef idx="1">
+            <a:schemeClr val="accent1"/>
+          </a:fillRef>
+          <a:effectRef idx="0">
+            <a:schemeClr val="accent1"/>
+          </a:effectRef>
+          <a:fontRef idx="minor">
+            <a:schemeClr val="lt1"/>
+          </a:fontRef>
+        </p:style>
+        <p:txBody>
+          <a:bodyPr rtlCol="0" anchor="ctr"/>
+          <a:lstStyle/>
+          <a:p>
+            <a:pPr algn="ctr"/>
+            <a:endParaRPr lang="es-AR"/>
+          </a:p>
+        </p:txBody>
+      </p:sp>
+      <p:sp>
+        <p:nvSpPr>
+          <p:cNvPr id="57" name="Hexágono 56">
+            <a:extLst>
+              <a:ext uri="{FF2B5EF4-FFF2-40B4-BE49-F238E27FC236}">
+                <a16:creationId xmlns:a16="http://schemas.microsoft.com/office/drawing/2014/main" id="{075E4624-6159-4D88-B99C-4BAE0492B27D}"/>
+              </a:ext>
+            </a:extLst>
+          </p:cNvPr>
+          <p:cNvSpPr/>
+          <p:nvPr/>
+        </p:nvSpPr>
+        <p:spPr>
+          <a:xfrm>
+            <a:off x="5512130" y="4268154"/>
+            <a:ext cx="1080000" cy="720000"/>
+          </a:xfrm>
+          <a:prstGeom prst="hexagon">
+            <a:avLst/>
+          </a:prstGeom>
+          <a:noFill/>
+          <a:ln w="19050">
+            <a:solidFill>
+              <a:schemeClr val="accent4"/>
+            </a:solidFill>
+          </a:ln>
+        </p:spPr>
+        <p:style>
+          <a:lnRef idx="2">
+            <a:schemeClr val="accent1">
+              <a:shade val="50000"/>
+            </a:schemeClr>
+          </a:lnRef>
+          <a:fillRef idx="1">
+            <a:schemeClr val="accent1"/>
+          </a:fillRef>
+          <a:effectRef idx="0">
+            <a:schemeClr val="accent1"/>
+          </a:effectRef>
+          <a:fontRef idx="minor">
+            <a:schemeClr val="lt1"/>
+          </a:fontRef>
+        </p:style>
+        <p:txBody>
+          <a:bodyPr rtlCol="0" anchor="ctr"/>
+          <a:lstStyle/>
+          <a:p>
+            <a:pPr algn="ctr"/>
+            <a:r>
+              <a:rPr lang="es-MX" sz="1050" dirty="0">
+                <a:solidFill>
+                  <a:schemeClr val="accent2"/>
+                </a:solidFill>
+                <a:latin typeface="Proxima Nova" panose="020B0604020202020204" charset="0"/>
+              </a:rPr>
+              <a:t>LASSO</a:t>
+            </a:r>
+            <a:endParaRPr lang="es-AR" sz="1050" dirty="0">
+              <a:solidFill>
+                <a:schemeClr val="accent2"/>
+              </a:solidFill>
+              <a:latin typeface="Proxima Nova" panose="020B0604020202020204" charset="0"/>
+            </a:endParaRPr>
+          </a:p>
+        </p:txBody>
+      </p:sp>
       <p:cxnSp>
         <p:nvCxnSpPr>
-          <p:cNvPr id="33" name="Conector recto 32">
+          <p:cNvPr id="53" name="Conector: angular 52">
             <a:extLst>
               <a:ext uri="{FF2B5EF4-FFF2-40B4-BE49-F238E27FC236}">
-                <a16:creationId xmlns:a16="http://schemas.microsoft.com/office/drawing/2014/main" id="{7CEEF7BB-59F9-4FD2-B3AB-532406514BF7}"/>
+                <a16:creationId xmlns:a16="http://schemas.microsoft.com/office/drawing/2014/main" id="{FF24B52B-AE9A-42DC-BAE2-53BE82F50593}"/>
               </a:ext>
             </a:extLst>
           </p:cNvPr>
           <p:cNvCxnSpPr>
-            <a:cxnSpLocks/>
-            <a:stCxn id="9" idx="2"/>
-            <a:endCxn id="11" idx="0"/>
+            <a:stCxn id="57" idx="3"/>
+            <a:endCxn id="49" idx="2"/>
           </p:cNvCxnSpPr>
           <p:nvPr/>
         </p:nvCxnSpPr>
         <p:spPr>
-          <a:xfrm flipH="1">
-            <a:off x="1281659" y="1858135"/>
-            <a:ext cx="2113613" cy="257352"/>
+          <a:xfrm rot="10800000">
+            <a:off x="3762532" y="4355310"/>
+            <a:ext cx="1749599" cy="272845"/>
           </a:xfrm>
-          <a:prstGeom prst="line">
+          <a:prstGeom prst="bentConnector2">
             <a:avLst/>
           </a:prstGeom>
-          <a:ln w="12700">
+          <a:ln w="19050">
             <a:solidFill>
               <a:schemeClr val="accent4"/>
             </a:solidFill>
+            <a:tailEnd type="triangle"/>
           </a:ln>
         </p:spPr>
         <p:style>
@@ -23948,788 +23889,10 @@
           </a:fontRef>
         </p:style>
       </p:cxnSp>
-      <p:cxnSp>
-        <p:nvCxnSpPr>
-          <p:cNvPr id="36" name="Conector recto 35">
-            <a:extLst>
-              <a:ext uri="{FF2B5EF4-FFF2-40B4-BE49-F238E27FC236}">
-                <a16:creationId xmlns:a16="http://schemas.microsoft.com/office/drawing/2014/main" id="{E6DF477B-E1A1-420E-99FE-F4FEFB8B0159}"/>
-              </a:ext>
-            </a:extLst>
-          </p:cNvPr>
-          <p:cNvCxnSpPr>
-            <a:cxnSpLocks/>
-            <a:stCxn id="9" idx="2"/>
-            <a:endCxn id="12" idx="0"/>
-          </p:cNvCxnSpPr>
-          <p:nvPr/>
-        </p:nvCxnSpPr>
-        <p:spPr>
-          <a:xfrm>
-            <a:off x="3395272" y="1858135"/>
-            <a:ext cx="914400" cy="256415"/>
-          </a:xfrm>
-          <a:prstGeom prst="line">
-            <a:avLst/>
-          </a:prstGeom>
-          <a:ln w="12700">
-            <a:solidFill>
-              <a:schemeClr val="accent4"/>
-            </a:solidFill>
-          </a:ln>
-        </p:spPr>
-        <p:style>
-          <a:lnRef idx="1">
-            <a:schemeClr val="accent1"/>
-          </a:lnRef>
-          <a:fillRef idx="0">
-            <a:schemeClr val="accent1"/>
-          </a:fillRef>
-          <a:effectRef idx="0">
-            <a:schemeClr val="accent1"/>
-          </a:effectRef>
-          <a:fontRef idx="minor">
-            <a:schemeClr val="tx1"/>
-          </a:fontRef>
-        </p:style>
-      </p:cxnSp>
-      <p:cxnSp>
-        <p:nvCxnSpPr>
-          <p:cNvPr id="39" name="Conector recto 38">
-            <a:extLst>
-              <a:ext uri="{FF2B5EF4-FFF2-40B4-BE49-F238E27FC236}">
-                <a16:creationId xmlns:a16="http://schemas.microsoft.com/office/drawing/2014/main" id="{8DED36CA-EBB0-4414-9220-3514866BE20E}"/>
-              </a:ext>
-            </a:extLst>
-          </p:cNvPr>
-          <p:cNvCxnSpPr>
-            <a:cxnSpLocks/>
-            <a:stCxn id="5" idx="2"/>
-            <a:endCxn id="9" idx="0"/>
-          </p:cNvCxnSpPr>
-          <p:nvPr/>
-        </p:nvCxnSpPr>
-        <p:spPr>
-          <a:xfrm flipH="1">
-            <a:off x="3395272" y="1170442"/>
-            <a:ext cx="1828800" cy="230493"/>
-          </a:xfrm>
-          <a:prstGeom prst="line">
-            <a:avLst/>
-          </a:prstGeom>
-          <a:ln w="12700">
-            <a:solidFill>
-              <a:schemeClr val="accent4"/>
-            </a:solidFill>
-          </a:ln>
-        </p:spPr>
-        <p:style>
-          <a:lnRef idx="1">
-            <a:schemeClr val="accent1"/>
-          </a:lnRef>
-          <a:fillRef idx="0">
-            <a:schemeClr val="accent1"/>
-          </a:fillRef>
-          <a:effectRef idx="0">
-            <a:schemeClr val="accent1"/>
-          </a:effectRef>
-          <a:fontRef idx="minor">
-            <a:schemeClr val="tx1"/>
-          </a:fontRef>
-        </p:style>
-      </p:cxnSp>
-      <p:cxnSp>
-        <p:nvCxnSpPr>
-          <p:cNvPr id="42" name="Conector recto 41">
-            <a:extLst>
-              <a:ext uri="{FF2B5EF4-FFF2-40B4-BE49-F238E27FC236}">
-                <a16:creationId xmlns:a16="http://schemas.microsoft.com/office/drawing/2014/main" id="{36296CC0-4538-4702-BAE5-618BF6EC547F}"/>
-              </a:ext>
-            </a:extLst>
-          </p:cNvPr>
-          <p:cNvCxnSpPr>
-            <a:cxnSpLocks/>
-            <a:stCxn id="5" idx="2"/>
-            <a:endCxn id="10" idx="0"/>
-          </p:cNvCxnSpPr>
-          <p:nvPr/>
-        </p:nvCxnSpPr>
-        <p:spPr>
-          <a:xfrm>
-            <a:off x="5224072" y="1170442"/>
-            <a:ext cx="1828800" cy="230493"/>
-          </a:xfrm>
-          <a:prstGeom prst="line">
-            <a:avLst/>
-          </a:prstGeom>
-          <a:ln w="12700">
-            <a:solidFill>
-              <a:schemeClr val="accent4"/>
-            </a:solidFill>
-          </a:ln>
-        </p:spPr>
-        <p:style>
-          <a:lnRef idx="1">
-            <a:schemeClr val="accent1"/>
-          </a:lnRef>
-          <a:fillRef idx="0">
-            <a:schemeClr val="accent1"/>
-          </a:fillRef>
-          <a:effectRef idx="0">
-            <a:schemeClr val="accent1"/>
-          </a:effectRef>
-          <a:fontRef idx="minor">
-            <a:schemeClr val="tx1"/>
-          </a:fontRef>
-        </p:style>
-      </p:cxnSp>
-      <p:cxnSp>
-        <p:nvCxnSpPr>
-          <p:cNvPr id="45" name="Conector recto 44">
-            <a:extLst>
-              <a:ext uri="{FF2B5EF4-FFF2-40B4-BE49-F238E27FC236}">
-                <a16:creationId xmlns:a16="http://schemas.microsoft.com/office/drawing/2014/main" id="{0A0F49A6-13A2-455D-BE09-F1DA863A84CA}"/>
-              </a:ext>
-            </a:extLst>
-          </p:cNvPr>
-          <p:cNvCxnSpPr>
-            <a:cxnSpLocks/>
-            <a:stCxn id="12" idx="2"/>
-            <a:endCxn id="23" idx="0"/>
-          </p:cNvCxnSpPr>
-          <p:nvPr/>
-        </p:nvCxnSpPr>
-        <p:spPr>
-          <a:xfrm flipH="1">
-            <a:off x="3547672" y="2571750"/>
-            <a:ext cx="762000" cy="639308"/>
-          </a:xfrm>
-          <a:prstGeom prst="line">
-            <a:avLst/>
-          </a:prstGeom>
-          <a:ln w="12700">
-            <a:solidFill>
-              <a:schemeClr val="accent4"/>
-            </a:solidFill>
-          </a:ln>
-        </p:spPr>
-        <p:style>
-          <a:lnRef idx="1">
-            <a:schemeClr val="accent1"/>
-          </a:lnRef>
-          <a:fillRef idx="0">
-            <a:schemeClr val="accent1"/>
-          </a:fillRef>
-          <a:effectRef idx="0">
-            <a:schemeClr val="accent1"/>
-          </a:effectRef>
-          <a:fontRef idx="minor">
-            <a:schemeClr val="tx1"/>
-          </a:fontRef>
-        </p:style>
-      </p:cxnSp>
-      <p:cxnSp>
-        <p:nvCxnSpPr>
-          <p:cNvPr id="48" name="Conector recto 47">
-            <a:extLst>
-              <a:ext uri="{FF2B5EF4-FFF2-40B4-BE49-F238E27FC236}">
-                <a16:creationId xmlns:a16="http://schemas.microsoft.com/office/drawing/2014/main" id="{CE8EE3FF-AC20-4199-88E8-E4E59FB51FDC}"/>
-              </a:ext>
-            </a:extLst>
-          </p:cNvPr>
-          <p:cNvCxnSpPr>
-            <a:cxnSpLocks/>
-            <a:stCxn id="12" idx="2"/>
-            <a:endCxn id="24" idx="0"/>
-          </p:cNvCxnSpPr>
-          <p:nvPr/>
-        </p:nvCxnSpPr>
-        <p:spPr>
-          <a:xfrm>
-            <a:off x="4309672" y="2571750"/>
-            <a:ext cx="1226696" cy="637416"/>
-          </a:xfrm>
-          <a:prstGeom prst="line">
-            <a:avLst/>
-          </a:prstGeom>
-          <a:ln w="12700">
-            <a:solidFill>
-              <a:schemeClr val="accent4"/>
-            </a:solidFill>
-          </a:ln>
-        </p:spPr>
-        <p:style>
-          <a:lnRef idx="1">
-            <a:schemeClr val="accent1"/>
-          </a:lnRef>
-          <a:fillRef idx="0">
-            <a:schemeClr val="accent1"/>
-          </a:fillRef>
-          <a:effectRef idx="0">
-            <a:schemeClr val="accent1"/>
-          </a:effectRef>
-          <a:fontRef idx="minor">
-            <a:schemeClr val="tx1"/>
-          </a:fontRef>
-        </p:style>
-      </p:cxnSp>
-      <p:cxnSp>
-        <p:nvCxnSpPr>
-          <p:cNvPr id="60" name="Conector recto 59">
-            <a:extLst>
-              <a:ext uri="{FF2B5EF4-FFF2-40B4-BE49-F238E27FC236}">
-                <a16:creationId xmlns:a16="http://schemas.microsoft.com/office/drawing/2014/main" id="{3E819977-5368-4D96-9F5B-91B50EC716FF}"/>
-              </a:ext>
-            </a:extLst>
-          </p:cNvPr>
-          <p:cNvCxnSpPr>
-            <a:stCxn id="10" idx="2"/>
-          </p:cNvCxnSpPr>
-          <p:nvPr/>
-        </p:nvCxnSpPr>
-        <p:spPr>
-          <a:xfrm flipH="1">
-            <a:off x="6570019" y="1858135"/>
-            <a:ext cx="482853" cy="275777"/>
-          </a:xfrm>
-          <a:prstGeom prst="line">
-            <a:avLst/>
-          </a:prstGeom>
-          <a:ln w="12700">
-            <a:solidFill>
-              <a:schemeClr val="accent4"/>
-            </a:solidFill>
-          </a:ln>
-        </p:spPr>
-        <p:style>
-          <a:lnRef idx="1">
-            <a:schemeClr val="accent1"/>
-          </a:lnRef>
-          <a:fillRef idx="0">
-            <a:schemeClr val="accent1"/>
-          </a:fillRef>
-          <a:effectRef idx="0">
-            <a:schemeClr val="accent1"/>
-          </a:effectRef>
-          <a:fontRef idx="minor">
-            <a:schemeClr val="tx1"/>
-          </a:fontRef>
-        </p:style>
-      </p:cxnSp>
-      <p:cxnSp>
-        <p:nvCxnSpPr>
-          <p:cNvPr id="63" name="Conector recto 62">
-            <a:extLst>
-              <a:ext uri="{FF2B5EF4-FFF2-40B4-BE49-F238E27FC236}">
-                <a16:creationId xmlns:a16="http://schemas.microsoft.com/office/drawing/2014/main" id="{74C57113-C9A9-45EB-B72F-220236E69265}"/>
-              </a:ext>
-            </a:extLst>
-          </p:cNvPr>
-          <p:cNvCxnSpPr>
-            <a:cxnSpLocks/>
-            <a:stCxn id="10" idx="2"/>
-          </p:cNvCxnSpPr>
-          <p:nvPr/>
-        </p:nvCxnSpPr>
-        <p:spPr>
-          <a:xfrm>
-            <a:off x="7052872" y="1858135"/>
-            <a:ext cx="650539" cy="275777"/>
-          </a:xfrm>
-          <a:prstGeom prst="line">
-            <a:avLst/>
-          </a:prstGeom>
-          <a:ln w="12700">
-            <a:solidFill>
-              <a:schemeClr val="accent4"/>
-            </a:solidFill>
-          </a:ln>
-        </p:spPr>
-        <p:style>
-          <a:lnRef idx="1">
-            <a:schemeClr val="accent1"/>
-          </a:lnRef>
-          <a:fillRef idx="0">
-            <a:schemeClr val="accent1"/>
-          </a:fillRef>
-          <a:effectRef idx="0">
-            <a:schemeClr val="accent1"/>
-          </a:effectRef>
-          <a:fontRef idx="minor">
-            <a:schemeClr val="tx1"/>
-          </a:fontRef>
-        </p:style>
-      </p:cxnSp>
-      <p:grpSp>
-        <p:nvGrpSpPr>
-          <p:cNvPr id="2" name="Grupo 1">
-            <a:extLst>
-              <a:ext uri="{FF2B5EF4-FFF2-40B4-BE49-F238E27FC236}">
-                <a16:creationId xmlns:a16="http://schemas.microsoft.com/office/drawing/2014/main" id="{922EF3F9-B91F-4166-B320-31CC2D5F0B44}"/>
-              </a:ext>
-            </a:extLst>
-          </p:cNvPr>
-          <p:cNvGrpSpPr/>
-          <p:nvPr/>
-        </p:nvGrpSpPr>
-        <p:grpSpPr>
-          <a:xfrm>
-            <a:off x="2323476" y="3662347"/>
-            <a:ext cx="4451377" cy="993357"/>
-            <a:chOff x="2231068" y="3666366"/>
-            <a:chExt cx="4451377" cy="993357"/>
-          </a:xfrm>
-        </p:grpSpPr>
-        <p:sp>
-          <p:nvSpPr>
-            <p:cNvPr id="31" name="Hexágono 30">
-              <a:extLst>
-                <a:ext uri="{FF2B5EF4-FFF2-40B4-BE49-F238E27FC236}">
-                  <a16:creationId xmlns:a16="http://schemas.microsoft.com/office/drawing/2014/main" id="{8CDE4EA9-DC0F-4DBE-A392-BE4592892E04}"/>
-                </a:ext>
-              </a:extLst>
-            </p:cNvPr>
-            <p:cNvSpPr/>
-            <p:nvPr/>
-          </p:nvSpPr>
-          <p:spPr>
-            <a:xfrm>
-              <a:off x="2231068" y="3939723"/>
-              <a:ext cx="1087946" cy="720000"/>
-            </a:xfrm>
-            <a:prstGeom prst="hexagon">
-              <a:avLst/>
-            </a:prstGeom>
-            <a:noFill/>
-            <a:ln w="12700">
-              <a:solidFill>
-                <a:schemeClr val="accent4"/>
-              </a:solidFill>
-            </a:ln>
-          </p:spPr>
-          <p:style>
-            <a:lnRef idx="2">
-              <a:schemeClr val="accent1">
-                <a:shade val="50000"/>
-              </a:schemeClr>
-            </a:lnRef>
-            <a:fillRef idx="1">
-              <a:schemeClr val="accent1"/>
-            </a:fillRef>
-            <a:effectRef idx="0">
-              <a:schemeClr val="accent1"/>
-            </a:effectRef>
-            <a:fontRef idx="minor">
-              <a:schemeClr val="lt1"/>
-            </a:fontRef>
-          </p:style>
-          <p:txBody>
-            <a:bodyPr rtlCol="0" anchor="ctr"/>
-            <a:lstStyle/>
-            <a:p>
-              <a:pPr algn="ctr"/>
-              <a:r>
-                <a:rPr lang="es-MX" sz="1050">
-                  <a:solidFill>
-                    <a:schemeClr val="accent2"/>
-                  </a:solidFill>
-                  <a:latin typeface="Proxima Nova" panose="020B0604020202020204" charset="0"/>
-                </a:rPr>
-                <a:t>KNN</a:t>
-              </a:r>
-              <a:endParaRPr lang="es-AR" sz="1050" dirty="0">
-                <a:solidFill>
-                  <a:schemeClr val="accent2"/>
-                </a:solidFill>
-                <a:latin typeface="Proxima Nova" panose="020B0604020202020204" charset="0"/>
-              </a:endParaRPr>
-            </a:p>
-          </p:txBody>
-        </p:sp>
-        <p:sp>
-          <p:nvSpPr>
-            <p:cNvPr id="32" name="Hexágono 31">
-              <a:extLst>
-                <a:ext uri="{FF2B5EF4-FFF2-40B4-BE49-F238E27FC236}">
-                  <a16:creationId xmlns:a16="http://schemas.microsoft.com/office/drawing/2014/main" id="{2DDE98BC-CE4D-4D50-A8FD-2EE53BF3A9C5}"/>
-                </a:ext>
-              </a:extLst>
-            </p:cNvPr>
-            <p:cNvSpPr/>
-            <p:nvPr/>
-          </p:nvSpPr>
-          <p:spPr>
-            <a:xfrm>
-              <a:off x="4465909" y="3939723"/>
-              <a:ext cx="1087946" cy="720000"/>
-            </a:xfrm>
-            <a:prstGeom prst="hexagon">
-              <a:avLst/>
-            </a:prstGeom>
-            <a:noFill/>
-            <a:ln w="12700">
-              <a:solidFill>
-                <a:schemeClr val="accent4"/>
-              </a:solidFill>
-            </a:ln>
-          </p:spPr>
-          <p:style>
-            <a:lnRef idx="2">
-              <a:schemeClr val="accent1">
-                <a:shade val="50000"/>
-              </a:schemeClr>
-            </a:lnRef>
-            <a:fillRef idx="1">
-              <a:schemeClr val="accent1"/>
-            </a:fillRef>
-            <a:effectRef idx="0">
-              <a:schemeClr val="accent1"/>
-            </a:effectRef>
-            <a:fontRef idx="minor">
-              <a:schemeClr val="lt1"/>
-            </a:fontRef>
-          </p:style>
-          <p:txBody>
-            <a:bodyPr rtlCol="0" anchor="ctr"/>
-            <a:lstStyle/>
-            <a:p>
-              <a:pPr algn="ctr"/>
-              <a:r>
-                <a:rPr lang="es-MX" sz="1050" dirty="0">
-                  <a:solidFill>
-                    <a:schemeClr val="accent2"/>
-                  </a:solidFill>
-                  <a:latin typeface="Proxima Nova" panose="020B0604020202020204" charset="0"/>
-                </a:rPr>
-                <a:t>Regresión logística</a:t>
-              </a:r>
-              <a:endParaRPr lang="es-AR" sz="1050" dirty="0">
-                <a:solidFill>
-                  <a:schemeClr val="accent2"/>
-                </a:solidFill>
-                <a:latin typeface="Proxima Nova" panose="020B0604020202020204" charset="0"/>
-              </a:endParaRPr>
-            </a:p>
-          </p:txBody>
-        </p:sp>
-        <p:sp>
-          <p:nvSpPr>
-            <p:cNvPr id="34" name="Hexágono 33">
-              <a:extLst>
-                <a:ext uri="{FF2B5EF4-FFF2-40B4-BE49-F238E27FC236}">
-                  <a16:creationId xmlns:a16="http://schemas.microsoft.com/office/drawing/2014/main" id="{3B2E5364-BBE2-46FE-9980-8B549D4CF34F}"/>
-                </a:ext>
-              </a:extLst>
-            </p:cNvPr>
-            <p:cNvSpPr/>
-            <p:nvPr/>
-          </p:nvSpPr>
-          <p:spPr>
-            <a:xfrm>
-              <a:off x="5594499" y="3939723"/>
-              <a:ext cx="1087946" cy="720000"/>
-            </a:xfrm>
-            <a:prstGeom prst="hexagon">
-              <a:avLst/>
-            </a:prstGeom>
-            <a:noFill/>
-            <a:ln w="12700">
-              <a:solidFill>
-                <a:schemeClr val="accent4"/>
-              </a:solidFill>
-            </a:ln>
-          </p:spPr>
-          <p:style>
-            <a:lnRef idx="2">
-              <a:schemeClr val="accent1">
-                <a:shade val="50000"/>
-              </a:schemeClr>
-            </a:lnRef>
-            <a:fillRef idx="1">
-              <a:schemeClr val="accent1"/>
-            </a:fillRef>
-            <a:effectRef idx="0">
-              <a:schemeClr val="accent1"/>
-            </a:effectRef>
-            <a:fontRef idx="minor">
-              <a:schemeClr val="lt1"/>
-            </a:fontRef>
-          </p:style>
-          <p:txBody>
-            <a:bodyPr rtlCol="0" anchor="ctr"/>
-            <a:lstStyle/>
-            <a:p>
-              <a:pPr algn="ctr"/>
-              <a:r>
-                <a:rPr lang="es-MX" sz="1050" dirty="0">
-                  <a:solidFill>
-                    <a:schemeClr val="accent2"/>
-                  </a:solidFill>
-                  <a:latin typeface="Proxima Nova" panose="020B0604020202020204" charset="0"/>
-                </a:rPr>
-                <a:t>LDA/QDA</a:t>
-              </a:r>
-              <a:endParaRPr lang="es-AR" sz="1050" dirty="0">
-                <a:solidFill>
-                  <a:schemeClr val="accent2"/>
-                </a:solidFill>
-                <a:latin typeface="Proxima Nova" panose="020B0604020202020204" charset="0"/>
-              </a:endParaRPr>
-            </a:p>
-          </p:txBody>
-        </p:sp>
-        <p:cxnSp>
-          <p:nvCxnSpPr>
-            <p:cNvPr id="35" name="Conector recto 34">
-              <a:extLst>
-                <a:ext uri="{FF2B5EF4-FFF2-40B4-BE49-F238E27FC236}">
-                  <a16:creationId xmlns:a16="http://schemas.microsoft.com/office/drawing/2014/main" id="{CF4D68AB-849E-4960-AEA7-29EAA247BAAC}"/>
-                </a:ext>
-              </a:extLst>
-            </p:cNvPr>
-            <p:cNvCxnSpPr>
-              <a:cxnSpLocks/>
-            </p:cNvCxnSpPr>
-            <p:nvPr/>
-          </p:nvCxnSpPr>
-          <p:spPr>
-            <a:xfrm flipH="1">
-              <a:off x="2785730" y="3668258"/>
-              <a:ext cx="761942" cy="258700"/>
-            </a:xfrm>
-            <a:prstGeom prst="line">
-              <a:avLst/>
-            </a:prstGeom>
-            <a:ln w="12700">
-              <a:solidFill>
-                <a:schemeClr val="accent4"/>
-              </a:solidFill>
-            </a:ln>
-          </p:spPr>
-          <p:style>
-            <a:lnRef idx="1">
-              <a:schemeClr val="accent1"/>
-            </a:lnRef>
-            <a:fillRef idx="0">
-              <a:schemeClr val="accent1"/>
-            </a:fillRef>
-            <a:effectRef idx="0">
-              <a:schemeClr val="accent1"/>
-            </a:effectRef>
-            <a:fontRef idx="minor">
-              <a:schemeClr val="tx1"/>
-            </a:fontRef>
-          </p:style>
-        </p:cxnSp>
-        <p:cxnSp>
-          <p:nvCxnSpPr>
-            <p:cNvPr id="37" name="Conector recto 36">
-              <a:extLst>
-                <a:ext uri="{FF2B5EF4-FFF2-40B4-BE49-F238E27FC236}">
-                  <a16:creationId xmlns:a16="http://schemas.microsoft.com/office/drawing/2014/main" id="{3AB9803C-83AF-44A4-BDAD-31E4C5DC0E09}"/>
-                </a:ext>
-              </a:extLst>
-            </p:cNvPr>
-            <p:cNvCxnSpPr>
-              <a:cxnSpLocks/>
-            </p:cNvCxnSpPr>
-            <p:nvPr/>
-          </p:nvCxnSpPr>
-          <p:spPr>
-            <a:xfrm flipH="1">
-              <a:off x="5009882" y="3666366"/>
-              <a:ext cx="526486" cy="275524"/>
-            </a:xfrm>
-            <a:prstGeom prst="line">
-              <a:avLst/>
-            </a:prstGeom>
-            <a:ln w="12700">
-              <a:solidFill>
-                <a:schemeClr val="accent4"/>
-              </a:solidFill>
-            </a:ln>
-          </p:spPr>
-          <p:style>
-            <a:lnRef idx="1">
-              <a:schemeClr val="accent1"/>
-            </a:lnRef>
-            <a:fillRef idx="0">
-              <a:schemeClr val="accent1"/>
-            </a:fillRef>
-            <a:effectRef idx="0">
-              <a:schemeClr val="accent1"/>
-            </a:effectRef>
-            <a:fontRef idx="minor">
-              <a:schemeClr val="tx1"/>
-            </a:fontRef>
-          </p:style>
-        </p:cxnSp>
-        <p:cxnSp>
-          <p:nvCxnSpPr>
-            <p:cNvPr id="38" name="Conector recto 37">
-              <a:extLst>
-                <a:ext uri="{FF2B5EF4-FFF2-40B4-BE49-F238E27FC236}">
-                  <a16:creationId xmlns:a16="http://schemas.microsoft.com/office/drawing/2014/main" id="{32A1B75D-BC3D-44B1-8169-2E3870CF89EE}"/>
-                </a:ext>
-              </a:extLst>
-            </p:cNvPr>
-            <p:cNvCxnSpPr>
-              <a:cxnSpLocks/>
-            </p:cNvCxnSpPr>
-            <p:nvPr/>
-          </p:nvCxnSpPr>
-          <p:spPr>
-            <a:xfrm>
-              <a:off x="5536368" y="3666366"/>
-              <a:ext cx="602104" cy="275524"/>
-            </a:xfrm>
-            <a:prstGeom prst="line">
-              <a:avLst/>
-            </a:prstGeom>
-            <a:ln w="12700">
-              <a:solidFill>
-                <a:schemeClr val="accent4"/>
-              </a:solidFill>
-            </a:ln>
-          </p:spPr>
-          <p:style>
-            <a:lnRef idx="1">
-              <a:schemeClr val="accent1"/>
-            </a:lnRef>
-            <a:fillRef idx="0">
-              <a:schemeClr val="accent1"/>
-            </a:fillRef>
-            <a:effectRef idx="0">
-              <a:schemeClr val="accent1"/>
-            </a:effectRef>
-            <a:fontRef idx="minor">
-              <a:schemeClr val="tx1"/>
-            </a:fontRef>
-          </p:style>
-        </p:cxnSp>
-        <p:sp>
-          <p:nvSpPr>
-            <p:cNvPr id="40" name="Hexágono 39">
-              <a:extLst>
-                <a:ext uri="{FF2B5EF4-FFF2-40B4-BE49-F238E27FC236}">
-                  <a16:creationId xmlns:a16="http://schemas.microsoft.com/office/drawing/2014/main" id="{14FC8F61-2BED-46FC-9FA3-67A3C59C5582}"/>
-                </a:ext>
-              </a:extLst>
-            </p:cNvPr>
-            <p:cNvSpPr/>
-            <p:nvPr/>
-          </p:nvSpPr>
-          <p:spPr>
-            <a:xfrm>
-              <a:off x="3348488" y="3939723"/>
-              <a:ext cx="1087946" cy="720000"/>
-            </a:xfrm>
-            <a:prstGeom prst="hexagon">
-              <a:avLst/>
-            </a:prstGeom>
-            <a:noFill/>
-            <a:ln w="12700">
-              <a:solidFill>
-                <a:schemeClr val="accent4"/>
-              </a:solidFill>
-            </a:ln>
-          </p:spPr>
-          <p:style>
-            <a:lnRef idx="2">
-              <a:schemeClr val="accent1">
-                <a:shade val="50000"/>
-              </a:schemeClr>
-            </a:lnRef>
-            <a:fillRef idx="1">
-              <a:schemeClr val="accent1"/>
-            </a:fillRef>
-            <a:effectRef idx="0">
-              <a:schemeClr val="accent1"/>
-            </a:effectRef>
-            <a:fontRef idx="minor">
-              <a:schemeClr val="lt1"/>
-            </a:fontRef>
-          </p:style>
-          <p:txBody>
-            <a:bodyPr rtlCol="0" anchor="ctr"/>
-            <a:lstStyle/>
-            <a:p>
-              <a:pPr algn="ctr"/>
-              <a:r>
-                <a:rPr lang="es-MX" sz="1050" dirty="0" err="1">
-                  <a:solidFill>
-                    <a:schemeClr val="accent2"/>
-                  </a:solidFill>
-                  <a:latin typeface="Proxima Nova" panose="020B0604020202020204" charset="0"/>
-                </a:rPr>
-                <a:t>Naive</a:t>
-              </a:r>
-              <a:r>
-                <a:rPr lang="es-MX" sz="1050" dirty="0">
-                  <a:solidFill>
-                    <a:schemeClr val="accent2"/>
-                  </a:solidFill>
-                  <a:latin typeface="Proxima Nova" panose="020B0604020202020204" charset="0"/>
-                </a:rPr>
-                <a:t> Bayes</a:t>
-              </a:r>
-              <a:endParaRPr lang="es-AR" sz="1050" dirty="0">
-                <a:solidFill>
-                  <a:schemeClr val="accent2"/>
-                </a:solidFill>
-                <a:latin typeface="Proxima Nova" panose="020B0604020202020204" charset="0"/>
-              </a:endParaRPr>
-            </a:p>
-          </p:txBody>
-        </p:sp>
-        <p:cxnSp>
-          <p:nvCxnSpPr>
-            <p:cNvPr id="41" name="Conector recto 40">
-              <a:extLst>
-                <a:ext uri="{FF2B5EF4-FFF2-40B4-BE49-F238E27FC236}">
-                  <a16:creationId xmlns:a16="http://schemas.microsoft.com/office/drawing/2014/main" id="{948FCC63-481E-4E1F-B00C-7CCCE06E24E9}"/>
-                </a:ext>
-              </a:extLst>
-            </p:cNvPr>
-            <p:cNvCxnSpPr>
-              <a:cxnSpLocks/>
-            </p:cNvCxnSpPr>
-            <p:nvPr/>
-          </p:nvCxnSpPr>
-          <p:spPr>
-            <a:xfrm>
-              <a:off x="3547672" y="3668258"/>
-              <a:ext cx="344789" cy="270528"/>
-            </a:xfrm>
-            <a:prstGeom prst="line">
-              <a:avLst/>
-            </a:prstGeom>
-            <a:ln w="12700">
-              <a:solidFill>
-                <a:schemeClr val="accent4"/>
-              </a:solidFill>
-            </a:ln>
-          </p:spPr>
-          <p:style>
-            <a:lnRef idx="1">
-              <a:schemeClr val="accent1"/>
-            </a:lnRef>
-            <a:fillRef idx="0">
-              <a:schemeClr val="accent1"/>
-            </a:fillRef>
-            <a:effectRef idx="0">
-              <a:schemeClr val="accent1"/>
-            </a:effectRef>
-            <a:fontRef idx="minor">
-              <a:schemeClr val="tx1"/>
-            </a:fontRef>
-          </p:style>
-        </p:cxnSp>
-      </p:grpSp>
     </p:spTree>
     <p:extLst>
       <p:ext uri="{BB962C8B-B14F-4D97-AF65-F5344CB8AC3E}">
-        <p14:creationId xmlns:p14="http://schemas.microsoft.com/office/powerpoint/2010/main" val="1640414692"/>
+        <p14:creationId xmlns:p14="http://schemas.microsoft.com/office/powerpoint/2010/main" val="4111567153"/>
       </p:ext>
     </p:extLst>
   </p:cSld>
